--- a/Documentazione.pptx
+++ b/Documentazione.pptx
@@ -5,10 +5,10 @@
     <p:sldMasterId id="2147483688" r:id="rId4"/>
   </p:sldMasterIdLst>
   <p:notesMasterIdLst>
-    <p:notesMasterId r:id="rId19"/>
+    <p:notesMasterId r:id="rId22"/>
   </p:notesMasterIdLst>
   <p:handoutMasterIdLst>
-    <p:handoutMasterId r:id="rId20"/>
+    <p:handoutMasterId r:id="rId23"/>
   </p:handoutMasterIdLst>
   <p:sldIdLst>
     <p:sldId id="898" r:id="rId5"/>
@@ -23,8 +23,11 @@
     <p:sldId id="1167" r:id="rId14"/>
     <p:sldId id="1166" r:id="rId15"/>
     <p:sldId id="1168" r:id="rId16"/>
-    <p:sldId id="1169" r:id="rId17"/>
-    <p:sldId id="1170" r:id="rId18"/>
+    <p:sldId id="1171" r:id="rId17"/>
+    <p:sldId id="1172" r:id="rId18"/>
+    <p:sldId id="1173" r:id="rId19"/>
+    <p:sldId id="1169" r:id="rId20"/>
+    <p:sldId id="1170" r:id="rId21"/>
   </p:sldIdLst>
   <p:sldSz cx="12192000" cy="6858000"/>
   <p:notesSz cx="6946900" cy="10058400"/>
@@ -4242,7 +4245,7 @@
           <p:nvPr/>
         </p:nvPicPr>
         <p:blipFill>
-          <a:blip r:embed="rId2">
+          <a:blip r:embed="rId2" cstate="print">
             <a:extLst>
               <a:ext uri="{28A0092B-C50C-407E-A947-70E740481C1C}">
                 <a14:useLocalDpi xmlns:a14="http://schemas.microsoft.com/office/drawing/2010/main" val="0"/>
@@ -4507,7 +4510,7 @@
           <p:nvPr/>
         </p:nvPicPr>
         <p:blipFill>
-          <a:blip r:embed="rId2">
+          <a:blip r:embed="rId2" cstate="print">
             <a:extLst>
               <a:ext uri="{28A0092B-C50C-407E-A947-70E740481C1C}">
                 <a14:useLocalDpi xmlns:a14="http://schemas.microsoft.com/office/drawing/2010/main" val="0"/>
@@ -4550,6 +4553,783 @@
         <p:cNvPr id="1" name="">
           <a:extLst>
             <a:ext uri="{FF2B5EF4-FFF2-40B4-BE49-F238E27FC236}">
+              <a16:creationId xmlns:a16="http://schemas.microsoft.com/office/drawing/2014/main" id="{A658C3B0-B6B6-3F92-9305-C2B4E5A810C4}"/>
+            </a:ext>
+          </a:extLst>
+        </p:cNvPr>
+        <p:cNvGrpSpPr/>
+        <p:nvPr/>
+      </p:nvGrpSpPr>
+      <p:grpSpPr>
+        <a:xfrm>
+          <a:off x="0" y="0"/>
+          <a:ext cx="0" cy="0"/>
+          <a:chOff x="0" y="0"/>
+          <a:chExt cx="0" cy="0"/>
+        </a:xfrm>
+      </p:grpSpPr>
+      <p:sp>
+        <p:nvSpPr>
+          <p:cNvPr id="2" name="Title 1">
+            <a:extLst>
+              <a:ext uri="{FF2B5EF4-FFF2-40B4-BE49-F238E27FC236}">
+                <a16:creationId xmlns:a16="http://schemas.microsoft.com/office/drawing/2014/main" id="{6D146E48-8387-6BCB-BF8D-56ACB5282DC3}"/>
+              </a:ext>
+            </a:extLst>
+          </p:cNvPr>
+          <p:cNvSpPr>
+            <a:spLocks noGrp="1"/>
+          </p:cNvSpPr>
+          <p:nvPr>
+            <p:ph type="title"/>
+          </p:nvPr>
+        </p:nvSpPr>
+        <p:spPr>
+          <a:xfrm>
+            <a:off x="766232" y="222381"/>
+            <a:ext cx="11425767" cy="720596"/>
+          </a:xfrm>
+        </p:spPr>
+        <p:txBody>
+          <a:bodyPr/>
+          <a:lstStyle/>
+          <a:p>
+            <a:r>
+              <a:rPr lang="it-IT" noProof="0" dirty="0" err="1"/>
+              <a:t>Simulation</a:t>
+            </a:r>
+            <a:r>
+              <a:rPr lang="it-IT" noProof="0" dirty="0"/>
+              <a:t> </a:t>
+            </a:r>
+            <a:r>
+              <a:rPr lang="it-IT" noProof="0" dirty="0" err="1"/>
+              <a:t>result</a:t>
+            </a:r>
+            <a:r>
+              <a:rPr lang="it-IT" noProof="0" dirty="0"/>
+              <a:t> – NFIFO = 32 (log2NFIFO = 5)</a:t>
+            </a:r>
+            <a:endParaRPr lang="en-US" dirty="0"/>
+          </a:p>
+        </p:txBody>
+      </p:sp>
+      <p:sp>
+        <p:nvSpPr>
+          <p:cNvPr id="4" name="Slide Number Placeholder 3">
+            <a:extLst>
+              <a:ext uri="{FF2B5EF4-FFF2-40B4-BE49-F238E27FC236}">
+                <a16:creationId xmlns:a16="http://schemas.microsoft.com/office/drawing/2014/main" id="{5C274522-E8B0-70B0-B932-82F42093A8FA}"/>
+              </a:ext>
+            </a:extLst>
+          </p:cNvPr>
+          <p:cNvSpPr>
+            <a:spLocks noGrp="1"/>
+          </p:cNvSpPr>
+          <p:nvPr>
+            <p:ph type="sldNum" sz="quarter" idx="11"/>
+          </p:nvPr>
+        </p:nvSpPr>
+        <p:spPr/>
+        <p:txBody>
+          <a:bodyPr/>
+          <a:lstStyle/>
+          <a:p>
+            <a:fld id="{2E6AEE32-87CF-4B18-ACD9-DC92317905A5}" type="slidenum">
+              <a:rPr lang="en-US" altLang="en-US" smtClean="0"/>
+              <a:pPr/>
+              <a:t>13</a:t>
+            </a:fld>
+            <a:endParaRPr lang="en-US" altLang="en-US" dirty="0"/>
+          </a:p>
+        </p:txBody>
+      </p:sp>
+      <p:sp>
+        <p:nvSpPr>
+          <p:cNvPr id="5" name="Footer Placeholder 4">
+            <a:extLst>
+              <a:ext uri="{FF2B5EF4-FFF2-40B4-BE49-F238E27FC236}">
+                <a16:creationId xmlns:a16="http://schemas.microsoft.com/office/drawing/2014/main" id="{76464019-9D64-296F-1FD9-0468375AAF8C}"/>
+              </a:ext>
+            </a:extLst>
+          </p:cNvPr>
+          <p:cNvSpPr>
+            <a:spLocks noGrp="1"/>
+          </p:cNvSpPr>
+          <p:nvPr>
+            <p:ph type="ftr" sz="quarter" idx="12"/>
+          </p:nvPr>
+        </p:nvSpPr>
+        <p:spPr/>
+        <p:txBody>
+          <a:bodyPr/>
+          <a:lstStyle/>
+          <a:p>
+            <a:pPr>
+              <a:defRPr/>
+            </a:pPr>
+            <a:endParaRPr lang="en-US" dirty="0"/>
+          </a:p>
+        </p:txBody>
+      </p:sp>
+      <p:sp>
+        <p:nvSpPr>
+          <p:cNvPr id="9" name="TextBox 8">
+            <a:extLst>
+              <a:ext uri="{FF2B5EF4-FFF2-40B4-BE49-F238E27FC236}">
+                <a16:creationId xmlns:a16="http://schemas.microsoft.com/office/drawing/2014/main" id="{41F6F672-B692-6245-5E7B-3440D884778A}"/>
+              </a:ext>
+            </a:extLst>
+          </p:cNvPr>
+          <p:cNvSpPr txBox="1"/>
+          <p:nvPr/>
+        </p:nvSpPr>
+        <p:spPr>
+          <a:xfrm>
+            <a:off x="766232" y="4464115"/>
+            <a:ext cx="10728857" cy="1477328"/>
+          </a:xfrm>
+          <a:prstGeom prst="rect">
+            <a:avLst/>
+          </a:prstGeom>
+          <a:noFill/>
+        </p:spPr>
+        <p:txBody>
+          <a:bodyPr wrap="square" rtlCol="0">
+            <a:spAutoFit/>
+          </a:bodyPr>
+          <a:lstStyle/>
+          <a:p>
+            <a:pPr marL="342900" indent="-342900">
+              <a:buFont typeface="Wingdings" panose="05000000000000000000" pitchFamily="2" charset="2"/>
+              <a:buChar char="q"/>
+            </a:pPr>
+            <a:endParaRPr lang="en-GB" sz="1800" b="1" dirty="0">
+              <a:solidFill>
+                <a:srgbClr val="0000FF"/>
+              </a:solidFill>
+            </a:endParaRPr>
+          </a:p>
+          <a:p>
+            <a:pPr marL="342900" indent="-342900">
+              <a:buFont typeface="Wingdings" panose="05000000000000000000" pitchFamily="2" charset="2"/>
+              <a:buChar char="q"/>
+            </a:pPr>
+            <a:endParaRPr lang="en-GB" sz="1800" b="1" dirty="0">
+              <a:solidFill>
+                <a:srgbClr val="0000FF"/>
+              </a:solidFill>
+            </a:endParaRPr>
+          </a:p>
+          <a:p>
+            <a:pPr marL="342900" indent="-342900">
+              <a:buFont typeface="Wingdings" panose="05000000000000000000" pitchFamily="2" charset="2"/>
+              <a:buChar char="q"/>
+            </a:pPr>
+            <a:endParaRPr lang="en-GB" sz="1800" b="1" dirty="0">
+              <a:solidFill>
+                <a:srgbClr val="0000FF"/>
+              </a:solidFill>
+            </a:endParaRPr>
+          </a:p>
+          <a:p>
+            <a:pPr marL="342900" indent="-342900">
+              <a:buFont typeface="Wingdings" panose="05000000000000000000" pitchFamily="2" charset="2"/>
+              <a:buChar char="q"/>
+            </a:pPr>
+            <a:endParaRPr lang="en-GB" sz="1800" b="1" dirty="0">
+              <a:solidFill>
+                <a:srgbClr val="0000FF"/>
+              </a:solidFill>
+            </a:endParaRPr>
+          </a:p>
+          <a:p>
+            <a:pPr marL="342900" indent="-342900">
+              <a:buFont typeface="Wingdings" panose="05000000000000000000" pitchFamily="2" charset="2"/>
+              <a:buChar char="q"/>
+            </a:pPr>
+            <a:r>
+              <a:rPr lang="en-GB" sz="1800" b="1" dirty="0">
+                <a:solidFill>
+                  <a:srgbClr val="0000FF"/>
+                </a:solidFill>
+              </a:rPr>
+              <a:t>We can see that the result still shows the presence of some noise</a:t>
+            </a:r>
+            <a:endParaRPr lang="en-GB" sz="1800" dirty="0"/>
+          </a:p>
+        </p:txBody>
+      </p:sp>
+      <p:pic>
+        <p:nvPicPr>
+          <p:cNvPr id="7" name="Immagine 6">
+            <a:extLst>
+              <a:ext uri="{FF2B5EF4-FFF2-40B4-BE49-F238E27FC236}">
+                <a16:creationId xmlns:a16="http://schemas.microsoft.com/office/drawing/2014/main" id="{826024C8-C8A0-DBD6-117E-4EB915FEA4A1}"/>
+              </a:ext>
+            </a:extLst>
+          </p:cNvPr>
+          <p:cNvPicPr>
+            <a:picLocks noChangeAspect="1"/>
+          </p:cNvPicPr>
+          <p:nvPr/>
+        </p:nvPicPr>
+        <p:blipFill>
+          <a:blip r:embed="rId2"/>
+          <a:stretch>
+            <a:fillRect/>
+          </a:stretch>
+        </p:blipFill>
+        <p:spPr>
+          <a:xfrm>
+            <a:off x="1142308" y="1309391"/>
+            <a:ext cx="9907383" cy="4239217"/>
+          </a:xfrm>
+          <a:prstGeom prst="rect">
+            <a:avLst/>
+          </a:prstGeom>
+        </p:spPr>
+      </p:pic>
+    </p:spTree>
+    <p:extLst>
+      <p:ext uri="{BB962C8B-B14F-4D97-AF65-F5344CB8AC3E}">
+        <p14:creationId xmlns:p14="http://schemas.microsoft.com/office/powerpoint/2010/main" val="2554209990"/>
+      </p:ext>
+    </p:extLst>
+  </p:cSld>
+  <p:clrMapOvr>
+    <a:masterClrMapping/>
+  </p:clrMapOvr>
+  <p:transition/>
+</p:sld>
+</file>
+
+<file path=ppt/slides/slide14.xml><?xml version="1.0" encoding="utf-8"?>
+<p:sld xmlns:a="http://schemas.openxmlformats.org/drawingml/2006/main" xmlns:r="http://schemas.openxmlformats.org/officeDocument/2006/relationships" xmlns:p="http://schemas.openxmlformats.org/presentationml/2006/main">
+  <p:cSld>
+    <p:spTree>
+      <p:nvGrpSpPr>
+        <p:cNvPr id="1" name="">
+          <a:extLst>
+            <a:ext uri="{FF2B5EF4-FFF2-40B4-BE49-F238E27FC236}">
+              <a16:creationId xmlns:a16="http://schemas.microsoft.com/office/drawing/2014/main" id="{127586F1-6BA8-268E-D00B-46879C6C45A0}"/>
+            </a:ext>
+          </a:extLst>
+        </p:cNvPr>
+        <p:cNvGrpSpPr/>
+        <p:nvPr/>
+      </p:nvGrpSpPr>
+      <p:grpSpPr>
+        <a:xfrm>
+          <a:off x="0" y="0"/>
+          <a:ext cx="0" cy="0"/>
+          <a:chOff x="0" y="0"/>
+          <a:chExt cx="0" cy="0"/>
+        </a:xfrm>
+      </p:grpSpPr>
+      <p:sp>
+        <p:nvSpPr>
+          <p:cNvPr id="2" name="Title 1">
+            <a:extLst>
+              <a:ext uri="{FF2B5EF4-FFF2-40B4-BE49-F238E27FC236}">
+                <a16:creationId xmlns:a16="http://schemas.microsoft.com/office/drawing/2014/main" id="{FB9FAF2D-6426-E7A3-054E-A5C07687CB4A}"/>
+              </a:ext>
+            </a:extLst>
+          </p:cNvPr>
+          <p:cNvSpPr>
+            <a:spLocks noGrp="1"/>
+          </p:cNvSpPr>
+          <p:nvPr>
+            <p:ph type="title"/>
+          </p:nvPr>
+        </p:nvSpPr>
+        <p:spPr>
+          <a:xfrm>
+            <a:off x="766232" y="222381"/>
+            <a:ext cx="11425767" cy="720596"/>
+          </a:xfrm>
+        </p:spPr>
+        <p:txBody>
+          <a:bodyPr/>
+          <a:lstStyle/>
+          <a:p>
+            <a:r>
+              <a:rPr lang="it-IT" dirty="0" err="1"/>
+              <a:t>Simulation</a:t>
+            </a:r>
+            <a:r>
+              <a:rPr lang="it-IT" dirty="0"/>
+              <a:t> </a:t>
+            </a:r>
+            <a:r>
+              <a:rPr lang="it-IT" dirty="0" err="1"/>
+              <a:t>result</a:t>
+            </a:r>
+            <a:r>
+              <a:rPr lang="it-IT" dirty="0"/>
+              <a:t> – NFIFO = 64 (log2NFIFO = 6)</a:t>
+            </a:r>
+            <a:endParaRPr lang="en-US" dirty="0"/>
+          </a:p>
+        </p:txBody>
+      </p:sp>
+      <p:sp>
+        <p:nvSpPr>
+          <p:cNvPr id="4" name="Slide Number Placeholder 3">
+            <a:extLst>
+              <a:ext uri="{FF2B5EF4-FFF2-40B4-BE49-F238E27FC236}">
+                <a16:creationId xmlns:a16="http://schemas.microsoft.com/office/drawing/2014/main" id="{EC139260-F85E-6E00-E201-B9001902CFC3}"/>
+              </a:ext>
+            </a:extLst>
+          </p:cNvPr>
+          <p:cNvSpPr>
+            <a:spLocks noGrp="1"/>
+          </p:cNvSpPr>
+          <p:nvPr>
+            <p:ph type="sldNum" sz="quarter" idx="11"/>
+          </p:nvPr>
+        </p:nvSpPr>
+        <p:spPr/>
+        <p:txBody>
+          <a:bodyPr/>
+          <a:lstStyle/>
+          <a:p>
+            <a:fld id="{2E6AEE32-87CF-4B18-ACD9-DC92317905A5}" type="slidenum">
+              <a:rPr lang="en-US" altLang="en-US" smtClean="0"/>
+              <a:pPr/>
+              <a:t>14</a:t>
+            </a:fld>
+            <a:endParaRPr lang="en-US" altLang="en-US" dirty="0"/>
+          </a:p>
+        </p:txBody>
+      </p:sp>
+      <p:sp>
+        <p:nvSpPr>
+          <p:cNvPr id="5" name="Footer Placeholder 4">
+            <a:extLst>
+              <a:ext uri="{FF2B5EF4-FFF2-40B4-BE49-F238E27FC236}">
+                <a16:creationId xmlns:a16="http://schemas.microsoft.com/office/drawing/2014/main" id="{49DC386D-22CB-BCB0-8129-92CF1D251702}"/>
+              </a:ext>
+            </a:extLst>
+          </p:cNvPr>
+          <p:cNvSpPr>
+            <a:spLocks noGrp="1"/>
+          </p:cNvSpPr>
+          <p:nvPr>
+            <p:ph type="ftr" sz="quarter" idx="12"/>
+          </p:nvPr>
+        </p:nvSpPr>
+        <p:spPr/>
+        <p:txBody>
+          <a:bodyPr/>
+          <a:lstStyle/>
+          <a:p>
+            <a:pPr>
+              <a:defRPr/>
+            </a:pPr>
+            <a:endParaRPr lang="en-US" dirty="0"/>
+          </a:p>
+        </p:txBody>
+      </p:sp>
+      <p:sp>
+        <p:nvSpPr>
+          <p:cNvPr id="9" name="TextBox 8">
+            <a:extLst>
+              <a:ext uri="{FF2B5EF4-FFF2-40B4-BE49-F238E27FC236}">
+                <a16:creationId xmlns:a16="http://schemas.microsoft.com/office/drawing/2014/main" id="{0EF775FE-AE2A-581C-255C-EF6A1BA819A1}"/>
+              </a:ext>
+            </a:extLst>
+          </p:cNvPr>
+          <p:cNvSpPr txBox="1"/>
+          <p:nvPr/>
+        </p:nvSpPr>
+        <p:spPr>
+          <a:xfrm>
+            <a:off x="766232" y="4464115"/>
+            <a:ext cx="10728857" cy="1477328"/>
+          </a:xfrm>
+          <a:prstGeom prst="rect">
+            <a:avLst/>
+          </a:prstGeom>
+          <a:noFill/>
+        </p:spPr>
+        <p:txBody>
+          <a:bodyPr wrap="square" rtlCol="0">
+            <a:spAutoFit/>
+          </a:bodyPr>
+          <a:lstStyle/>
+          <a:p>
+            <a:pPr marL="342900" indent="-342900">
+              <a:buFont typeface="Wingdings" panose="05000000000000000000" pitchFamily="2" charset="2"/>
+              <a:buChar char="q"/>
+            </a:pPr>
+            <a:endParaRPr lang="en-GB" sz="1800" b="1" dirty="0">
+              <a:solidFill>
+                <a:srgbClr val="0000FF"/>
+              </a:solidFill>
+            </a:endParaRPr>
+          </a:p>
+          <a:p>
+            <a:pPr marL="342900" indent="-342900">
+              <a:buFont typeface="Wingdings" panose="05000000000000000000" pitchFamily="2" charset="2"/>
+              <a:buChar char="q"/>
+            </a:pPr>
+            <a:endParaRPr lang="en-GB" sz="1800" b="1" dirty="0">
+              <a:solidFill>
+                <a:srgbClr val="0000FF"/>
+              </a:solidFill>
+            </a:endParaRPr>
+          </a:p>
+          <a:p>
+            <a:pPr marL="342900" indent="-342900">
+              <a:buFont typeface="Wingdings" panose="05000000000000000000" pitchFamily="2" charset="2"/>
+              <a:buChar char="q"/>
+            </a:pPr>
+            <a:endParaRPr lang="en-GB" sz="1800" b="1" dirty="0">
+              <a:solidFill>
+                <a:srgbClr val="0000FF"/>
+              </a:solidFill>
+            </a:endParaRPr>
+          </a:p>
+          <a:p>
+            <a:pPr marL="342900" indent="-342900">
+              <a:buFont typeface="Wingdings" panose="05000000000000000000" pitchFamily="2" charset="2"/>
+              <a:buChar char="q"/>
+            </a:pPr>
+            <a:endParaRPr lang="en-GB" sz="1800" b="1" dirty="0">
+              <a:solidFill>
+                <a:srgbClr val="0000FF"/>
+              </a:solidFill>
+            </a:endParaRPr>
+          </a:p>
+          <a:p>
+            <a:pPr marL="342900" indent="-342900">
+              <a:buFont typeface="Wingdings" panose="05000000000000000000" pitchFamily="2" charset="2"/>
+              <a:buChar char="q"/>
+            </a:pPr>
+            <a:r>
+              <a:rPr lang="en-GB" sz="1800" b="1" dirty="0">
+                <a:solidFill>
+                  <a:srgbClr val="0000FF"/>
+                </a:solidFill>
+              </a:rPr>
+              <a:t>With NFIFO = 64 the resulting sinusoid shows an improvement</a:t>
+            </a:r>
+            <a:endParaRPr lang="en-GB" sz="1800" dirty="0"/>
+          </a:p>
+        </p:txBody>
+      </p:sp>
+      <p:pic>
+        <p:nvPicPr>
+          <p:cNvPr id="7" name="Immagine 6">
+            <a:extLst>
+              <a:ext uri="{FF2B5EF4-FFF2-40B4-BE49-F238E27FC236}">
+                <a16:creationId xmlns:a16="http://schemas.microsoft.com/office/drawing/2014/main" id="{63B6D1FA-64DD-899E-8F46-28F7546B8DC7}"/>
+              </a:ext>
+            </a:extLst>
+          </p:cNvPr>
+          <p:cNvPicPr>
+            <a:picLocks noChangeAspect="1"/>
+          </p:cNvPicPr>
+          <p:nvPr/>
+        </p:nvPicPr>
+        <p:blipFill>
+          <a:blip r:embed="rId2"/>
+          <a:stretch>
+            <a:fillRect/>
+          </a:stretch>
+        </p:blipFill>
+        <p:spPr>
+          <a:xfrm>
+            <a:off x="1505490" y="1299865"/>
+            <a:ext cx="8897592" cy="4258269"/>
+          </a:xfrm>
+          <a:prstGeom prst="rect">
+            <a:avLst/>
+          </a:prstGeom>
+        </p:spPr>
+      </p:pic>
+    </p:spTree>
+    <p:extLst>
+      <p:ext uri="{BB962C8B-B14F-4D97-AF65-F5344CB8AC3E}">
+        <p14:creationId xmlns:p14="http://schemas.microsoft.com/office/powerpoint/2010/main" val="1072611907"/>
+      </p:ext>
+    </p:extLst>
+  </p:cSld>
+  <p:clrMapOvr>
+    <a:masterClrMapping/>
+  </p:clrMapOvr>
+  <p:transition/>
+</p:sld>
+</file>
+
+<file path=ppt/slides/slide15.xml><?xml version="1.0" encoding="utf-8"?>
+<p:sld xmlns:a="http://schemas.openxmlformats.org/drawingml/2006/main" xmlns:r="http://schemas.openxmlformats.org/officeDocument/2006/relationships" xmlns:p="http://schemas.openxmlformats.org/presentationml/2006/main">
+  <p:cSld>
+    <p:spTree>
+      <p:nvGrpSpPr>
+        <p:cNvPr id="1" name="">
+          <a:extLst>
+            <a:ext uri="{FF2B5EF4-FFF2-40B4-BE49-F238E27FC236}">
+              <a16:creationId xmlns:a16="http://schemas.microsoft.com/office/drawing/2014/main" id="{6BC4395A-E7A7-7562-F0B9-C7059863962E}"/>
+            </a:ext>
+          </a:extLst>
+        </p:cNvPr>
+        <p:cNvGrpSpPr/>
+        <p:nvPr/>
+      </p:nvGrpSpPr>
+      <p:grpSpPr>
+        <a:xfrm>
+          <a:off x="0" y="0"/>
+          <a:ext cx="0" cy="0"/>
+          <a:chOff x="0" y="0"/>
+          <a:chExt cx="0" cy="0"/>
+        </a:xfrm>
+      </p:grpSpPr>
+      <p:sp>
+        <p:nvSpPr>
+          <p:cNvPr id="2" name="Title 1">
+            <a:extLst>
+              <a:ext uri="{FF2B5EF4-FFF2-40B4-BE49-F238E27FC236}">
+                <a16:creationId xmlns:a16="http://schemas.microsoft.com/office/drawing/2014/main" id="{7CF1C81D-AB13-15EF-F93D-F165E383B19B}"/>
+              </a:ext>
+            </a:extLst>
+          </p:cNvPr>
+          <p:cNvSpPr>
+            <a:spLocks noGrp="1"/>
+          </p:cNvSpPr>
+          <p:nvPr>
+            <p:ph type="title"/>
+          </p:nvPr>
+        </p:nvSpPr>
+        <p:spPr>
+          <a:xfrm>
+            <a:off x="766232" y="222381"/>
+            <a:ext cx="11425767" cy="720596"/>
+          </a:xfrm>
+        </p:spPr>
+        <p:txBody>
+          <a:bodyPr/>
+          <a:lstStyle/>
+          <a:p>
+            <a:r>
+              <a:rPr lang="it-IT" dirty="0" err="1"/>
+              <a:t>Simulation</a:t>
+            </a:r>
+            <a:r>
+              <a:rPr lang="it-IT" dirty="0"/>
+              <a:t> </a:t>
+            </a:r>
+            <a:r>
+              <a:rPr lang="it-IT" dirty="0" err="1"/>
+              <a:t>result</a:t>
+            </a:r>
+            <a:r>
+              <a:rPr lang="it-IT" dirty="0"/>
+              <a:t> – NFIFO = 128 (log2NFIFO = 7)</a:t>
+            </a:r>
+            <a:endParaRPr lang="en-US" dirty="0"/>
+          </a:p>
+        </p:txBody>
+      </p:sp>
+      <p:sp>
+        <p:nvSpPr>
+          <p:cNvPr id="4" name="Slide Number Placeholder 3">
+            <a:extLst>
+              <a:ext uri="{FF2B5EF4-FFF2-40B4-BE49-F238E27FC236}">
+                <a16:creationId xmlns:a16="http://schemas.microsoft.com/office/drawing/2014/main" id="{21BAC632-F172-6335-3FF2-2D47F8BA1628}"/>
+              </a:ext>
+            </a:extLst>
+          </p:cNvPr>
+          <p:cNvSpPr>
+            <a:spLocks noGrp="1"/>
+          </p:cNvSpPr>
+          <p:nvPr>
+            <p:ph type="sldNum" sz="quarter" idx="11"/>
+          </p:nvPr>
+        </p:nvSpPr>
+        <p:spPr/>
+        <p:txBody>
+          <a:bodyPr/>
+          <a:lstStyle/>
+          <a:p>
+            <a:fld id="{2E6AEE32-87CF-4B18-ACD9-DC92317905A5}" type="slidenum">
+              <a:rPr lang="en-US" altLang="en-US" smtClean="0"/>
+              <a:pPr/>
+              <a:t>15</a:t>
+            </a:fld>
+            <a:endParaRPr lang="en-US" altLang="en-US" dirty="0"/>
+          </a:p>
+        </p:txBody>
+      </p:sp>
+      <p:sp>
+        <p:nvSpPr>
+          <p:cNvPr id="5" name="Footer Placeholder 4">
+            <a:extLst>
+              <a:ext uri="{FF2B5EF4-FFF2-40B4-BE49-F238E27FC236}">
+                <a16:creationId xmlns:a16="http://schemas.microsoft.com/office/drawing/2014/main" id="{3B86CDE1-2C8B-7A15-3198-6A32E0FB9E7F}"/>
+              </a:ext>
+            </a:extLst>
+          </p:cNvPr>
+          <p:cNvSpPr>
+            <a:spLocks noGrp="1"/>
+          </p:cNvSpPr>
+          <p:nvPr>
+            <p:ph type="ftr" sz="quarter" idx="12"/>
+          </p:nvPr>
+        </p:nvSpPr>
+        <p:spPr/>
+        <p:txBody>
+          <a:bodyPr/>
+          <a:lstStyle/>
+          <a:p>
+            <a:pPr>
+              <a:defRPr/>
+            </a:pPr>
+            <a:endParaRPr lang="en-US" dirty="0"/>
+          </a:p>
+        </p:txBody>
+      </p:sp>
+      <p:sp>
+        <p:nvSpPr>
+          <p:cNvPr id="9" name="TextBox 8">
+            <a:extLst>
+              <a:ext uri="{FF2B5EF4-FFF2-40B4-BE49-F238E27FC236}">
+                <a16:creationId xmlns:a16="http://schemas.microsoft.com/office/drawing/2014/main" id="{3BA12A7C-03AE-92CA-6850-BD794E5A8C83}"/>
+              </a:ext>
+            </a:extLst>
+          </p:cNvPr>
+          <p:cNvSpPr txBox="1"/>
+          <p:nvPr/>
+        </p:nvSpPr>
+        <p:spPr>
+          <a:xfrm>
+            <a:off x="766232" y="4464115"/>
+            <a:ext cx="10728857" cy="1477328"/>
+          </a:xfrm>
+          <a:prstGeom prst="rect">
+            <a:avLst/>
+          </a:prstGeom>
+          <a:noFill/>
+        </p:spPr>
+        <p:txBody>
+          <a:bodyPr wrap="square" rtlCol="0">
+            <a:spAutoFit/>
+          </a:bodyPr>
+          <a:lstStyle/>
+          <a:p>
+            <a:pPr marL="342900" indent="-342900">
+              <a:buFont typeface="Wingdings" panose="05000000000000000000" pitchFamily="2" charset="2"/>
+              <a:buChar char="q"/>
+            </a:pPr>
+            <a:endParaRPr lang="en-GB" sz="1800" b="1" dirty="0">
+              <a:solidFill>
+                <a:srgbClr val="0000FF"/>
+              </a:solidFill>
+            </a:endParaRPr>
+          </a:p>
+          <a:p>
+            <a:pPr marL="342900" indent="-342900">
+              <a:buFont typeface="Wingdings" panose="05000000000000000000" pitchFamily="2" charset="2"/>
+              <a:buChar char="q"/>
+            </a:pPr>
+            <a:endParaRPr lang="en-GB" sz="1800" b="1" dirty="0">
+              <a:solidFill>
+                <a:srgbClr val="0000FF"/>
+              </a:solidFill>
+            </a:endParaRPr>
+          </a:p>
+          <a:p>
+            <a:pPr marL="342900" indent="-342900">
+              <a:buFont typeface="Wingdings" panose="05000000000000000000" pitchFamily="2" charset="2"/>
+              <a:buChar char="q"/>
+            </a:pPr>
+            <a:endParaRPr lang="en-GB" sz="1800" b="1" dirty="0">
+              <a:solidFill>
+                <a:srgbClr val="0000FF"/>
+              </a:solidFill>
+            </a:endParaRPr>
+          </a:p>
+          <a:p>
+            <a:pPr marL="342900" indent="-342900">
+              <a:buFont typeface="Wingdings" panose="05000000000000000000" pitchFamily="2" charset="2"/>
+              <a:buChar char="q"/>
+            </a:pPr>
+            <a:endParaRPr lang="en-GB" sz="1800" b="1" dirty="0">
+              <a:solidFill>
+                <a:srgbClr val="0000FF"/>
+              </a:solidFill>
+            </a:endParaRPr>
+          </a:p>
+          <a:p>
+            <a:pPr marL="342900" indent="-342900">
+              <a:buFont typeface="Wingdings" panose="05000000000000000000" pitchFamily="2" charset="2"/>
+              <a:buChar char="q"/>
+            </a:pPr>
+            <a:r>
+              <a:rPr lang="en-GB" sz="1800" b="1" dirty="0">
+                <a:solidFill>
+                  <a:srgbClr val="0000FF"/>
+                </a:solidFill>
+              </a:rPr>
+              <a:t>With NFIFO = 128 the sinusoid is smoother but with more attenuation</a:t>
+            </a:r>
+            <a:endParaRPr lang="en-GB" sz="1800" dirty="0"/>
+          </a:p>
+        </p:txBody>
+      </p:sp>
+      <p:pic>
+        <p:nvPicPr>
+          <p:cNvPr id="6" name="Immagine 5">
+            <a:extLst>
+              <a:ext uri="{FF2B5EF4-FFF2-40B4-BE49-F238E27FC236}">
+                <a16:creationId xmlns:a16="http://schemas.microsoft.com/office/drawing/2014/main" id="{6746CE43-2847-F04A-FACD-5889677F8C16}"/>
+              </a:ext>
+            </a:extLst>
+          </p:cNvPr>
+          <p:cNvPicPr>
+            <a:picLocks noChangeAspect="1"/>
+          </p:cNvPicPr>
+          <p:nvPr/>
+        </p:nvPicPr>
+        <p:blipFill>
+          <a:blip r:embed="rId2"/>
+          <a:stretch>
+            <a:fillRect/>
+          </a:stretch>
+        </p:blipFill>
+        <p:spPr>
+          <a:xfrm>
+            <a:off x="1651967" y="1399892"/>
+            <a:ext cx="8888065" cy="4058216"/>
+          </a:xfrm>
+          <a:prstGeom prst="rect">
+            <a:avLst/>
+          </a:prstGeom>
+        </p:spPr>
+      </p:pic>
+    </p:spTree>
+    <p:extLst>
+      <p:ext uri="{BB962C8B-B14F-4D97-AF65-F5344CB8AC3E}">
+        <p14:creationId xmlns:p14="http://schemas.microsoft.com/office/powerpoint/2010/main" val="145244153"/>
+      </p:ext>
+    </p:extLst>
+  </p:cSld>
+  <p:clrMapOvr>
+    <a:masterClrMapping/>
+  </p:clrMapOvr>
+  <p:transition/>
+</p:sld>
+</file>
+
+<file path=ppt/slides/slide16.xml><?xml version="1.0" encoding="utf-8"?>
+<p:sld xmlns:a="http://schemas.openxmlformats.org/drawingml/2006/main" xmlns:r="http://schemas.openxmlformats.org/officeDocument/2006/relationships" xmlns:p="http://schemas.openxmlformats.org/presentationml/2006/main">
+  <p:cSld>
+    <p:spTree>
+      <p:nvGrpSpPr>
+        <p:cNvPr id="1" name="">
+          <a:extLst>
+            <a:ext uri="{FF2B5EF4-FFF2-40B4-BE49-F238E27FC236}">
               <a16:creationId xmlns:a16="http://schemas.microsoft.com/office/drawing/2014/main" id="{F9560573-C13A-3E6D-BBC9-E03140BF908B}"/>
             </a:ext>
           </a:extLst>
@@ -4627,7 +5407,7 @@
             <a:fld id="{2E6AEE32-87CF-4B18-ACD9-DC92317905A5}" type="slidenum">
               <a:rPr lang="en-US" altLang="en-US" smtClean="0"/>
               <a:pPr/>
-              <a:t>13</a:t>
+              <a:t>16</a:t>
             </a:fld>
             <a:endParaRPr lang="en-US" altLang="en-US" dirty="0"/>
           </a:p>
@@ -4883,7 +5663,7 @@
 </p:sld>
 </file>
 
-<file path=ppt/slides/slide14.xml><?xml version="1.0" encoding="utf-8"?>
+<file path=ppt/slides/slide17.xml><?xml version="1.0" encoding="utf-8"?>
 <p:sld xmlns:a="http://schemas.openxmlformats.org/drawingml/2006/main" xmlns:r="http://schemas.openxmlformats.org/officeDocument/2006/relationships" xmlns:p="http://schemas.openxmlformats.org/presentationml/2006/main">
   <p:cSld>
     <p:spTree>
@@ -4968,7 +5748,7 @@
             <a:fld id="{2E6AEE32-87CF-4B18-ACD9-DC92317905A5}" type="slidenum">
               <a:rPr lang="en-US" altLang="en-US" smtClean="0"/>
               <a:pPr/>
-              <a:t>14</a:t>
+              <a:t>17</a:t>
             </a:fld>
             <a:endParaRPr lang="en-US" altLang="en-US" dirty="0"/>
           </a:p>
@@ -5523,13 +6303,8 @@
             </a:pPr>
             <a:r>
               <a:rPr lang="en-US" sz="2400" b="1" noProof="0" dirty="0"/>
-              <a:t>Final Table Resume </a:t>
-            </a:r>
-            <a:r>
-              <a:rPr lang="en-US" sz="2400" b="1" noProof="0"/>
-              <a:t>and Comments</a:t>
-            </a:r>
-            <a:endParaRPr lang="en-US" sz="2400" b="1" noProof="0" dirty="0"/>
+              <a:t>Final Table Resume and Comments</a:t>
+            </a:r>
           </a:p>
           <a:p>
             <a:pPr marL="285750" indent="-285750">
@@ -6487,7 +7262,7 @@
           <p:nvPr/>
         </p:nvPicPr>
         <p:blipFill>
-          <a:blip r:embed="rId3">
+          <a:blip r:embed="rId3" cstate="print">
             <a:extLst>
               <a:ext uri="{28A0092B-C50C-407E-A947-70E740481C1C}">
                 <a14:useLocalDpi xmlns:a14="http://schemas.microsoft.com/office/drawing/2010/main" val="0"/>
@@ -7652,7 +8427,7 @@
           <p:nvPr/>
         </p:nvPicPr>
         <p:blipFill>
-          <a:blip r:embed="rId3">
+          <a:blip r:embed="rId3" cstate="print">
             <a:extLst>
               <a:ext uri="{28A0092B-C50C-407E-A947-70E740481C1C}">
                 <a14:useLocalDpi xmlns:a14="http://schemas.microsoft.com/office/drawing/2010/main" val="0"/>
@@ -8972,6 +9747,15 @@
 </file>
 
 <file path=customXml/item1.xml><?xml version="1.0" encoding="utf-8"?>
+<?mso-contentType ?>
+<FormTemplates xmlns="http://schemas.microsoft.com/sharepoint/v3/contenttype/forms">
+  <Display>DocumentLibraryForm</Display>
+  <Edit>DocumentLibraryForm</Edit>
+  <New>DocumentLibraryForm</New>
+</FormTemplates>
+</file>
+
+<file path=customXml/item2.xml><?xml version="1.0" encoding="utf-8"?>
 <ct:contentTypeSchema xmlns:ct="http://schemas.microsoft.com/office/2006/metadata/contentType" xmlns:ma="http://schemas.microsoft.com/office/2006/metadata/properties/metaAttributes" ct:_="" ma:_="" ma:contentTypeName="Documento" ma:contentTypeID="0x01010009A656CF8C467741A56A16B7574AC68E" ma:contentTypeVersion="12" ma:contentTypeDescription="Creare un nuovo documento." ma:contentTypeScope="" ma:versionID="4f27b0f6ef663e5da5bafac1efc6fe9a">
   <xsd:schema xmlns:xsd="http://www.w3.org/2001/XMLSchema" xmlns:xs="http://www.w3.org/2001/XMLSchema" xmlns:p="http://schemas.microsoft.com/office/2006/metadata/properties" xmlns:ns3="d81608ca-db68-4891-9f53-9b89cbfff5c6" xmlns:ns4="be3c09a5-e964-4602-bd74-bbf48e0fabf1" targetNamespace="http://schemas.microsoft.com/office/2006/metadata/properties" ma:root="true" ma:fieldsID="8a6d6b69e42fa993b1c0a33dd1bd5a45" ns3:_="" ns4:_="">
     <xsd:import namespace="d81608ca-db68-4891-9f53-9b89cbfff5c6"/>
@@ -9186,15 +9970,6 @@
 </ct:contentTypeSchema>
 </file>
 
-<file path=customXml/item2.xml><?xml version="1.0" encoding="utf-8"?>
-<?mso-contentType ?>
-<FormTemplates xmlns="http://schemas.microsoft.com/sharepoint/v3/contenttype/forms">
-  <Display>DocumentLibraryForm</Display>
-  <Edit>DocumentLibraryForm</Edit>
-  <New>DocumentLibraryForm</New>
-</FormTemplates>
-</file>
-
 <file path=customXml/item3.xml><?xml version="1.0" encoding="utf-8"?>
 <p:properties xmlns:p="http://schemas.microsoft.com/office/2006/metadata/properties" xmlns:xsi="http://www.w3.org/2001/XMLSchema-instance" xmlns:pc="http://schemas.microsoft.com/office/infopath/2007/PartnerControls">
   <documentManagement>
@@ -9204,6 +9979,14 @@
 </file>
 
 <file path=customXml/itemProps1.xml><?xml version="1.0" encoding="utf-8"?>
+<ds:datastoreItem xmlns:ds="http://schemas.openxmlformats.org/officeDocument/2006/customXml" ds:itemID="{6E8D78F2-F211-4F79-8A63-15AEAF64F23A}">
+  <ds:schemaRefs>
+    <ds:schemaRef ds:uri="http://schemas.microsoft.com/sharepoint/v3/contenttype/forms"/>
+  </ds:schemaRefs>
+</ds:datastoreItem>
+</file>
+
+<file path=customXml/itemProps2.xml><?xml version="1.0" encoding="utf-8"?>
 <ds:datastoreItem xmlns:ds="http://schemas.openxmlformats.org/officeDocument/2006/customXml" ds:itemID="{AC7A1D52-4C7C-4BE2-BA1D-9D952C857EA1}">
   <ds:schemaRefs>
     <ds:schemaRef ds:uri="http://schemas.microsoft.com/office/2006/metadata/contentType"/>
@@ -9218,14 +10001,6 @@
     <ds:schemaRef ds:uri="http://purl.org/dc/elements/1.1/"/>
     <ds:schemaRef ds:uri="http://purl.org/dc/terms/"/>
     <ds:schemaRef ds:uri="http://schemas.microsoft.com/internal/obd"/>
-  </ds:schemaRefs>
-</ds:datastoreItem>
-</file>
-
-<file path=customXml/itemProps2.xml><?xml version="1.0" encoding="utf-8"?>
-<ds:datastoreItem xmlns:ds="http://schemas.openxmlformats.org/officeDocument/2006/customXml" ds:itemID="{6E8D78F2-F211-4F79-8A63-15AEAF64F23A}">
-  <ds:schemaRefs>
-    <ds:schemaRef ds:uri="http://schemas.microsoft.com/sharepoint/v3/contenttype/forms"/>
   </ds:schemaRefs>
 </ds:datastoreItem>
 </file>

--- a/Documentazione.pptx
+++ b/Documentazione.pptx
@@ -5,10 +5,10 @@
     <p:sldMasterId id="2147483688" r:id="rId4"/>
   </p:sldMasterIdLst>
   <p:notesMasterIdLst>
-    <p:notesMasterId r:id="rId22"/>
+    <p:notesMasterId r:id="rId24"/>
   </p:notesMasterIdLst>
   <p:handoutMasterIdLst>
-    <p:handoutMasterId r:id="rId23"/>
+    <p:handoutMasterId r:id="rId25"/>
   </p:handoutMasterIdLst>
   <p:sldIdLst>
     <p:sldId id="898" r:id="rId5"/>
@@ -27,7 +27,9 @@
     <p:sldId id="1172" r:id="rId18"/>
     <p:sldId id="1173" r:id="rId19"/>
     <p:sldId id="1169" r:id="rId20"/>
-    <p:sldId id="1170" r:id="rId21"/>
+    <p:sldId id="1174" r:id="rId21"/>
+    <p:sldId id="1170" r:id="rId22"/>
+    <p:sldId id="1175" r:id="rId23"/>
   </p:sldIdLst>
   <p:sldSz cx="12192000" cy="6858000"/>
   <p:notesSz cx="6946900" cy="10058400"/>
@@ -5363,6 +5365,522 @@
         </p:nvSpPr>
         <p:spPr>
           <a:xfrm>
+            <a:off x="766233" y="222381"/>
+            <a:ext cx="7971367" cy="720596"/>
+          </a:xfrm>
+        </p:spPr>
+        <p:txBody>
+          <a:bodyPr vert="horz" wrap="square" lIns="91440" tIns="45720" rIns="91440" bIns="45720" numCol="1" anchor="b" anchorCtr="0" compatLnSpc="1">
+            <a:prstTxWarp prst="textNoShape">
+              <a:avLst/>
+            </a:prstTxWarp>
+            <a:normAutofit/>
+          </a:bodyPr>
+          <a:lstStyle/>
+          <a:p>
+            <a:pPr marL="457200" lvl="1"/>
+            <a:r>
+              <a:rPr lang="en-US" sz="3000" dirty="0">
+                <a:latin typeface="+mj-lt"/>
+                <a:ea typeface="+mj-ea"/>
+                <a:cs typeface="+mj-cs"/>
+              </a:rPr>
+              <a:t>Signal to Noise Ratio</a:t>
+            </a:r>
+          </a:p>
+        </p:txBody>
+      </p:sp>
+      <p:pic>
+        <p:nvPicPr>
+          <p:cNvPr id="6" name="Immagine 5">
+            <a:extLst>
+              <a:ext uri="{FF2B5EF4-FFF2-40B4-BE49-F238E27FC236}">
+                <a16:creationId xmlns:a16="http://schemas.microsoft.com/office/drawing/2014/main" id="{0B4FE0A9-9089-44D5-B1DC-C5A8EC9CEB7E}"/>
+              </a:ext>
+            </a:extLst>
+          </p:cNvPr>
+          <p:cNvPicPr>
+            <a:picLocks noChangeAspect="1"/>
+          </p:cNvPicPr>
+          <p:nvPr/>
+        </p:nvPicPr>
+        <p:blipFill>
+          <a:blip r:embed="rId2"/>
+          <a:stretch>
+            <a:fillRect/>
+          </a:stretch>
+        </p:blipFill>
+        <p:spPr>
+          <a:xfrm>
+            <a:off x="101363" y="1275468"/>
+            <a:ext cx="6155666" cy="2835315"/>
+          </a:xfrm>
+          <a:prstGeom prst="rect">
+            <a:avLst/>
+          </a:prstGeom>
+          <a:noFill/>
+        </p:spPr>
+      </p:pic>
+      <p:sp>
+        <p:nvSpPr>
+          <p:cNvPr id="9" name="TextBox 8">
+            <a:extLst>
+              <a:ext uri="{FF2B5EF4-FFF2-40B4-BE49-F238E27FC236}">
+                <a16:creationId xmlns:a16="http://schemas.microsoft.com/office/drawing/2014/main" id="{06E26371-097A-20B0-F174-87B38A787ED2}"/>
+              </a:ext>
+            </a:extLst>
+          </p:cNvPr>
+          <p:cNvSpPr txBox="1"/>
+          <p:nvPr/>
+        </p:nvSpPr>
+        <p:spPr bwMode="auto">
+          <a:xfrm>
+            <a:off x="335360" y="4464114"/>
+            <a:ext cx="11088291" cy="1555685"/>
+          </a:xfrm>
+          <a:prstGeom prst="rect">
+            <a:avLst/>
+          </a:prstGeom>
+          <a:noFill/>
+          <a:ln>
+            <a:noFill/>
+          </a:ln>
+        </p:spPr>
+        <p:txBody>
+          <a:bodyPr vert="horz" wrap="square" lIns="91440" tIns="45720" rIns="91440" bIns="45720" numCol="1" rtlCol="0" anchor="t" anchorCtr="0" compatLnSpc="1">
+            <a:prstTxWarp prst="textNoShape">
+              <a:avLst/>
+            </a:prstTxWarp>
+            <a:normAutofit/>
+          </a:bodyPr>
+          <a:lstStyle/>
+          <a:p>
+            <a:pPr marL="469900" indent="-469900" eaLnBrk="0" hangingPunct="0">
+              <a:spcBef>
+                <a:spcPct val="20000"/>
+              </a:spcBef>
+              <a:buClr>
+                <a:schemeClr val="accent2"/>
+              </a:buClr>
+              <a:buFont typeface="Wingdings" panose="05000000000000000000" pitchFamily="2" charset="2"/>
+              <a:buChar char="o"/>
+            </a:pPr>
+            <a:r>
+              <a:rPr lang="en-US" sz="2400" dirty="0">
+                <a:latin typeface="+mn-lt"/>
+              </a:rPr>
+              <a:t>NFIFO=32  </a:t>
+            </a:r>
+            <a:r>
+              <a:rPr lang="en-US" sz="2400" dirty="0" err="1">
+                <a:latin typeface="+mn-lt"/>
+              </a:rPr>
+              <a:t>rumore</a:t>
+            </a:r>
+            <a:r>
+              <a:rPr lang="en-US" sz="2400" dirty="0">
+                <a:latin typeface="+mn-lt"/>
+              </a:rPr>
+              <a:t> Maggiore, delay </a:t>
+            </a:r>
+            <a:r>
+              <a:rPr lang="en-US" sz="2400" dirty="0" err="1">
+                <a:latin typeface="+mn-lt"/>
+              </a:rPr>
+              <a:t>minore</a:t>
+            </a:r>
+            <a:r>
+              <a:rPr lang="en-US" sz="2400" dirty="0">
+                <a:latin typeface="+mn-lt"/>
+              </a:rPr>
+              <a:t> e </a:t>
+            </a:r>
+            <a:r>
+              <a:rPr lang="en-US" sz="2400" dirty="0" err="1">
+                <a:latin typeface="+mn-lt"/>
+              </a:rPr>
+              <a:t>ampiezza</a:t>
+            </a:r>
+            <a:r>
+              <a:rPr lang="en-US" sz="2400" dirty="0">
+                <a:latin typeface="+mn-lt"/>
+              </a:rPr>
+              <a:t> </a:t>
+            </a:r>
+            <a:r>
+              <a:rPr lang="en-US" sz="2400" dirty="0" err="1">
+                <a:latin typeface="+mn-lt"/>
+              </a:rPr>
+              <a:t>maggiore</a:t>
+            </a:r>
+            <a:endParaRPr lang="en-US" sz="2400" dirty="0">
+              <a:latin typeface="+mn-lt"/>
+            </a:endParaRPr>
+          </a:p>
+          <a:p>
+            <a:pPr marL="469900" indent="-469900" eaLnBrk="0" hangingPunct="0">
+              <a:spcBef>
+                <a:spcPct val="20000"/>
+              </a:spcBef>
+              <a:buClr>
+                <a:schemeClr val="accent2"/>
+              </a:buClr>
+              <a:buFont typeface="Wingdings" panose="05000000000000000000" pitchFamily="2" charset="2"/>
+              <a:buChar char="o"/>
+            </a:pPr>
+            <a:r>
+              <a:rPr lang="en-US" sz="2400" dirty="0">
+                <a:latin typeface="+mn-lt"/>
+              </a:rPr>
+              <a:t>NFIFO=128 </a:t>
+            </a:r>
+            <a:r>
+              <a:rPr lang="en-US" sz="2400" dirty="0" err="1">
+                <a:latin typeface="+mn-lt"/>
+              </a:rPr>
+              <a:t>rumore</a:t>
+            </a:r>
+            <a:r>
+              <a:rPr lang="en-US" sz="2400" dirty="0">
+                <a:latin typeface="+mn-lt"/>
+              </a:rPr>
+              <a:t> </a:t>
+            </a:r>
+            <a:r>
+              <a:rPr lang="en-US" sz="2400" dirty="0" err="1">
+                <a:latin typeface="+mn-lt"/>
+              </a:rPr>
+              <a:t>minore</a:t>
+            </a:r>
+            <a:r>
+              <a:rPr lang="en-US" sz="2400" dirty="0">
+                <a:latin typeface="+mn-lt"/>
+              </a:rPr>
+              <a:t>, delay Maggiore e </a:t>
+            </a:r>
+            <a:r>
+              <a:rPr lang="en-US" sz="2400" dirty="0" err="1">
+                <a:latin typeface="+mn-lt"/>
+              </a:rPr>
+              <a:t>ampiezza</a:t>
+            </a:r>
+            <a:r>
+              <a:rPr lang="en-US" sz="2400" dirty="0">
+                <a:latin typeface="+mn-lt"/>
+              </a:rPr>
+              <a:t> </a:t>
+            </a:r>
+            <a:r>
+              <a:rPr lang="en-US" sz="2400" dirty="0" err="1">
+                <a:latin typeface="+mn-lt"/>
+              </a:rPr>
+              <a:t>minore</a:t>
+            </a:r>
+            <a:endParaRPr lang="en-US" sz="2400" dirty="0">
+              <a:latin typeface="+mn-lt"/>
+            </a:endParaRPr>
+          </a:p>
+          <a:p>
+            <a:pPr marL="469900" indent="-469900" eaLnBrk="0" hangingPunct="0">
+              <a:spcBef>
+                <a:spcPct val="20000"/>
+              </a:spcBef>
+              <a:buClr>
+                <a:schemeClr val="accent2"/>
+              </a:buClr>
+              <a:buFont typeface="Wingdings" panose="05000000000000000000" pitchFamily="2" charset="2"/>
+              <a:buChar char="o"/>
+            </a:pPr>
+            <a:endParaRPr lang="en-US" sz="2400" dirty="0">
+              <a:latin typeface="+mn-lt"/>
+            </a:endParaRPr>
+          </a:p>
+        </p:txBody>
+      </p:sp>
+      <p:sp>
+        <p:nvSpPr>
+          <p:cNvPr id="14" name="Date Placeholder 4">
+            <a:extLst>
+              <a:ext uri="{FF2B5EF4-FFF2-40B4-BE49-F238E27FC236}">
+                <a16:creationId xmlns:a16="http://schemas.microsoft.com/office/drawing/2014/main" id="{465262E3-B728-A1BE-FFF4-86968E432AF1}"/>
+              </a:ext>
+            </a:extLst>
+          </p:cNvPr>
+          <p:cNvSpPr>
+            <a:spLocks noGrp="1"/>
+          </p:cNvSpPr>
+          <p:nvPr>
+            <p:ph type="dt" sz="half" idx="10"/>
+          </p:nvPr>
+        </p:nvSpPr>
+        <p:spPr>
+          <a:xfrm>
+            <a:off x="812800" y="6373130"/>
+            <a:ext cx="2641600" cy="476250"/>
+          </a:xfrm>
+        </p:spPr>
+        <p:txBody>
+          <a:bodyPr/>
+          <a:lstStyle/>
+          <a:p>
+            <a:pPr>
+              <a:spcAft>
+                <a:spcPts val="600"/>
+              </a:spcAft>
+              <a:defRPr/>
+            </a:pPr>
+            <a:r>
+              <a:rPr lang="en-US"/>
+              <a:t>Author</a:t>
+            </a:r>
+          </a:p>
+        </p:txBody>
+      </p:sp>
+      <p:sp>
+        <p:nvSpPr>
+          <p:cNvPr id="16" name="Footer Placeholder 5">
+            <a:extLst>
+              <a:ext uri="{FF2B5EF4-FFF2-40B4-BE49-F238E27FC236}">
+                <a16:creationId xmlns:a16="http://schemas.microsoft.com/office/drawing/2014/main" id="{63509366-86DB-6BF4-B9E1-203D3363AFFD}"/>
+              </a:ext>
+            </a:extLst>
+          </p:cNvPr>
+          <p:cNvSpPr>
+            <a:spLocks noGrp="1"/>
+          </p:cNvSpPr>
+          <p:nvPr>
+            <p:ph type="ftr" sz="quarter" idx="11"/>
+          </p:nvPr>
+        </p:nvSpPr>
+        <p:spPr>
+          <a:xfrm>
+            <a:off x="4165600" y="6373130"/>
+            <a:ext cx="3860800" cy="476250"/>
+          </a:xfrm>
+        </p:spPr>
+        <p:txBody>
+          <a:bodyPr/>
+          <a:lstStyle/>
+          <a:p>
+            <a:pPr>
+              <a:defRPr/>
+            </a:pPr>
+            <a:endParaRPr lang="en-US"/>
+          </a:p>
+        </p:txBody>
+      </p:sp>
+      <p:sp>
+        <p:nvSpPr>
+          <p:cNvPr id="4" name="Slide Number Placeholder 3">
+            <a:extLst>
+              <a:ext uri="{FF2B5EF4-FFF2-40B4-BE49-F238E27FC236}">
+                <a16:creationId xmlns:a16="http://schemas.microsoft.com/office/drawing/2014/main" id="{07394474-FC55-4D17-3BA9-681A09932623}"/>
+              </a:ext>
+            </a:extLst>
+          </p:cNvPr>
+          <p:cNvSpPr>
+            <a:spLocks noGrp="1"/>
+          </p:cNvSpPr>
+          <p:nvPr>
+            <p:ph type="sldNum" sz="quarter" idx="12"/>
+          </p:nvPr>
+        </p:nvSpPr>
+        <p:spPr>
+          <a:xfrm>
+            <a:off x="8737600" y="6373130"/>
+            <a:ext cx="2641600" cy="476250"/>
+          </a:xfrm>
+        </p:spPr>
+        <p:txBody>
+          <a:bodyPr vert="horz" wrap="square" lIns="91440" tIns="45720" rIns="91440" bIns="45720" numCol="1" anchor="t" anchorCtr="0" compatLnSpc="1">
+            <a:prstTxWarp prst="textNoShape">
+              <a:avLst/>
+            </a:prstTxWarp>
+            <a:normAutofit/>
+          </a:bodyPr>
+          <a:lstStyle/>
+          <a:p>
+            <a:pPr>
+              <a:spcAft>
+                <a:spcPts val="600"/>
+              </a:spcAft>
+            </a:pPr>
+            <a:fld id="{2E6AEE32-87CF-4B18-ACD9-DC92317905A5}" type="slidenum">
+              <a:rPr lang="en-US" altLang="en-US" kern="1200">
+                <a:latin typeface="Verdana" panose="020B0604030504040204" pitchFamily="34" charset="0"/>
+                <a:ea typeface="ＭＳ Ｐゴシック" panose="020B0600070205080204" pitchFamily="34" charset="-128"/>
+                <a:cs typeface="+mn-cs"/>
+              </a:rPr>
+              <a:pPr>
+                <a:spcAft>
+                  <a:spcPts val="600"/>
+                </a:spcAft>
+              </a:pPr>
+              <a:t>16</a:t>
+            </a:fld>
+            <a:endParaRPr lang="en-US" altLang="en-US" kern="1200">
+              <a:latin typeface="Verdana" panose="020B0604030504040204" pitchFamily="34" charset="0"/>
+              <a:ea typeface="ＭＳ Ｐゴシック" panose="020B0600070205080204" pitchFamily="34" charset="-128"/>
+              <a:cs typeface="+mn-cs"/>
+            </a:endParaRPr>
+          </a:p>
+        </p:txBody>
+      </p:sp>
+      <p:pic>
+        <p:nvPicPr>
+          <p:cNvPr id="8" name="Immagine 7">
+            <a:extLst>
+              <a:ext uri="{FF2B5EF4-FFF2-40B4-BE49-F238E27FC236}">
+                <a16:creationId xmlns:a16="http://schemas.microsoft.com/office/drawing/2014/main" id="{E66ED0CC-FE1D-1D6C-14BC-F43A8C7DED0C}"/>
+              </a:ext>
+            </a:extLst>
+          </p:cNvPr>
+          <p:cNvPicPr>
+            <a:picLocks noChangeAspect="1"/>
+          </p:cNvPicPr>
+          <p:nvPr/>
+        </p:nvPicPr>
+        <p:blipFill>
+          <a:blip r:embed="rId3"/>
+          <a:stretch>
+            <a:fillRect/>
+          </a:stretch>
+        </p:blipFill>
+        <p:spPr>
+          <a:xfrm>
+            <a:off x="6257029" y="1275467"/>
+            <a:ext cx="5667351" cy="2835316"/>
+          </a:xfrm>
+          <a:prstGeom prst="rect">
+            <a:avLst/>
+          </a:prstGeom>
+        </p:spPr>
+      </p:pic>
+      <p:sp>
+        <p:nvSpPr>
+          <p:cNvPr id="10" name="CasellaDiTesto 9">
+            <a:extLst>
+              <a:ext uri="{FF2B5EF4-FFF2-40B4-BE49-F238E27FC236}">
+                <a16:creationId xmlns:a16="http://schemas.microsoft.com/office/drawing/2014/main" id="{4077B367-DCAF-3830-5749-6EAEF5942E47}"/>
+              </a:ext>
+            </a:extLst>
+          </p:cNvPr>
+          <p:cNvSpPr txBox="1"/>
+          <p:nvPr/>
+        </p:nvSpPr>
+        <p:spPr>
+          <a:xfrm>
+            <a:off x="650395" y="1127031"/>
+            <a:ext cx="1594352" cy="338554"/>
+          </a:xfrm>
+          <a:prstGeom prst="rect">
+            <a:avLst/>
+          </a:prstGeom>
+          <a:noFill/>
+        </p:spPr>
+        <p:txBody>
+          <a:bodyPr wrap="square" rtlCol="0">
+            <a:spAutoFit/>
+          </a:bodyPr>
+          <a:lstStyle/>
+          <a:p>
+            <a:r>
+              <a:rPr lang="it-IT" sz="1600" dirty="0"/>
+              <a:t>NFIFO= 32</a:t>
+            </a:r>
+          </a:p>
+        </p:txBody>
+      </p:sp>
+      <p:sp>
+        <p:nvSpPr>
+          <p:cNvPr id="12" name="CasellaDiTesto 11">
+            <a:extLst>
+              <a:ext uri="{FF2B5EF4-FFF2-40B4-BE49-F238E27FC236}">
+                <a16:creationId xmlns:a16="http://schemas.microsoft.com/office/drawing/2014/main" id="{A5D91A2F-2A17-1740-A736-2F4094B230BC}"/>
+              </a:ext>
+            </a:extLst>
+          </p:cNvPr>
+          <p:cNvSpPr txBox="1"/>
+          <p:nvPr/>
+        </p:nvSpPr>
+        <p:spPr>
+          <a:xfrm>
+            <a:off x="10191455" y="1096253"/>
+            <a:ext cx="1530170" cy="338554"/>
+          </a:xfrm>
+          <a:prstGeom prst="rect">
+            <a:avLst/>
+          </a:prstGeom>
+          <a:noFill/>
+        </p:spPr>
+        <p:txBody>
+          <a:bodyPr wrap="square" rtlCol="0">
+            <a:spAutoFit/>
+          </a:bodyPr>
+          <a:lstStyle/>
+          <a:p>
+            <a:r>
+              <a:rPr lang="it-IT" sz="1600" dirty="0"/>
+              <a:t>NFIFO=128</a:t>
+            </a:r>
+          </a:p>
+        </p:txBody>
+      </p:sp>
+    </p:spTree>
+    <p:extLst>
+      <p:ext uri="{BB962C8B-B14F-4D97-AF65-F5344CB8AC3E}">
+        <p14:creationId xmlns:p14="http://schemas.microsoft.com/office/powerpoint/2010/main" val="2176219075"/>
+      </p:ext>
+    </p:extLst>
+  </p:cSld>
+  <p:clrMapOvr>
+    <a:masterClrMapping/>
+  </p:clrMapOvr>
+  <p:transition/>
+</p:sld>
+</file>
+
+<file path=ppt/slides/slide17.xml><?xml version="1.0" encoding="utf-8"?>
+<p:sld xmlns:a="http://schemas.openxmlformats.org/drawingml/2006/main" xmlns:r="http://schemas.openxmlformats.org/officeDocument/2006/relationships" xmlns:p="http://schemas.openxmlformats.org/presentationml/2006/main">
+  <p:cSld>
+    <p:spTree>
+      <p:nvGrpSpPr>
+        <p:cNvPr id="1" name="">
+          <a:extLst>
+            <a:ext uri="{FF2B5EF4-FFF2-40B4-BE49-F238E27FC236}">
+              <a16:creationId xmlns:a16="http://schemas.microsoft.com/office/drawing/2014/main" id="{2B8D37B5-7A0A-45F2-D5B3-1BFB0096AECC}"/>
+            </a:ext>
+          </a:extLst>
+        </p:cNvPr>
+        <p:cNvGrpSpPr/>
+        <p:nvPr/>
+      </p:nvGrpSpPr>
+      <p:grpSpPr>
+        <a:xfrm>
+          <a:off x="0" y="0"/>
+          <a:ext cx="0" cy="0"/>
+          <a:chOff x="0" y="0"/>
+          <a:chExt cx="0" cy="0"/>
+        </a:xfrm>
+      </p:grpSpPr>
+      <p:sp>
+        <p:nvSpPr>
+          <p:cNvPr id="2" name="Title 1">
+            <a:extLst>
+              <a:ext uri="{FF2B5EF4-FFF2-40B4-BE49-F238E27FC236}">
+                <a16:creationId xmlns:a16="http://schemas.microsoft.com/office/drawing/2014/main" id="{585F623A-8395-A763-F053-B908A2725C84}"/>
+              </a:ext>
+            </a:extLst>
+          </p:cNvPr>
+          <p:cNvSpPr>
+            <a:spLocks noGrp="1"/>
+          </p:cNvSpPr>
+          <p:nvPr>
+            <p:ph type="title"/>
+          </p:nvPr>
+        </p:nvSpPr>
+        <p:spPr>
+          <a:xfrm>
             <a:off x="766232" y="222381"/>
             <a:ext cx="11425767" cy="720596"/>
           </a:xfrm>
@@ -5372,12 +5890,8 @@
           <a:lstStyle/>
           <a:p>
             <a:r>
-              <a:rPr lang="it-IT" noProof="0" dirty="0"/>
-              <a:t>Slide </a:t>
-            </a:r>
-            <a:r>
               <a:rPr lang="it-IT" noProof="0" dirty="0" err="1"/>
-              <a:t>Structure</a:t>
+              <a:t>Conclusions</a:t>
             </a:r>
             <a:endParaRPr lang="en-US" dirty="0"/>
           </a:p>
@@ -5388,7 +5902,7 @@
           <p:cNvPr id="4" name="Slide Number Placeholder 3">
             <a:extLst>
               <a:ext uri="{FF2B5EF4-FFF2-40B4-BE49-F238E27FC236}">
-                <a16:creationId xmlns:a16="http://schemas.microsoft.com/office/drawing/2014/main" id="{07394474-FC55-4D17-3BA9-681A09932623}"/>
+                <a16:creationId xmlns:a16="http://schemas.microsoft.com/office/drawing/2014/main" id="{7BADA548-7EC7-D191-7B03-AF971A11DA97}"/>
               </a:ext>
             </a:extLst>
           </p:cNvPr>
@@ -5407,7 +5921,7 @@
             <a:fld id="{2E6AEE32-87CF-4B18-ACD9-DC92317905A5}" type="slidenum">
               <a:rPr lang="en-US" altLang="en-US" smtClean="0"/>
               <a:pPr/>
-              <a:t>16</a:t>
+              <a:t>17</a:t>
             </a:fld>
             <a:endParaRPr lang="en-US" altLang="en-US" dirty="0"/>
           </a:p>
@@ -5418,7 +5932,7 @@
           <p:cNvPr id="5" name="Footer Placeholder 4">
             <a:extLst>
               <a:ext uri="{FF2B5EF4-FFF2-40B4-BE49-F238E27FC236}">
-                <a16:creationId xmlns:a16="http://schemas.microsoft.com/office/drawing/2014/main" id="{0BD47589-45BE-9470-8DA3-938CE1577802}"/>
+                <a16:creationId xmlns:a16="http://schemas.microsoft.com/office/drawing/2014/main" id="{46F1536A-B195-9166-10BD-95C022304BE0}"/>
               </a:ext>
             </a:extLst>
           </p:cNvPr>
@@ -5446,7 +5960,419 @@
           <p:cNvPr id="9" name="TextBox 8">
             <a:extLst>
               <a:ext uri="{FF2B5EF4-FFF2-40B4-BE49-F238E27FC236}">
-                <a16:creationId xmlns:a16="http://schemas.microsoft.com/office/drawing/2014/main" id="{06E26371-097A-20B0-F174-87B38A787ED2}"/>
+                <a16:creationId xmlns:a16="http://schemas.microsoft.com/office/drawing/2014/main" id="{D428AB67-D0F1-CBC0-3678-4F4E48502E50}"/>
+              </a:ext>
+            </a:extLst>
+          </p:cNvPr>
+          <p:cNvSpPr txBox="1"/>
+          <p:nvPr/>
+        </p:nvSpPr>
+        <p:spPr>
+          <a:xfrm>
+            <a:off x="650343" y="1268760"/>
+            <a:ext cx="10728857" cy="646331"/>
+          </a:xfrm>
+          <a:prstGeom prst="rect">
+            <a:avLst/>
+          </a:prstGeom>
+          <a:noFill/>
+        </p:spPr>
+        <p:txBody>
+          <a:bodyPr wrap="square" rtlCol="0">
+            <a:spAutoFit/>
+          </a:bodyPr>
+          <a:lstStyle/>
+          <a:p>
+            <a:pPr marL="342900" indent="-342900">
+              <a:buFont typeface="Wingdings" panose="05000000000000000000" pitchFamily="2" charset="2"/>
+              <a:buChar char="q"/>
+            </a:pPr>
+            <a:r>
+              <a:rPr lang="en-GB" sz="1800" b="1" dirty="0" err="1">
+                <a:solidFill>
+                  <a:srgbClr val="0000FF"/>
+                </a:solidFill>
+              </a:rPr>
+              <a:t>Abiamo</a:t>
+            </a:r>
+            <a:r>
+              <a:rPr lang="en-GB" sz="1800" b="1" dirty="0">
+                <a:solidFill>
+                  <a:srgbClr val="0000FF"/>
+                </a:solidFill>
+              </a:rPr>
+              <a:t> </a:t>
+            </a:r>
+            <a:r>
+              <a:rPr lang="en-GB" sz="1800" b="1" dirty="0" err="1">
+                <a:solidFill>
+                  <a:srgbClr val="0000FF"/>
+                </a:solidFill>
+              </a:rPr>
+              <a:t>realizzato</a:t>
+            </a:r>
+            <a:r>
+              <a:rPr lang="en-GB" sz="1800" b="1" dirty="0">
+                <a:solidFill>
+                  <a:srgbClr val="0000FF"/>
+                </a:solidFill>
+              </a:rPr>
+              <a:t> come non sempre un </a:t>
+            </a:r>
+            <a:r>
+              <a:rPr lang="en-GB" sz="1800" b="1" dirty="0" err="1">
+                <a:solidFill>
+                  <a:srgbClr val="0000FF"/>
+                </a:solidFill>
+              </a:rPr>
+              <a:t>filtraggio</a:t>
+            </a:r>
+            <a:r>
+              <a:rPr lang="en-GB" sz="1800" b="1" dirty="0">
+                <a:solidFill>
+                  <a:srgbClr val="0000FF"/>
+                </a:solidFill>
+              </a:rPr>
+              <a:t> con minor </a:t>
+            </a:r>
+            <a:r>
+              <a:rPr lang="en-GB" sz="1800" b="1" dirty="0" err="1">
+                <a:solidFill>
+                  <a:srgbClr val="0000FF"/>
+                </a:solidFill>
+              </a:rPr>
+              <a:t>rumore</a:t>
+            </a:r>
+            <a:r>
+              <a:rPr lang="en-GB" sz="1800" b="1" dirty="0">
+                <a:solidFill>
+                  <a:srgbClr val="0000FF"/>
+                </a:solidFill>
+              </a:rPr>
+              <a:t> </a:t>
+            </a:r>
+            <a:r>
+              <a:rPr lang="en-GB" sz="1800" b="1" dirty="0" err="1">
+                <a:solidFill>
+                  <a:srgbClr val="0000FF"/>
+                </a:solidFill>
+              </a:rPr>
+              <a:t>sia</a:t>
+            </a:r>
+            <a:r>
+              <a:rPr lang="en-GB" sz="1800" b="1" dirty="0">
+                <a:solidFill>
+                  <a:srgbClr val="0000FF"/>
+                </a:solidFill>
+              </a:rPr>
+              <a:t> </a:t>
+            </a:r>
+            <a:r>
+              <a:rPr lang="en-GB" sz="1800" b="1" dirty="0" err="1">
+                <a:solidFill>
+                  <a:srgbClr val="0000FF"/>
+                </a:solidFill>
+              </a:rPr>
+              <a:t>meglio</a:t>
+            </a:r>
+            <a:endParaRPr lang="en-GB" sz="1800" b="1" dirty="0">
+              <a:solidFill>
+                <a:srgbClr val="0000FF"/>
+              </a:solidFill>
+            </a:endParaRPr>
+          </a:p>
+          <a:p>
+            <a:pPr marL="342900" indent="-342900">
+              <a:buFont typeface="Wingdings" panose="05000000000000000000" pitchFamily="2" charset="2"/>
+              <a:buChar char="q"/>
+            </a:pPr>
+            <a:r>
+              <a:rPr lang="en-GB" sz="1800" b="1" dirty="0" err="1">
+                <a:solidFill>
+                  <a:srgbClr val="0000FF"/>
+                </a:solidFill>
+              </a:rPr>
+              <a:t>Modifiche</a:t>
+            </a:r>
+            <a:r>
+              <a:rPr lang="en-GB" sz="1800" b="1" dirty="0">
+                <a:solidFill>
+                  <a:srgbClr val="0000FF"/>
+                </a:solidFill>
+              </a:rPr>
+              <a:t> </a:t>
+            </a:r>
+            <a:r>
+              <a:rPr lang="en-GB" sz="1800" b="1" dirty="0" err="1">
+                <a:solidFill>
+                  <a:srgbClr val="0000FF"/>
+                </a:solidFill>
+              </a:rPr>
+              <a:t>apportate</a:t>
+            </a:r>
+            <a:r>
+              <a:rPr lang="en-GB" sz="1800" b="1" dirty="0">
+                <a:solidFill>
+                  <a:srgbClr val="0000FF"/>
+                </a:solidFill>
+              </a:rPr>
+              <a:t> extra: EMA(</a:t>
+            </a:r>
+            <a:r>
+              <a:rPr lang="it-IT" sz="1800" b="1" dirty="0" err="1">
+                <a:solidFill>
+                  <a:srgbClr val="0000FF"/>
+                </a:solidFill>
+              </a:rPr>
+              <a:t>Exponential</a:t>
+            </a:r>
+            <a:r>
+              <a:rPr lang="it-IT" sz="1800" b="1" dirty="0">
+                <a:solidFill>
+                  <a:srgbClr val="0000FF"/>
+                </a:solidFill>
+              </a:rPr>
+              <a:t> </a:t>
+            </a:r>
+            <a:r>
+              <a:rPr lang="it-IT" sz="1800" b="1" dirty="0" err="1">
+                <a:solidFill>
+                  <a:srgbClr val="0000FF"/>
+                </a:solidFill>
+              </a:rPr>
+              <a:t>Moving</a:t>
+            </a:r>
+            <a:r>
+              <a:rPr lang="it-IT" sz="1800" b="1" dirty="0">
+                <a:solidFill>
+                  <a:srgbClr val="0000FF"/>
+                </a:solidFill>
+              </a:rPr>
+              <a:t> </a:t>
+            </a:r>
+            <a:r>
+              <a:rPr lang="it-IT" sz="1800" b="1" dirty="0" err="1">
+                <a:solidFill>
+                  <a:srgbClr val="0000FF"/>
+                </a:solidFill>
+              </a:rPr>
+              <a:t>Average</a:t>
+            </a:r>
+            <a:r>
+              <a:rPr lang="it-IT" sz="1800" b="1" dirty="0">
+                <a:solidFill>
+                  <a:srgbClr val="0000FF"/>
+                </a:solidFill>
+              </a:rPr>
+              <a:t> )</a:t>
+            </a:r>
+            <a:endParaRPr lang="en-GB" sz="1800" b="1" dirty="0">
+              <a:solidFill>
+                <a:srgbClr val="0000FF"/>
+              </a:solidFill>
+            </a:endParaRPr>
+          </a:p>
+        </p:txBody>
+      </p:sp>
+      <p:pic>
+        <p:nvPicPr>
+          <p:cNvPr id="6" name="Immagine 5">
+            <a:extLst>
+              <a:ext uri="{FF2B5EF4-FFF2-40B4-BE49-F238E27FC236}">
+                <a16:creationId xmlns:a16="http://schemas.microsoft.com/office/drawing/2014/main" id="{8B4727C8-5278-15F9-529C-24F94B9EC010}"/>
+              </a:ext>
+            </a:extLst>
+          </p:cNvPr>
+          <p:cNvPicPr>
+            <a:picLocks noChangeAspect="1"/>
+          </p:cNvPicPr>
+          <p:nvPr/>
+        </p:nvPicPr>
+        <p:blipFill>
+          <a:blip r:embed="rId2"/>
+          <a:stretch>
+            <a:fillRect/>
+          </a:stretch>
+        </p:blipFill>
+        <p:spPr>
+          <a:xfrm>
+            <a:off x="470375" y="2241783"/>
+            <a:ext cx="4742279" cy="3359114"/>
+          </a:xfrm>
+          <a:prstGeom prst="rect">
+            <a:avLst/>
+          </a:prstGeom>
+        </p:spPr>
+      </p:pic>
+      <p:pic>
+        <p:nvPicPr>
+          <p:cNvPr id="8" name="Immagine 7">
+            <a:extLst>
+              <a:ext uri="{FF2B5EF4-FFF2-40B4-BE49-F238E27FC236}">
+                <a16:creationId xmlns:a16="http://schemas.microsoft.com/office/drawing/2014/main" id="{5D289940-DF34-BA94-F38C-78E69BC95B31}"/>
+              </a:ext>
+            </a:extLst>
+          </p:cNvPr>
+          <p:cNvPicPr>
+            <a:picLocks noChangeAspect="1"/>
+          </p:cNvPicPr>
+          <p:nvPr/>
+        </p:nvPicPr>
+        <p:blipFill>
+          <a:blip r:embed="rId3"/>
+          <a:stretch>
+            <a:fillRect/>
+          </a:stretch>
+        </p:blipFill>
+        <p:spPr>
+          <a:xfrm>
+            <a:off x="5468857" y="2240874"/>
+            <a:ext cx="6537486" cy="3321070"/>
+          </a:xfrm>
+          <a:prstGeom prst="rect">
+            <a:avLst/>
+          </a:prstGeom>
+        </p:spPr>
+      </p:pic>
+    </p:spTree>
+    <p:extLst>
+      <p:ext uri="{BB962C8B-B14F-4D97-AF65-F5344CB8AC3E}">
+        <p14:creationId xmlns:p14="http://schemas.microsoft.com/office/powerpoint/2010/main" val="1238228844"/>
+      </p:ext>
+    </p:extLst>
+  </p:cSld>
+  <p:clrMapOvr>
+    <a:masterClrMapping/>
+  </p:clrMapOvr>
+  <p:transition/>
+</p:sld>
+</file>
+
+<file path=ppt/slides/slide18.xml><?xml version="1.0" encoding="utf-8"?>
+<p:sld xmlns:a="http://schemas.openxmlformats.org/drawingml/2006/main" xmlns:r="http://schemas.openxmlformats.org/officeDocument/2006/relationships" xmlns:p="http://schemas.openxmlformats.org/presentationml/2006/main">
+  <p:cSld>
+    <p:spTree>
+      <p:nvGrpSpPr>
+        <p:cNvPr id="1" name="">
+          <a:extLst>
+            <a:ext uri="{FF2B5EF4-FFF2-40B4-BE49-F238E27FC236}">
+              <a16:creationId xmlns:a16="http://schemas.microsoft.com/office/drawing/2014/main" id="{670BB250-1E7D-A6B9-F138-D350FA37A7F0}"/>
+            </a:ext>
+          </a:extLst>
+        </p:cNvPr>
+        <p:cNvGrpSpPr/>
+        <p:nvPr/>
+      </p:nvGrpSpPr>
+      <p:grpSpPr>
+        <a:xfrm>
+          <a:off x="0" y="0"/>
+          <a:ext cx="0" cy="0"/>
+          <a:chOff x="0" y="0"/>
+          <a:chExt cx="0" cy="0"/>
+        </a:xfrm>
+      </p:grpSpPr>
+      <p:sp>
+        <p:nvSpPr>
+          <p:cNvPr id="2" name="Title 1">
+            <a:extLst>
+              <a:ext uri="{FF2B5EF4-FFF2-40B4-BE49-F238E27FC236}">
+                <a16:creationId xmlns:a16="http://schemas.microsoft.com/office/drawing/2014/main" id="{3648C872-8531-5A68-5B34-016643A81B22}"/>
+              </a:ext>
+            </a:extLst>
+          </p:cNvPr>
+          <p:cNvSpPr>
+            <a:spLocks noGrp="1"/>
+          </p:cNvSpPr>
+          <p:nvPr>
+            <p:ph type="title"/>
+          </p:nvPr>
+        </p:nvSpPr>
+        <p:spPr>
+          <a:xfrm>
+            <a:off x="766232" y="222381"/>
+            <a:ext cx="11425767" cy="720596"/>
+          </a:xfrm>
+        </p:spPr>
+        <p:txBody>
+          <a:bodyPr/>
+          <a:lstStyle/>
+          <a:p>
+            <a:r>
+              <a:rPr lang="it-IT" noProof="0" dirty="0"/>
+              <a:t>Slide </a:t>
+            </a:r>
+            <a:r>
+              <a:rPr lang="it-IT" noProof="0" dirty="0" err="1"/>
+              <a:t>Structure</a:t>
+            </a:r>
+            <a:endParaRPr lang="en-US" dirty="0"/>
+          </a:p>
+        </p:txBody>
+      </p:sp>
+      <p:sp>
+        <p:nvSpPr>
+          <p:cNvPr id="4" name="Slide Number Placeholder 3">
+            <a:extLst>
+              <a:ext uri="{FF2B5EF4-FFF2-40B4-BE49-F238E27FC236}">
+                <a16:creationId xmlns:a16="http://schemas.microsoft.com/office/drawing/2014/main" id="{5F97521F-F33D-40A7-0979-FCC725C35702}"/>
+              </a:ext>
+            </a:extLst>
+          </p:cNvPr>
+          <p:cNvSpPr>
+            <a:spLocks noGrp="1"/>
+          </p:cNvSpPr>
+          <p:nvPr>
+            <p:ph type="sldNum" sz="quarter" idx="11"/>
+          </p:nvPr>
+        </p:nvSpPr>
+        <p:spPr/>
+        <p:txBody>
+          <a:bodyPr/>
+          <a:lstStyle/>
+          <a:p>
+            <a:fld id="{2E6AEE32-87CF-4B18-ACD9-DC92317905A5}" type="slidenum">
+              <a:rPr lang="en-US" altLang="en-US" smtClean="0"/>
+              <a:pPr/>
+              <a:t>18</a:t>
+            </a:fld>
+            <a:endParaRPr lang="en-US" altLang="en-US" dirty="0"/>
+          </a:p>
+        </p:txBody>
+      </p:sp>
+      <p:sp>
+        <p:nvSpPr>
+          <p:cNvPr id="5" name="Footer Placeholder 4">
+            <a:extLst>
+              <a:ext uri="{FF2B5EF4-FFF2-40B4-BE49-F238E27FC236}">
+                <a16:creationId xmlns:a16="http://schemas.microsoft.com/office/drawing/2014/main" id="{998C51AE-0E5B-D6D9-14B7-330923A56100}"/>
+              </a:ext>
+            </a:extLst>
+          </p:cNvPr>
+          <p:cNvSpPr>
+            <a:spLocks noGrp="1"/>
+          </p:cNvSpPr>
+          <p:nvPr>
+            <p:ph type="ftr" sz="quarter" idx="12"/>
+          </p:nvPr>
+        </p:nvSpPr>
+        <p:spPr/>
+        <p:txBody>
+          <a:bodyPr/>
+          <a:lstStyle/>
+          <a:p>
+            <a:pPr>
+              <a:defRPr/>
+            </a:pPr>
+            <a:endParaRPr lang="en-US" dirty="0"/>
+          </a:p>
+        </p:txBody>
+      </p:sp>
+      <p:sp>
+        <p:nvSpPr>
+          <p:cNvPr id="9" name="TextBox 8">
+            <a:extLst>
+              <a:ext uri="{FF2B5EF4-FFF2-40B4-BE49-F238E27FC236}">
+                <a16:creationId xmlns:a16="http://schemas.microsoft.com/office/drawing/2014/main" id="{729AD392-8F26-681A-E1BC-F2879E87907D}"/>
               </a:ext>
             </a:extLst>
           </p:cNvPr>
@@ -5578,7 +6504,7 @@
           <p:cNvPr id="11" name="Rectangle 10">
             <a:extLst>
               <a:ext uri="{FF2B5EF4-FFF2-40B4-BE49-F238E27FC236}">
-                <a16:creationId xmlns:a16="http://schemas.microsoft.com/office/drawing/2014/main" id="{50E67C05-F2DF-B133-1642-E70C45B752EF}"/>
+                <a16:creationId xmlns:a16="http://schemas.microsoft.com/office/drawing/2014/main" id="{26F0A0CD-3364-B24E-1729-FC1990C36303}"/>
               </a:ext>
             </a:extLst>
           </p:cNvPr>
@@ -5652,7 +6578,7 @@
     </p:spTree>
     <p:extLst>
       <p:ext uri="{BB962C8B-B14F-4D97-AF65-F5344CB8AC3E}">
-        <p14:creationId xmlns:p14="http://schemas.microsoft.com/office/powerpoint/2010/main" val="2176219075"/>
+        <p14:creationId xmlns:p14="http://schemas.microsoft.com/office/powerpoint/2010/main" val="2752778631"/>
       </p:ext>
     </p:extLst>
   </p:cSld>
@@ -5663,7 +6589,7 @@
 </p:sld>
 </file>
 
-<file path=ppt/slides/slide17.xml><?xml version="1.0" encoding="utf-8"?>
+<file path=ppt/slides/slide19.xml><?xml version="1.0" encoding="utf-8"?>
 <p:sld xmlns:a="http://schemas.openxmlformats.org/drawingml/2006/main" xmlns:r="http://schemas.openxmlformats.org/officeDocument/2006/relationships" xmlns:p="http://schemas.openxmlformats.org/presentationml/2006/main">
   <p:cSld>
     <p:spTree>
@@ -5671,7 +6597,7 @@
         <p:cNvPr id="1" name="">
           <a:extLst>
             <a:ext uri="{FF2B5EF4-FFF2-40B4-BE49-F238E27FC236}">
-              <a16:creationId xmlns:a16="http://schemas.microsoft.com/office/drawing/2014/main" id="{670BB250-1E7D-A6B9-F138-D350FA37A7F0}"/>
+              <a16:creationId xmlns:a16="http://schemas.microsoft.com/office/drawing/2014/main" id="{13BC20C6-13DC-24B6-6536-798F3356E9EF}"/>
             </a:ext>
           </a:extLst>
         </p:cNvPr>
@@ -5691,7 +6617,7 @@
           <p:cNvPr id="2" name="Title 1">
             <a:extLst>
               <a:ext uri="{FF2B5EF4-FFF2-40B4-BE49-F238E27FC236}">
-                <a16:creationId xmlns:a16="http://schemas.microsoft.com/office/drawing/2014/main" id="{3648C872-8531-5A68-5B34-016643A81B22}"/>
+                <a16:creationId xmlns:a16="http://schemas.microsoft.com/office/drawing/2014/main" id="{706D6389-E012-661B-7CB1-89B814AECFA2}"/>
               </a:ext>
             </a:extLst>
           </p:cNvPr>
@@ -5729,7 +6655,7 @@
           <p:cNvPr id="4" name="Slide Number Placeholder 3">
             <a:extLst>
               <a:ext uri="{FF2B5EF4-FFF2-40B4-BE49-F238E27FC236}">
-                <a16:creationId xmlns:a16="http://schemas.microsoft.com/office/drawing/2014/main" id="{5F97521F-F33D-40A7-0979-FCC725C35702}"/>
+                <a16:creationId xmlns:a16="http://schemas.microsoft.com/office/drawing/2014/main" id="{5C9B4F3A-6546-5DA8-D4A7-1A9D389B8A36}"/>
               </a:ext>
             </a:extLst>
           </p:cNvPr>
@@ -5748,7 +6674,7 @@
             <a:fld id="{2E6AEE32-87CF-4B18-ACD9-DC92317905A5}" type="slidenum">
               <a:rPr lang="en-US" altLang="en-US" smtClean="0"/>
               <a:pPr/>
-              <a:t>17</a:t>
+              <a:t>19</a:t>
             </a:fld>
             <a:endParaRPr lang="en-US" altLang="en-US" dirty="0"/>
           </a:p>
@@ -5759,7 +6685,7 @@
           <p:cNvPr id="5" name="Footer Placeholder 4">
             <a:extLst>
               <a:ext uri="{FF2B5EF4-FFF2-40B4-BE49-F238E27FC236}">
-                <a16:creationId xmlns:a16="http://schemas.microsoft.com/office/drawing/2014/main" id="{998C51AE-0E5B-D6D9-14B7-330923A56100}"/>
+                <a16:creationId xmlns:a16="http://schemas.microsoft.com/office/drawing/2014/main" id="{91830614-A9C6-1E74-6976-DDA026777989}"/>
               </a:ext>
             </a:extLst>
           </p:cNvPr>
@@ -5787,7 +6713,7 @@
           <p:cNvPr id="9" name="TextBox 8">
             <a:extLst>
               <a:ext uri="{FF2B5EF4-FFF2-40B4-BE49-F238E27FC236}">
-                <a16:creationId xmlns:a16="http://schemas.microsoft.com/office/drawing/2014/main" id="{729AD392-8F26-681A-E1BC-F2879E87907D}"/>
+                <a16:creationId xmlns:a16="http://schemas.microsoft.com/office/drawing/2014/main" id="{17617C54-65BB-F8A5-7CC0-DC3A97333934}"/>
               </a:ext>
             </a:extLst>
           </p:cNvPr>
@@ -5919,7 +6845,7 @@
           <p:cNvPr id="11" name="Rectangle 10">
             <a:extLst>
               <a:ext uri="{FF2B5EF4-FFF2-40B4-BE49-F238E27FC236}">
-                <a16:creationId xmlns:a16="http://schemas.microsoft.com/office/drawing/2014/main" id="{26F0A0CD-3364-B24E-1729-FC1990C36303}"/>
+                <a16:creationId xmlns:a16="http://schemas.microsoft.com/office/drawing/2014/main" id="{2E2C2D40-DEE7-54C8-3324-540F8ED714A4}"/>
               </a:ext>
             </a:extLst>
           </p:cNvPr>
@@ -5993,7 +6919,7 @@
     </p:spTree>
     <p:extLst>
       <p:ext uri="{BB962C8B-B14F-4D97-AF65-F5344CB8AC3E}">
-        <p14:creationId xmlns:p14="http://schemas.microsoft.com/office/powerpoint/2010/main" val="2752778631"/>
+        <p14:creationId xmlns:p14="http://schemas.microsoft.com/office/powerpoint/2010/main" val="1269750494"/>
       </p:ext>
     </p:extLst>
   </p:cSld>
@@ -9747,15 +10673,6 @@
 </file>
 
 <file path=customXml/item1.xml><?xml version="1.0" encoding="utf-8"?>
-<?mso-contentType ?>
-<FormTemplates xmlns="http://schemas.microsoft.com/sharepoint/v3/contenttype/forms">
-  <Display>DocumentLibraryForm</Display>
-  <Edit>DocumentLibraryForm</Edit>
-  <New>DocumentLibraryForm</New>
-</FormTemplates>
-</file>
-
-<file path=customXml/item2.xml><?xml version="1.0" encoding="utf-8"?>
 <ct:contentTypeSchema xmlns:ct="http://schemas.microsoft.com/office/2006/metadata/contentType" xmlns:ma="http://schemas.microsoft.com/office/2006/metadata/properties/metaAttributes" ct:_="" ma:_="" ma:contentTypeName="Documento" ma:contentTypeID="0x01010009A656CF8C467741A56A16B7574AC68E" ma:contentTypeVersion="12" ma:contentTypeDescription="Creare un nuovo documento." ma:contentTypeScope="" ma:versionID="4f27b0f6ef663e5da5bafac1efc6fe9a">
   <xsd:schema xmlns:xsd="http://www.w3.org/2001/XMLSchema" xmlns:xs="http://www.w3.org/2001/XMLSchema" xmlns:p="http://schemas.microsoft.com/office/2006/metadata/properties" xmlns:ns3="d81608ca-db68-4891-9f53-9b89cbfff5c6" xmlns:ns4="be3c09a5-e964-4602-bd74-bbf48e0fabf1" targetNamespace="http://schemas.microsoft.com/office/2006/metadata/properties" ma:root="true" ma:fieldsID="8a6d6b69e42fa993b1c0a33dd1bd5a45" ns3:_="" ns4:_="">
     <xsd:import namespace="d81608ca-db68-4891-9f53-9b89cbfff5c6"/>
@@ -9970,6 +10887,15 @@
 </ct:contentTypeSchema>
 </file>
 
+<file path=customXml/item2.xml><?xml version="1.0" encoding="utf-8"?>
+<?mso-contentType ?>
+<FormTemplates xmlns="http://schemas.microsoft.com/sharepoint/v3/contenttype/forms">
+  <Display>DocumentLibraryForm</Display>
+  <Edit>DocumentLibraryForm</Edit>
+  <New>DocumentLibraryForm</New>
+</FormTemplates>
+</file>
+
 <file path=customXml/item3.xml><?xml version="1.0" encoding="utf-8"?>
 <p:properties xmlns:p="http://schemas.microsoft.com/office/2006/metadata/properties" xmlns:xsi="http://www.w3.org/2001/XMLSchema-instance" xmlns:pc="http://schemas.microsoft.com/office/infopath/2007/PartnerControls">
   <documentManagement>
@@ -9979,14 +10905,6 @@
 </file>
 
 <file path=customXml/itemProps1.xml><?xml version="1.0" encoding="utf-8"?>
-<ds:datastoreItem xmlns:ds="http://schemas.openxmlformats.org/officeDocument/2006/customXml" ds:itemID="{6E8D78F2-F211-4F79-8A63-15AEAF64F23A}">
-  <ds:schemaRefs>
-    <ds:schemaRef ds:uri="http://schemas.microsoft.com/sharepoint/v3/contenttype/forms"/>
-  </ds:schemaRefs>
-</ds:datastoreItem>
-</file>
-
-<file path=customXml/itemProps2.xml><?xml version="1.0" encoding="utf-8"?>
 <ds:datastoreItem xmlns:ds="http://schemas.openxmlformats.org/officeDocument/2006/customXml" ds:itemID="{AC7A1D52-4C7C-4BE2-BA1D-9D952C857EA1}">
   <ds:schemaRefs>
     <ds:schemaRef ds:uri="http://schemas.microsoft.com/office/2006/metadata/contentType"/>
@@ -10001,6 +10919,14 @@
     <ds:schemaRef ds:uri="http://purl.org/dc/elements/1.1/"/>
     <ds:schemaRef ds:uri="http://purl.org/dc/terms/"/>
     <ds:schemaRef ds:uri="http://schemas.microsoft.com/internal/obd"/>
+  </ds:schemaRefs>
+</ds:datastoreItem>
+</file>
+
+<file path=customXml/itemProps2.xml><?xml version="1.0" encoding="utf-8"?>
+<ds:datastoreItem xmlns:ds="http://schemas.openxmlformats.org/officeDocument/2006/customXml" ds:itemID="{6E8D78F2-F211-4F79-8A63-15AEAF64F23A}">
+  <ds:schemaRefs>
+    <ds:schemaRef ds:uri="http://schemas.microsoft.com/sharepoint/v3/contenttype/forms"/>
   </ds:schemaRefs>
 </ds:datastoreItem>
 </file>

--- a/Documentazione.pptx
+++ b/Documentazione.pptx
@@ -20,16 +20,16 @@
     <p:sldId id="1163" r:id="rId11"/>
     <p:sldId id="1164" r:id="rId12"/>
     <p:sldId id="1165" r:id="rId13"/>
-    <p:sldId id="1167" r:id="rId14"/>
-    <p:sldId id="1166" r:id="rId15"/>
-    <p:sldId id="1168" r:id="rId16"/>
-    <p:sldId id="1171" r:id="rId17"/>
-    <p:sldId id="1172" r:id="rId18"/>
-    <p:sldId id="1173" r:id="rId19"/>
-    <p:sldId id="1169" r:id="rId20"/>
-    <p:sldId id="1174" r:id="rId21"/>
-    <p:sldId id="1170" r:id="rId22"/>
-    <p:sldId id="1175" r:id="rId23"/>
+    <p:sldId id="1176" r:id="rId14"/>
+    <p:sldId id="1167" r:id="rId15"/>
+    <p:sldId id="1166" r:id="rId16"/>
+    <p:sldId id="1168" r:id="rId17"/>
+    <p:sldId id="1171" r:id="rId18"/>
+    <p:sldId id="1172" r:id="rId19"/>
+    <p:sldId id="1173" r:id="rId20"/>
+    <p:sldId id="1169" r:id="rId21"/>
+    <p:sldId id="1177" r:id="rId22"/>
+    <p:sldId id="1174" r:id="rId23"/>
   </p:sldIdLst>
   <p:sldSz cx="12192000" cy="6858000"/>
   <p:notesSz cx="6946900" cy="10058400"/>
@@ -159,6 +159,33 @@
     </a:lvl9pPr>
   </p:defaultTextStyle>
   <p:extLst>
+    <p:ext uri="{521415D9-36F7-43E2-AB2F-B90AF26B5E84}">
+      <p14:sectionLst xmlns:p14="http://schemas.microsoft.com/office/powerpoint/2010/main">
+        <p14:section name="Sezione predefinita" id="{6BD7EC1F-427B-4DC3-A8E8-F45B5A8302B2}">
+          <p14:sldIdLst>
+            <p14:sldId id="898"/>
+            <p14:sldId id="1159"/>
+            <p14:sldId id="1129"/>
+            <p14:sldId id="1160"/>
+            <p14:sldId id="1161"/>
+            <p14:sldId id="1162"/>
+            <p14:sldId id="1163"/>
+            <p14:sldId id="1164"/>
+            <p14:sldId id="1165"/>
+            <p14:sldId id="1176"/>
+            <p14:sldId id="1167"/>
+            <p14:sldId id="1166"/>
+            <p14:sldId id="1168"/>
+            <p14:sldId id="1171"/>
+            <p14:sldId id="1172"/>
+            <p14:sldId id="1173"/>
+            <p14:sldId id="1169"/>
+            <p14:sldId id="1177"/>
+            <p14:sldId id="1174"/>
+          </p14:sldIdLst>
+        </p14:section>
+      </p14:sectionLst>
+    </p:ext>
     <p:ext uri="{EFAFB233-063F-42B5-8137-9DF3F51BA10A}">
       <p15:sldGuideLst xmlns:p15="http://schemas.microsoft.com/office/powerpoint/2012/main">
         <p15:guide id="1" orient="horz" pos="686" userDrawn="1">
@@ -3760,6 +3787,377 @@
         <p:cNvPr id="1" name="">
           <a:extLst>
             <a:ext uri="{FF2B5EF4-FFF2-40B4-BE49-F238E27FC236}">
+              <a16:creationId xmlns:a16="http://schemas.microsoft.com/office/drawing/2014/main" id="{566EC684-3CED-EFF0-1031-949E49046D20}"/>
+            </a:ext>
+          </a:extLst>
+        </p:cNvPr>
+        <p:cNvGrpSpPr/>
+        <p:nvPr/>
+      </p:nvGrpSpPr>
+      <p:grpSpPr>
+        <a:xfrm>
+          <a:off x="0" y="0"/>
+          <a:ext cx="0" cy="0"/>
+          <a:chOff x="0" y="0"/>
+          <a:chExt cx="0" cy="0"/>
+        </a:xfrm>
+      </p:grpSpPr>
+      <p:sp>
+        <p:nvSpPr>
+          <p:cNvPr id="2" name="Title 1">
+            <a:extLst>
+              <a:ext uri="{FF2B5EF4-FFF2-40B4-BE49-F238E27FC236}">
+                <a16:creationId xmlns:a16="http://schemas.microsoft.com/office/drawing/2014/main" id="{8E91DC04-B2EE-FD84-5C36-1362EB631205}"/>
+              </a:ext>
+            </a:extLst>
+          </p:cNvPr>
+          <p:cNvSpPr>
+            <a:spLocks noGrp="1"/>
+          </p:cNvSpPr>
+          <p:nvPr>
+            <p:ph type="title"/>
+          </p:nvPr>
+        </p:nvSpPr>
+        <p:spPr>
+          <a:xfrm>
+            <a:off x="766232" y="222381"/>
+            <a:ext cx="11425767" cy="720596"/>
+          </a:xfrm>
+        </p:spPr>
+        <p:txBody>
+          <a:bodyPr/>
+          <a:lstStyle/>
+          <a:p>
+            <a:pPr marL="457200" lvl="1"/>
+            <a:r>
+              <a:rPr lang="en-US" sz="3000" dirty="0">
+                <a:latin typeface="+mj-lt"/>
+                <a:ea typeface="+mj-ea"/>
+                <a:cs typeface="+mj-cs"/>
+              </a:rPr>
+              <a:t>Frequency Response</a:t>
+            </a:r>
+          </a:p>
+        </p:txBody>
+      </p:sp>
+      <p:sp>
+        <p:nvSpPr>
+          <p:cNvPr id="4" name="Slide Number Placeholder 3">
+            <a:extLst>
+              <a:ext uri="{FF2B5EF4-FFF2-40B4-BE49-F238E27FC236}">
+                <a16:creationId xmlns:a16="http://schemas.microsoft.com/office/drawing/2014/main" id="{8789C49B-4ABE-1863-7861-F440F6075E97}"/>
+              </a:ext>
+            </a:extLst>
+          </p:cNvPr>
+          <p:cNvSpPr>
+            <a:spLocks noGrp="1"/>
+          </p:cNvSpPr>
+          <p:nvPr>
+            <p:ph type="sldNum" sz="quarter" idx="11"/>
+          </p:nvPr>
+        </p:nvSpPr>
+        <p:spPr/>
+        <p:txBody>
+          <a:bodyPr/>
+          <a:lstStyle/>
+          <a:p>
+            <a:fld id="{2E6AEE32-87CF-4B18-ACD9-DC92317905A5}" type="slidenum">
+              <a:rPr lang="en-US" altLang="en-US" smtClean="0"/>
+              <a:pPr/>
+              <a:t>10</a:t>
+            </a:fld>
+            <a:endParaRPr lang="en-US" altLang="en-US" dirty="0"/>
+          </a:p>
+        </p:txBody>
+      </p:sp>
+      <p:sp>
+        <p:nvSpPr>
+          <p:cNvPr id="5" name="Footer Placeholder 4">
+            <a:extLst>
+              <a:ext uri="{FF2B5EF4-FFF2-40B4-BE49-F238E27FC236}">
+                <a16:creationId xmlns:a16="http://schemas.microsoft.com/office/drawing/2014/main" id="{D038C74F-CD84-3203-9CF1-EDF93C797163}"/>
+              </a:ext>
+            </a:extLst>
+          </p:cNvPr>
+          <p:cNvSpPr>
+            <a:spLocks noGrp="1"/>
+          </p:cNvSpPr>
+          <p:nvPr>
+            <p:ph type="ftr" sz="quarter" idx="12"/>
+          </p:nvPr>
+        </p:nvSpPr>
+        <p:spPr/>
+        <p:txBody>
+          <a:bodyPr/>
+          <a:lstStyle/>
+          <a:p>
+            <a:pPr>
+              <a:defRPr/>
+            </a:pPr>
+            <a:endParaRPr lang="en-US" dirty="0"/>
+          </a:p>
+        </p:txBody>
+      </p:sp>
+      <p:sp>
+        <p:nvSpPr>
+          <p:cNvPr id="9" name="TextBox 8">
+            <a:extLst>
+              <a:ext uri="{FF2B5EF4-FFF2-40B4-BE49-F238E27FC236}">
+                <a16:creationId xmlns:a16="http://schemas.microsoft.com/office/drawing/2014/main" id="{B6958FF2-A128-7A94-6F60-4C3D0A1F03FD}"/>
+              </a:ext>
+            </a:extLst>
+          </p:cNvPr>
+          <p:cNvSpPr txBox="1"/>
+          <p:nvPr/>
+        </p:nvSpPr>
+        <p:spPr>
+          <a:xfrm>
+            <a:off x="766232" y="4464115"/>
+            <a:ext cx="10728857" cy="2031325"/>
+          </a:xfrm>
+          <a:prstGeom prst="rect">
+            <a:avLst/>
+          </a:prstGeom>
+          <a:noFill/>
+        </p:spPr>
+        <p:txBody>
+          <a:bodyPr wrap="square" rtlCol="0">
+            <a:spAutoFit/>
+          </a:bodyPr>
+          <a:lstStyle/>
+          <a:p>
+            <a:pPr marL="342900" indent="-342900">
+              <a:buFont typeface="Wingdings" panose="05000000000000000000" pitchFamily="2" charset="2"/>
+              <a:buChar char="q"/>
+            </a:pPr>
+            <a:endParaRPr lang="en-GB" sz="1800" b="1" dirty="0">
+              <a:solidFill>
+                <a:srgbClr val="0000FF"/>
+              </a:solidFill>
+            </a:endParaRPr>
+          </a:p>
+          <a:p>
+            <a:pPr marL="342900" indent="-342900">
+              <a:buFont typeface="Wingdings" panose="05000000000000000000" pitchFamily="2" charset="2"/>
+              <a:buChar char="q"/>
+            </a:pPr>
+            <a:endParaRPr lang="en-GB" sz="1800" b="1" dirty="0">
+              <a:solidFill>
+                <a:srgbClr val="0000FF"/>
+              </a:solidFill>
+            </a:endParaRPr>
+          </a:p>
+          <a:p>
+            <a:pPr marL="342900" indent="-342900">
+              <a:buFont typeface="Wingdings" panose="05000000000000000000" pitchFamily="2" charset="2"/>
+              <a:buChar char="q"/>
+            </a:pPr>
+            <a:endParaRPr lang="en-GB" sz="1800" b="1" dirty="0">
+              <a:solidFill>
+                <a:srgbClr val="0000FF"/>
+              </a:solidFill>
+            </a:endParaRPr>
+          </a:p>
+          <a:p>
+            <a:pPr marL="342900" indent="-342900">
+              <a:buFont typeface="Wingdings" panose="05000000000000000000" pitchFamily="2" charset="2"/>
+              <a:buChar char="q"/>
+            </a:pPr>
+            <a:endParaRPr lang="en-GB" sz="1800" b="1" dirty="0">
+              <a:solidFill>
+                <a:srgbClr val="0000FF"/>
+              </a:solidFill>
+            </a:endParaRPr>
+          </a:p>
+          <a:p>
+            <a:pPr marL="342900" indent="-342900">
+              <a:buFont typeface="Wingdings" panose="05000000000000000000" pitchFamily="2" charset="2"/>
+              <a:buChar char="q"/>
+            </a:pPr>
+            <a:r>
+              <a:rPr lang="en-GB" sz="1800" b="1" dirty="0">
+                <a:solidFill>
+                  <a:srgbClr val="0000FF"/>
+                </a:solidFill>
+              </a:rPr>
+              <a:t>Il </a:t>
+            </a:r>
+            <a:r>
+              <a:rPr lang="en-GB" sz="1800" b="1" dirty="0" err="1">
+                <a:solidFill>
+                  <a:srgbClr val="0000FF"/>
+                </a:solidFill>
+              </a:rPr>
+              <a:t>filtro</a:t>
+            </a:r>
+            <a:r>
+              <a:rPr lang="en-GB" sz="1800" b="1" dirty="0">
+                <a:solidFill>
+                  <a:srgbClr val="0000FF"/>
+                </a:solidFill>
+              </a:rPr>
+              <a:t> ha </a:t>
+            </a:r>
+            <a:r>
+              <a:rPr lang="en-GB" sz="1800" b="1" dirty="0" err="1">
+                <a:solidFill>
+                  <a:srgbClr val="0000FF"/>
+                </a:solidFill>
+              </a:rPr>
+              <a:t>rimosso</a:t>
+            </a:r>
+            <a:r>
+              <a:rPr lang="en-GB" sz="1800" b="1" dirty="0">
+                <a:solidFill>
+                  <a:srgbClr val="0000FF"/>
+                </a:solidFill>
+              </a:rPr>
+              <a:t> il </a:t>
+            </a:r>
+            <a:r>
+              <a:rPr lang="en-GB" sz="1800" b="1" dirty="0" err="1">
+                <a:solidFill>
+                  <a:srgbClr val="0000FF"/>
+                </a:solidFill>
+              </a:rPr>
+              <a:t>rumore</a:t>
+            </a:r>
+            <a:r>
+              <a:rPr lang="en-GB" sz="1800" b="1" dirty="0">
+                <a:solidFill>
+                  <a:srgbClr val="0000FF"/>
+                </a:solidFill>
+              </a:rPr>
+              <a:t> a </a:t>
+            </a:r>
+            <a:r>
+              <a:rPr lang="en-GB" sz="1800" b="1" dirty="0" err="1">
+                <a:solidFill>
+                  <a:srgbClr val="0000FF"/>
+                </a:solidFill>
+              </a:rPr>
+              <a:t>frequenze</a:t>
+            </a:r>
+            <a:r>
+              <a:rPr lang="en-GB" sz="1800" b="1" dirty="0">
+                <a:solidFill>
+                  <a:srgbClr val="0000FF"/>
+                </a:solidFill>
+              </a:rPr>
+              <a:t> elevate(</a:t>
+            </a:r>
+            <a:r>
+              <a:rPr lang="en-GB" sz="1800" b="1" dirty="0" err="1">
+                <a:solidFill>
+                  <a:srgbClr val="0000FF"/>
+                </a:solidFill>
+              </a:rPr>
+              <a:t>grafico</a:t>
+            </a:r>
+            <a:r>
+              <a:rPr lang="en-GB" sz="1800" b="1" dirty="0">
+                <a:solidFill>
+                  <a:srgbClr val="0000FF"/>
+                </a:solidFill>
+              </a:rPr>
+              <a:t> di Destra)</a:t>
+            </a:r>
+          </a:p>
+          <a:p>
+            <a:pPr marL="342900" indent="-342900">
+              <a:buFont typeface="Wingdings" panose="05000000000000000000" pitchFamily="2" charset="2"/>
+              <a:buChar char="q"/>
+            </a:pPr>
+            <a:r>
+              <a:rPr lang="en-GB" sz="1800" b="1" dirty="0">
+                <a:solidFill>
+                  <a:srgbClr val="0000FF"/>
+                </a:solidFill>
+              </a:rPr>
+              <a:t>0 a </a:t>
+            </a:r>
+            <a:r>
+              <a:rPr lang="en-GB" sz="1800" b="1" dirty="0" err="1">
+                <a:solidFill>
+                  <a:srgbClr val="0000FF"/>
+                </a:solidFill>
+              </a:rPr>
+              <a:t>multipli</a:t>
+            </a:r>
+            <a:r>
+              <a:rPr lang="en-GB" sz="1800" b="1" dirty="0">
+                <a:solidFill>
+                  <a:srgbClr val="0000FF"/>
+                </a:solidFill>
+              </a:rPr>
+              <a:t> di F/N</a:t>
+            </a:r>
+          </a:p>
+          <a:p>
+            <a:pPr marL="342900" indent="-342900">
+              <a:buFont typeface="Wingdings" panose="05000000000000000000" pitchFamily="2" charset="2"/>
+              <a:buChar char="q"/>
+            </a:pPr>
+            <a:endParaRPr lang="en-GB" sz="1800" b="1" dirty="0">
+              <a:solidFill>
+                <a:srgbClr val="0000FF"/>
+              </a:solidFill>
+            </a:endParaRPr>
+          </a:p>
+        </p:txBody>
+      </p:sp>
+      <p:pic>
+        <p:nvPicPr>
+          <p:cNvPr id="7" name="Immagine 6">
+            <a:extLst>
+              <a:ext uri="{FF2B5EF4-FFF2-40B4-BE49-F238E27FC236}">
+                <a16:creationId xmlns:a16="http://schemas.microsoft.com/office/drawing/2014/main" id="{4449392E-BEC1-14AF-1784-C773561B2748}"/>
+              </a:ext>
+            </a:extLst>
+          </p:cNvPr>
+          <p:cNvPicPr>
+            <a:picLocks noChangeAspect="1"/>
+          </p:cNvPicPr>
+          <p:nvPr/>
+        </p:nvPicPr>
+        <p:blipFill>
+          <a:blip r:embed="rId2"/>
+          <a:stretch>
+            <a:fillRect/>
+          </a:stretch>
+        </p:blipFill>
+        <p:spPr>
+          <a:xfrm>
+            <a:off x="622545" y="1583795"/>
+            <a:ext cx="7086110" cy="3516586"/>
+          </a:xfrm>
+          <a:prstGeom prst="rect">
+            <a:avLst/>
+          </a:prstGeom>
+        </p:spPr>
+      </p:pic>
+    </p:spTree>
+    <p:extLst>
+      <p:ext uri="{BB962C8B-B14F-4D97-AF65-F5344CB8AC3E}">
+        <p14:creationId xmlns:p14="http://schemas.microsoft.com/office/powerpoint/2010/main" val="37690902"/>
+      </p:ext>
+    </p:extLst>
+  </p:cSld>
+  <p:clrMapOvr>
+    <a:masterClrMapping/>
+  </p:clrMapOvr>
+  <p:transition/>
+</p:sld>
+</file>
+
+<file path=ppt/slides/slide11.xml><?xml version="1.0" encoding="utf-8"?>
+<p:sld xmlns:a="http://schemas.openxmlformats.org/drawingml/2006/main" xmlns:r="http://schemas.openxmlformats.org/officeDocument/2006/relationships" xmlns:p="http://schemas.openxmlformats.org/presentationml/2006/main">
+  <p:cSld>
+    <p:spTree>
+      <p:nvGrpSpPr>
+        <p:cNvPr id="1" name="">
+          <a:extLst>
+            <a:ext uri="{FF2B5EF4-FFF2-40B4-BE49-F238E27FC236}">
               <a16:creationId xmlns:a16="http://schemas.microsoft.com/office/drawing/2014/main" id="{74F2A7E5-1B21-A348-A550-2908CBD8383A}"/>
             </a:ext>
           </a:extLst>
@@ -3845,7 +4243,7 @@
             <a:fld id="{2E6AEE32-87CF-4B18-ACD9-DC92317905A5}" type="slidenum">
               <a:rPr lang="en-US" altLang="en-US" smtClean="0"/>
               <a:pPr/>
-              <a:t>10</a:t>
+              <a:t>11</a:t>
             </a:fld>
             <a:endParaRPr lang="en-US" altLang="en-US" dirty="0"/>
           </a:p>
@@ -4017,7 +4415,7 @@
 </p:sld>
 </file>
 
-<file path=ppt/slides/slide11.xml><?xml version="1.0" encoding="utf-8"?>
+<file path=ppt/slides/slide12.xml><?xml version="1.0" encoding="utf-8"?>
 <p:sld xmlns:a="http://schemas.openxmlformats.org/drawingml/2006/main" xmlns:r="http://schemas.openxmlformats.org/officeDocument/2006/relationships" xmlns:p="http://schemas.openxmlformats.org/presentationml/2006/main">
   <p:cSld>
     <p:spTree>
@@ -4110,7 +4508,7 @@
             <a:fld id="{2E6AEE32-87CF-4B18-ACD9-DC92317905A5}" type="slidenum">
               <a:rPr lang="en-US" altLang="en-US" smtClean="0"/>
               <a:pPr/>
-              <a:t>11</a:t>
+              <a:t>12</a:t>
             </a:fld>
             <a:endParaRPr lang="en-US" altLang="en-US" dirty="0"/>
           </a:p>
@@ -4282,7 +4680,7 @@
 </p:sld>
 </file>
 
-<file path=ppt/slides/slide12.xml><?xml version="1.0" encoding="utf-8"?>
+<file path=ppt/slides/slide13.xml><?xml version="1.0" encoding="utf-8"?>
 <p:sld xmlns:a="http://schemas.openxmlformats.org/drawingml/2006/main" xmlns:r="http://schemas.openxmlformats.org/officeDocument/2006/relationships" xmlns:p="http://schemas.openxmlformats.org/presentationml/2006/main">
   <p:cSld>
     <p:spTree>
@@ -4375,7 +4773,7 @@
             <a:fld id="{2E6AEE32-87CF-4B18-ACD9-DC92317905A5}" type="slidenum">
               <a:rPr lang="en-US" altLang="en-US" smtClean="0"/>
               <a:pPr/>
-              <a:t>12</a:t>
+              <a:t>13</a:t>
             </a:fld>
             <a:endParaRPr lang="en-US" altLang="en-US" dirty="0"/>
           </a:p>
@@ -4547,7 +4945,7 @@
 </p:sld>
 </file>
 
-<file path=ppt/slides/slide13.xml><?xml version="1.0" encoding="utf-8"?>
+<file path=ppt/slides/slide14.xml><?xml version="1.0" encoding="utf-8"?>
 <p:sld xmlns:a="http://schemas.openxmlformats.org/drawingml/2006/main" xmlns:r="http://schemas.openxmlformats.org/officeDocument/2006/relationships" xmlns:p="http://schemas.openxmlformats.org/presentationml/2006/main">
   <p:cSld>
     <p:spTree>
@@ -4640,7 +5038,7 @@
             <a:fld id="{2E6AEE32-87CF-4B18-ACD9-DC92317905A5}" type="slidenum">
               <a:rPr lang="en-US" altLang="en-US" smtClean="0"/>
               <a:pPr/>
-              <a:t>13</a:t>
+              <a:t>14</a:t>
             </a:fld>
             <a:endParaRPr lang="en-US" altLang="en-US" dirty="0"/>
           </a:p>
@@ -4806,7 +5204,7 @@
 </p:sld>
 </file>
 
-<file path=ppt/slides/slide14.xml><?xml version="1.0" encoding="utf-8"?>
+<file path=ppt/slides/slide15.xml><?xml version="1.0" encoding="utf-8"?>
 <p:sld xmlns:a="http://schemas.openxmlformats.org/drawingml/2006/main" xmlns:r="http://schemas.openxmlformats.org/officeDocument/2006/relationships" xmlns:p="http://schemas.openxmlformats.org/presentationml/2006/main">
   <p:cSld>
     <p:spTree>
@@ -4899,7 +5297,7 @@
             <a:fld id="{2E6AEE32-87CF-4B18-ACD9-DC92317905A5}" type="slidenum">
               <a:rPr lang="en-US" altLang="en-US" smtClean="0"/>
               <a:pPr/>
-              <a:t>14</a:t>
+              <a:t>15</a:t>
             </a:fld>
             <a:endParaRPr lang="en-US" altLang="en-US" dirty="0"/>
           </a:p>
@@ -5065,7 +5463,7 @@
 </p:sld>
 </file>
 
-<file path=ppt/slides/slide15.xml><?xml version="1.0" encoding="utf-8"?>
+<file path=ppt/slides/slide16.xml><?xml version="1.0" encoding="utf-8"?>
 <p:sld xmlns:a="http://schemas.openxmlformats.org/drawingml/2006/main" xmlns:r="http://schemas.openxmlformats.org/officeDocument/2006/relationships" xmlns:p="http://schemas.openxmlformats.org/presentationml/2006/main">
   <p:cSld>
     <p:spTree>
@@ -5158,7 +5556,7 @@
             <a:fld id="{2E6AEE32-87CF-4B18-ACD9-DC92317905A5}" type="slidenum">
               <a:rPr lang="en-US" altLang="en-US" smtClean="0"/>
               <a:pPr/>
-              <a:t>15</a:t>
+              <a:t>16</a:t>
             </a:fld>
             <a:endParaRPr lang="en-US" altLang="en-US" dirty="0"/>
           </a:p>
@@ -5324,7 +5722,7 @@
 </p:sld>
 </file>
 
-<file path=ppt/slides/slide16.xml><?xml version="1.0" encoding="utf-8"?>
+<file path=ppt/slides/slide17.xml><?xml version="1.0" encoding="utf-8"?>
 <p:sld xmlns:a="http://schemas.openxmlformats.org/drawingml/2006/main" xmlns:r="http://schemas.openxmlformats.org/officeDocument/2006/relationships" xmlns:p="http://schemas.openxmlformats.org/presentationml/2006/main">
   <p:cSld>
     <p:spTree>
@@ -5716,7 +6114,7 @@
                   <a:spcPts val="600"/>
                 </a:spcAft>
               </a:pPr>
-              <a:t>16</a:t>
+              <a:t>17</a:t>
             </a:fld>
             <a:endParaRPr lang="en-US" altLang="en-US" kern="1200">
               <a:latin typeface="Verdana" panose="020B0604030504040204" pitchFamily="34" charset="0"/>
@@ -5840,7 +6238,845 @@
 </p:sld>
 </file>
 
-<file path=ppt/slides/slide17.xml><?xml version="1.0" encoding="utf-8"?>
+<file path=ppt/slides/slide18.xml><?xml version="1.0" encoding="utf-8"?>
+<p:sld xmlns:a="http://schemas.openxmlformats.org/drawingml/2006/main" xmlns:r="http://schemas.openxmlformats.org/officeDocument/2006/relationships" xmlns:p="http://schemas.openxmlformats.org/presentationml/2006/main">
+  <p:cSld>
+    <p:spTree>
+      <p:nvGrpSpPr>
+        <p:cNvPr id="1" name="">
+          <a:extLst>
+            <a:ext uri="{FF2B5EF4-FFF2-40B4-BE49-F238E27FC236}">
+              <a16:creationId xmlns:a16="http://schemas.microsoft.com/office/drawing/2014/main" id="{116B3A23-DBE8-4DE1-80B6-95C0407E2C9D}"/>
+            </a:ext>
+          </a:extLst>
+        </p:cNvPr>
+        <p:cNvGrpSpPr/>
+        <p:nvPr/>
+      </p:nvGrpSpPr>
+      <p:grpSpPr>
+        <a:xfrm>
+          <a:off x="0" y="0"/>
+          <a:ext cx="0" cy="0"/>
+          <a:chOff x="0" y="0"/>
+          <a:chExt cx="0" cy="0"/>
+        </a:xfrm>
+      </p:grpSpPr>
+      <p:sp>
+        <p:nvSpPr>
+          <p:cNvPr id="2" name="Title 1">
+            <a:extLst>
+              <a:ext uri="{FF2B5EF4-FFF2-40B4-BE49-F238E27FC236}">
+                <a16:creationId xmlns:a16="http://schemas.microsoft.com/office/drawing/2014/main" id="{9EFDC5AA-737C-89ED-A043-D42AA6EF3AB2}"/>
+              </a:ext>
+            </a:extLst>
+          </p:cNvPr>
+          <p:cNvSpPr>
+            <a:spLocks noGrp="1"/>
+          </p:cNvSpPr>
+          <p:nvPr>
+            <p:ph type="title"/>
+          </p:nvPr>
+        </p:nvSpPr>
+        <p:spPr>
+          <a:xfrm>
+            <a:off x="766233" y="222381"/>
+            <a:ext cx="7971367" cy="720596"/>
+          </a:xfrm>
+        </p:spPr>
+        <p:txBody>
+          <a:bodyPr vert="horz" wrap="square" lIns="91440" tIns="45720" rIns="91440" bIns="45720" numCol="1" anchor="b" anchorCtr="0" compatLnSpc="1">
+            <a:prstTxWarp prst="textNoShape">
+              <a:avLst/>
+            </a:prstTxWarp>
+            <a:normAutofit/>
+          </a:bodyPr>
+          <a:lstStyle/>
+          <a:p>
+            <a:r>
+              <a:rPr lang="en-US" dirty="0"/>
+              <a:t>Final Table Resume and Comments</a:t>
+            </a:r>
+          </a:p>
+        </p:txBody>
+      </p:sp>
+      <p:sp>
+        <p:nvSpPr>
+          <p:cNvPr id="9" name="TextBox 8">
+            <a:extLst>
+              <a:ext uri="{FF2B5EF4-FFF2-40B4-BE49-F238E27FC236}">
+                <a16:creationId xmlns:a16="http://schemas.microsoft.com/office/drawing/2014/main" id="{868F6270-6F5B-AB23-F9BE-2B705F199F06}"/>
+              </a:ext>
+            </a:extLst>
+          </p:cNvPr>
+          <p:cNvSpPr txBox="1"/>
+          <p:nvPr/>
+        </p:nvSpPr>
+        <p:spPr bwMode="auto">
+          <a:xfrm>
+            <a:off x="335360" y="4464114"/>
+            <a:ext cx="11088291" cy="1555685"/>
+          </a:xfrm>
+          <a:prstGeom prst="rect">
+            <a:avLst/>
+          </a:prstGeom>
+          <a:noFill/>
+          <a:ln>
+            <a:noFill/>
+          </a:ln>
+        </p:spPr>
+        <p:txBody>
+          <a:bodyPr vert="horz" wrap="square" lIns="91440" tIns="45720" rIns="91440" bIns="45720" numCol="1" rtlCol="0" anchor="t" anchorCtr="0" compatLnSpc="1">
+            <a:prstTxWarp prst="textNoShape">
+              <a:avLst/>
+            </a:prstTxWarp>
+            <a:normAutofit fontScale="92500"/>
+          </a:bodyPr>
+          <a:lstStyle/>
+          <a:p>
+            <a:pPr marL="469900" indent="-469900" eaLnBrk="0" hangingPunct="0">
+              <a:spcBef>
+                <a:spcPct val="20000"/>
+              </a:spcBef>
+              <a:buClr>
+                <a:schemeClr val="accent2"/>
+              </a:buClr>
+              <a:buFont typeface="Wingdings" panose="05000000000000000000" pitchFamily="2" charset="2"/>
+              <a:buChar char="o"/>
+            </a:pPr>
+            <a:r>
+              <a:rPr lang="en-US" sz="2400" dirty="0">
+                <a:latin typeface="+mn-lt"/>
+              </a:rPr>
+              <a:t>Si </a:t>
+            </a:r>
+            <a:r>
+              <a:rPr lang="en-US" sz="2400" dirty="0" err="1">
+                <a:latin typeface="+mn-lt"/>
+              </a:rPr>
+              <a:t>può</a:t>
+            </a:r>
+            <a:r>
+              <a:rPr lang="en-US" sz="2400" dirty="0">
+                <a:latin typeface="+mn-lt"/>
+              </a:rPr>
+              <a:t> </a:t>
+            </a:r>
+            <a:r>
+              <a:rPr lang="en-US" sz="2400" dirty="0" err="1">
+                <a:latin typeface="+mn-lt"/>
+              </a:rPr>
+              <a:t>notare</a:t>
+            </a:r>
+            <a:r>
+              <a:rPr lang="en-US" sz="2400" dirty="0">
+                <a:latin typeface="+mn-lt"/>
+              </a:rPr>
+              <a:t> come al </a:t>
+            </a:r>
+            <a:r>
+              <a:rPr lang="en-US" sz="2400" dirty="0" err="1">
+                <a:latin typeface="+mn-lt"/>
+              </a:rPr>
+              <a:t>variare</a:t>
+            </a:r>
+            <a:r>
+              <a:rPr lang="en-US" sz="2400" dirty="0">
+                <a:latin typeface="+mn-lt"/>
+              </a:rPr>
+              <a:t> di NFIFO non </a:t>
+            </a:r>
+            <a:r>
+              <a:rPr lang="en-US" sz="2400" dirty="0" err="1">
+                <a:latin typeface="+mn-lt"/>
+              </a:rPr>
+              <a:t>si</a:t>
+            </a:r>
+            <a:r>
+              <a:rPr lang="en-US" sz="2400" dirty="0">
+                <a:latin typeface="+mn-lt"/>
+              </a:rPr>
+              <a:t> </a:t>
+            </a:r>
+            <a:r>
+              <a:rPr lang="en-US" sz="2400" dirty="0" err="1">
+                <a:latin typeface="+mn-lt"/>
+              </a:rPr>
+              <a:t>hanno</a:t>
+            </a:r>
+            <a:r>
+              <a:rPr lang="en-US" sz="2400" dirty="0">
+                <a:latin typeface="+mn-lt"/>
+              </a:rPr>
+              <a:t> solo </a:t>
+            </a:r>
+            <a:r>
+              <a:rPr lang="en-US" sz="2400" dirty="0" err="1">
+                <a:latin typeface="+mn-lt"/>
+              </a:rPr>
+              <a:t>risultati</a:t>
+            </a:r>
+            <a:r>
+              <a:rPr lang="en-US" sz="2400" dirty="0">
+                <a:latin typeface="+mn-lt"/>
+              </a:rPr>
+              <a:t> </a:t>
+            </a:r>
+            <a:r>
+              <a:rPr lang="en-US" sz="2400" dirty="0" err="1">
+                <a:latin typeface="+mn-lt"/>
+              </a:rPr>
+              <a:t>positivi</a:t>
+            </a:r>
+            <a:r>
+              <a:rPr lang="en-US" sz="2400" dirty="0">
+                <a:latin typeface="+mn-lt"/>
+              </a:rPr>
+              <a:t> (</a:t>
+            </a:r>
+            <a:r>
+              <a:rPr lang="en-US" sz="2400" dirty="0" err="1">
+                <a:latin typeface="+mn-lt"/>
+              </a:rPr>
+              <a:t>tolgo</a:t>
+            </a:r>
+            <a:r>
+              <a:rPr lang="en-US" sz="2400" dirty="0">
+                <a:latin typeface="+mn-lt"/>
+              </a:rPr>
+              <a:t> il </a:t>
+            </a:r>
+            <a:r>
+              <a:rPr lang="en-US" sz="2400" dirty="0" err="1">
+                <a:latin typeface="+mn-lt"/>
+              </a:rPr>
+              <a:t>rumore</a:t>
+            </a:r>
+            <a:r>
+              <a:rPr lang="en-US" sz="2400" dirty="0">
+                <a:latin typeface="+mn-lt"/>
+              </a:rPr>
+              <a:t>) ma </a:t>
+            </a:r>
+            <a:r>
+              <a:rPr lang="en-US" sz="2400" dirty="0" err="1">
+                <a:latin typeface="+mn-lt"/>
+              </a:rPr>
+              <a:t>anche</a:t>
+            </a:r>
+            <a:r>
+              <a:rPr lang="en-US" sz="2400" dirty="0">
+                <a:latin typeface="+mn-lt"/>
+              </a:rPr>
+              <a:t> </a:t>
+            </a:r>
+            <a:r>
+              <a:rPr lang="en-US" sz="2400" dirty="0" err="1">
+                <a:latin typeface="+mn-lt"/>
+              </a:rPr>
+              <a:t>effetti</a:t>
+            </a:r>
+            <a:r>
+              <a:rPr lang="en-US" sz="2400" dirty="0">
+                <a:latin typeface="+mn-lt"/>
+              </a:rPr>
+              <a:t> </a:t>
+            </a:r>
+            <a:r>
+              <a:rPr lang="en-US" sz="2400" dirty="0" err="1">
+                <a:latin typeface="+mn-lt"/>
+              </a:rPr>
+              <a:t>indesiderati</a:t>
+            </a:r>
+            <a:r>
+              <a:rPr lang="en-US" sz="2400" dirty="0">
+                <a:latin typeface="+mn-lt"/>
+              </a:rPr>
+              <a:t> come la </a:t>
+            </a:r>
+            <a:r>
+              <a:rPr lang="en-US" sz="2400" dirty="0" err="1">
+                <a:latin typeface="+mn-lt"/>
+              </a:rPr>
+              <a:t>riduzione</a:t>
+            </a:r>
+            <a:r>
+              <a:rPr lang="en-US" sz="2400" dirty="0">
+                <a:latin typeface="+mn-lt"/>
+              </a:rPr>
+              <a:t> </a:t>
+            </a:r>
+            <a:r>
+              <a:rPr lang="en-US" sz="2400" dirty="0" err="1">
+                <a:latin typeface="+mn-lt"/>
+              </a:rPr>
+              <a:t>dell’ampiezza</a:t>
+            </a:r>
+            <a:r>
+              <a:rPr lang="en-US" sz="2400" dirty="0">
+                <a:latin typeface="+mn-lt"/>
+              </a:rPr>
+              <a:t> e </a:t>
+            </a:r>
+            <a:r>
+              <a:rPr lang="en-US" sz="2400" dirty="0" err="1">
+                <a:latin typeface="+mn-lt"/>
+              </a:rPr>
+              <a:t>l’aumento</a:t>
+            </a:r>
+            <a:r>
+              <a:rPr lang="en-US" sz="2400" dirty="0">
+                <a:latin typeface="+mn-lt"/>
+              </a:rPr>
+              <a:t> del delay </a:t>
+            </a:r>
+            <a:r>
+              <a:rPr lang="en-US" sz="2400" dirty="0" err="1">
+                <a:latin typeface="+mn-lt"/>
+              </a:rPr>
+              <a:t>tra</a:t>
+            </a:r>
+            <a:r>
+              <a:rPr lang="en-US" sz="2400" dirty="0">
+                <a:latin typeface="+mn-lt"/>
+              </a:rPr>
+              <a:t> il </a:t>
+            </a:r>
+            <a:r>
+              <a:rPr lang="en-US" sz="2400" dirty="0" err="1">
+                <a:latin typeface="+mn-lt"/>
+              </a:rPr>
+              <a:t>segnale</a:t>
+            </a:r>
+            <a:r>
+              <a:rPr lang="en-US" sz="2400" dirty="0">
+                <a:latin typeface="+mn-lt"/>
+              </a:rPr>
+              <a:t> </a:t>
+            </a:r>
+            <a:r>
+              <a:rPr lang="en-US" sz="2400" dirty="0" err="1">
+                <a:latin typeface="+mn-lt"/>
+              </a:rPr>
+              <a:t>originale</a:t>
+            </a:r>
+            <a:r>
+              <a:rPr lang="en-US" sz="2400" dirty="0">
+                <a:latin typeface="+mn-lt"/>
+              </a:rPr>
+              <a:t> e filtrate.</a:t>
+            </a:r>
+          </a:p>
+          <a:p>
+            <a:pPr marL="469900" indent="-469900" eaLnBrk="0" hangingPunct="0">
+              <a:spcBef>
+                <a:spcPct val="20000"/>
+              </a:spcBef>
+              <a:buClr>
+                <a:schemeClr val="accent2"/>
+              </a:buClr>
+              <a:buFont typeface="Wingdings" panose="05000000000000000000" pitchFamily="2" charset="2"/>
+              <a:buChar char="o"/>
+            </a:pPr>
+            <a:r>
+              <a:rPr lang="en-US" sz="2400" dirty="0">
+                <a:latin typeface="+mn-lt"/>
+              </a:rPr>
+              <a:t>Tutto </a:t>
+            </a:r>
+            <a:r>
+              <a:rPr lang="en-US" sz="2400" dirty="0" err="1">
+                <a:latin typeface="+mn-lt"/>
+              </a:rPr>
+              <a:t>fatto</a:t>
+            </a:r>
+            <a:r>
+              <a:rPr lang="en-US" sz="2400" dirty="0">
+                <a:latin typeface="+mn-lt"/>
+              </a:rPr>
+              <a:t> con </a:t>
+            </a:r>
+            <a:r>
+              <a:rPr lang="it-IT" sz="2400" dirty="0" err="1">
+                <a:latin typeface="+mn-lt"/>
+              </a:rPr>
+              <a:t>SNRdB</a:t>
+            </a:r>
+            <a:r>
+              <a:rPr lang="it-IT" sz="2400" dirty="0">
+                <a:latin typeface="+mn-lt"/>
+              </a:rPr>
+              <a:t>=0</a:t>
+            </a:r>
+            <a:endParaRPr lang="en-US" sz="2400" dirty="0">
+              <a:latin typeface="+mn-lt"/>
+            </a:endParaRPr>
+          </a:p>
+          <a:p>
+            <a:pPr marL="469900" indent="-469900" eaLnBrk="0" hangingPunct="0">
+              <a:spcBef>
+                <a:spcPct val="20000"/>
+              </a:spcBef>
+              <a:buClr>
+                <a:schemeClr val="accent2"/>
+              </a:buClr>
+              <a:buFont typeface="Wingdings" panose="05000000000000000000" pitchFamily="2" charset="2"/>
+              <a:buChar char="o"/>
+            </a:pPr>
+            <a:endParaRPr lang="en-US" sz="2400" dirty="0">
+              <a:latin typeface="+mn-lt"/>
+            </a:endParaRPr>
+          </a:p>
+        </p:txBody>
+      </p:sp>
+      <p:sp>
+        <p:nvSpPr>
+          <p:cNvPr id="14" name="Date Placeholder 4">
+            <a:extLst>
+              <a:ext uri="{FF2B5EF4-FFF2-40B4-BE49-F238E27FC236}">
+                <a16:creationId xmlns:a16="http://schemas.microsoft.com/office/drawing/2014/main" id="{40268E35-52DA-4783-3ED8-ECA895D8DF6E}"/>
+              </a:ext>
+            </a:extLst>
+          </p:cNvPr>
+          <p:cNvSpPr>
+            <a:spLocks noGrp="1"/>
+          </p:cNvSpPr>
+          <p:nvPr>
+            <p:ph type="dt" sz="half" idx="10"/>
+          </p:nvPr>
+        </p:nvSpPr>
+        <p:spPr>
+          <a:xfrm>
+            <a:off x="812800" y="6373130"/>
+            <a:ext cx="2641600" cy="476250"/>
+          </a:xfrm>
+        </p:spPr>
+        <p:txBody>
+          <a:bodyPr/>
+          <a:lstStyle/>
+          <a:p>
+            <a:pPr>
+              <a:spcAft>
+                <a:spcPts val="600"/>
+              </a:spcAft>
+              <a:defRPr/>
+            </a:pPr>
+            <a:r>
+              <a:rPr lang="en-US"/>
+              <a:t>Author</a:t>
+            </a:r>
+          </a:p>
+        </p:txBody>
+      </p:sp>
+      <p:sp>
+        <p:nvSpPr>
+          <p:cNvPr id="16" name="Footer Placeholder 5">
+            <a:extLst>
+              <a:ext uri="{FF2B5EF4-FFF2-40B4-BE49-F238E27FC236}">
+                <a16:creationId xmlns:a16="http://schemas.microsoft.com/office/drawing/2014/main" id="{3795E28A-B462-12F5-16B4-C9B4A574DE12}"/>
+              </a:ext>
+            </a:extLst>
+          </p:cNvPr>
+          <p:cNvSpPr>
+            <a:spLocks noGrp="1"/>
+          </p:cNvSpPr>
+          <p:nvPr>
+            <p:ph type="ftr" sz="quarter" idx="11"/>
+          </p:nvPr>
+        </p:nvSpPr>
+        <p:spPr>
+          <a:xfrm>
+            <a:off x="4165600" y="6373130"/>
+            <a:ext cx="3860800" cy="476250"/>
+          </a:xfrm>
+        </p:spPr>
+        <p:txBody>
+          <a:bodyPr/>
+          <a:lstStyle/>
+          <a:p>
+            <a:pPr>
+              <a:defRPr/>
+            </a:pPr>
+            <a:endParaRPr lang="en-US"/>
+          </a:p>
+        </p:txBody>
+      </p:sp>
+      <p:sp>
+        <p:nvSpPr>
+          <p:cNvPr id="4" name="Slide Number Placeholder 3">
+            <a:extLst>
+              <a:ext uri="{FF2B5EF4-FFF2-40B4-BE49-F238E27FC236}">
+                <a16:creationId xmlns:a16="http://schemas.microsoft.com/office/drawing/2014/main" id="{886CEE00-516E-A5DE-AC6E-366E2786D9AE}"/>
+              </a:ext>
+            </a:extLst>
+          </p:cNvPr>
+          <p:cNvSpPr>
+            <a:spLocks noGrp="1"/>
+          </p:cNvSpPr>
+          <p:nvPr>
+            <p:ph type="sldNum" sz="quarter" idx="12"/>
+          </p:nvPr>
+        </p:nvSpPr>
+        <p:spPr>
+          <a:xfrm>
+            <a:off x="8737600" y="6373130"/>
+            <a:ext cx="2641600" cy="476250"/>
+          </a:xfrm>
+        </p:spPr>
+        <p:txBody>
+          <a:bodyPr vert="horz" wrap="square" lIns="91440" tIns="45720" rIns="91440" bIns="45720" numCol="1" anchor="t" anchorCtr="0" compatLnSpc="1">
+            <a:prstTxWarp prst="textNoShape">
+              <a:avLst/>
+            </a:prstTxWarp>
+            <a:normAutofit/>
+          </a:bodyPr>
+          <a:lstStyle/>
+          <a:p>
+            <a:pPr>
+              <a:spcAft>
+                <a:spcPts val="600"/>
+              </a:spcAft>
+            </a:pPr>
+            <a:fld id="{2E6AEE32-87CF-4B18-ACD9-DC92317905A5}" type="slidenum">
+              <a:rPr lang="en-US" altLang="en-US" kern="1200">
+                <a:latin typeface="Verdana" panose="020B0604030504040204" pitchFamily="34" charset="0"/>
+                <a:ea typeface="ＭＳ Ｐゴシック" panose="020B0600070205080204" pitchFamily="34" charset="-128"/>
+                <a:cs typeface="+mn-cs"/>
+              </a:rPr>
+              <a:pPr>
+                <a:spcAft>
+                  <a:spcPts val="600"/>
+                </a:spcAft>
+              </a:pPr>
+              <a:t>18</a:t>
+            </a:fld>
+            <a:endParaRPr lang="en-US" altLang="en-US" kern="1200">
+              <a:latin typeface="Verdana" panose="020B0604030504040204" pitchFamily="34" charset="0"/>
+              <a:ea typeface="ＭＳ Ｐゴシック" panose="020B0600070205080204" pitchFamily="34" charset="-128"/>
+              <a:cs typeface="+mn-cs"/>
+            </a:endParaRPr>
+          </a:p>
+        </p:txBody>
+      </p:sp>
+      <p:graphicFrame>
+        <p:nvGraphicFramePr>
+          <p:cNvPr id="3" name="Tabella 2">
+            <a:extLst>
+              <a:ext uri="{FF2B5EF4-FFF2-40B4-BE49-F238E27FC236}">
+                <a16:creationId xmlns:a16="http://schemas.microsoft.com/office/drawing/2014/main" id="{68E12A10-6FD3-7C88-06A0-AA23FAEB0494}"/>
+              </a:ext>
+            </a:extLst>
+          </p:cNvPr>
+          <p:cNvGraphicFramePr>
+            <a:graphicFrameLocks noGrp="1"/>
+          </p:cNvGraphicFramePr>
+          <p:nvPr>
+            <p:extLst>
+              <p:ext uri="{D42A27DB-BD31-4B8C-83A1-F6EECF244321}">
+                <p14:modId xmlns:p14="http://schemas.microsoft.com/office/powerpoint/2010/main" val="900278948"/>
+              </p:ext>
+            </p:extLst>
+          </p:nvPr>
+        </p:nvGraphicFramePr>
+        <p:xfrm>
+          <a:off x="863600" y="1652206"/>
+          <a:ext cx="8128000" cy="1483360"/>
+        </p:xfrm>
+        <a:graphic>
+          <a:graphicData uri="http://schemas.openxmlformats.org/drawingml/2006/table">
+            <a:tbl>
+              <a:tblPr firstRow="1" bandRow="1">
+                <a:tableStyleId>{93296810-A885-4BE3-A3E7-6D5BEEA58F35}</a:tableStyleId>
+              </a:tblPr>
+              <a:tblGrid>
+                <a:gridCol w="2032000">
+                  <a:extLst>
+                    <a:ext uri="{9D8B030D-6E8A-4147-A177-3AD203B41FA5}">
+                      <a16:colId xmlns:a16="http://schemas.microsoft.com/office/drawing/2014/main" val="203863937"/>
+                    </a:ext>
+                  </a:extLst>
+                </a:gridCol>
+                <a:gridCol w="2032000">
+                  <a:extLst>
+                    <a:ext uri="{9D8B030D-6E8A-4147-A177-3AD203B41FA5}">
+                      <a16:colId xmlns:a16="http://schemas.microsoft.com/office/drawing/2014/main" val="3444426539"/>
+                    </a:ext>
+                  </a:extLst>
+                </a:gridCol>
+                <a:gridCol w="2032000">
+                  <a:extLst>
+                    <a:ext uri="{9D8B030D-6E8A-4147-A177-3AD203B41FA5}">
+                      <a16:colId xmlns:a16="http://schemas.microsoft.com/office/drawing/2014/main" val="153527608"/>
+                    </a:ext>
+                  </a:extLst>
+                </a:gridCol>
+                <a:gridCol w="2032000">
+                  <a:extLst>
+                    <a:ext uri="{9D8B030D-6E8A-4147-A177-3AD203B41FA5}">
+                      <a16:colId xmlns:a16="http://schemas.microsoft.com/office/drawing/2014/main" val="1077454714"/>
+                    </a:ext>
+                  </a:extLst>
+                </a:gridCol>
+              </a:tblGrid>
+              <a:tr h="370840">
+                <a:tc>
+                  <a:txBody>
+                    <a:bodyPr/>
+                    <a:lstStyle/>
+                    <a:p>
+                      <a:r>
+                        <a:rPr lang="it-IT" dirty="0"/>
+                        <a:t>NFIFO</a:t>
+                      </a:r>
+                    </a:p>
+                  </a:txBody>
+                  <a:tcPr/>
+                </a:tc>
+                <a:tc>
+                  <a:txBody>
+                    <a:bodyPr/>
+                    <a:lstStyle/>
+                    <a:p>
+                      <a:r>
+                        <a:rPr lang="it-IT" dirty="0"/>
+                        <a:t>SNR  </a:t>
+                      </a:r>
+                    </a:p>
+                  </a:txBody>
+                  <a:tcPr/>
+                </a:tc>
+                <a:tc>
+                  <a:txBody>
+                    <a:bodyPr/>
+                    <a:lstStyle/>
+                    <a:p>
+                      <a:r>
+                        <a:rPr lang="it-IT" dirty="0"/>
+                        <a:t>Delay </a:t>
+                      </a:r>
+                      <a:r>
+                        <a:rPr lang="it-IT" sz="1200" dirty="0"/>
+                        <a:t>colpi Clock</a:t>
+                      </a:r>
+                      <a:endParaRPr lang="it-IT" dirty="0"/>
+                    </a:p>
+                  </a:txBody>
+                  <a:tcPr/>
+                </a:tc>
+                <a:tc>
+                  <a:txBody>
+                    <a:bodyPr/>
+                    <a:lstStyle/>
+                    <a:p>
+                      <a:r>
+                        <a:rPr lang="it-IT" dirty="0"/>
+                        <a:t>ampiezza</a:t>
+                      </a:r>
+                    </a:p>
+                  </a:txBody>
+                  <a:tcPr/>
+                </a:tc>
+                <a:extLst>
+                  <a:ext uri="{0D108BD9-81ED-4DB2-BD59-A6C34878D82A}">
+                    <a16:rowId xmlns:a16="http://schemas.microsoft.com/office/drawing/2014/main" val="2858565467"/>
+                  </a:ext>
+                </a:extLst>
+              </a:tr>
+              <a:tr h="370840">
+                <a:tc>
+                  <a:txBody>
+                    <a:bodyPr/>
+                    <a:lstStyle/>
+                    <a:p>
+                      <a:r>
+                        <a:rPr lang="it-IT" dirty="0"/>
+                        <a:t>32</a:t>
+                      </a:r>
+                    </a:p>
+                  </a:txBody>
+                  <a:tcPr/>
+                </a:tc>
+                <a:tc>
+                  <a:txBody>
+                    <a:bodyPr/>
+                    <a:lstStyle/>
+                    <a:p>
+                      <a:r>
+                        <a:rPr lang="it-IT" dirty="0"/>
+                        <a:t>8,63</a:t>
+                      </a:r>
+                    </a:p>
+                  </a:txBody>
+                  <a:tcPr/>
+                </a:tc>
+                <a:tc>
+                  <a:txBody>
+                    <a:bodyPr/>
+                    <a:lstStyle/>
+                    <a:p>
+                      <a:r>
+                        <a:rPr lang="it-IT" dirty="0"/>
+                        <a:t>34</a:t>
+                      </a:r>
+                    </a:p>
+                  </a:txBody>
+                  <a:tcPr/>
+                </a:tc>
+                <a:tc>
+                  <a:txBody>
+                    <a:bodyPr/>
+                    <a:lstStyle/>
+                    <a:p>
+                      <a:r>
+                        <a:rPr lang="it-IT" dirty="0"/>
+                        <a:t>110</a:t>
+                      </a:r>
+                    </a:p>
+                  </a:txBody>
+                  <a:tcPr/>
+                </a:tc>
+                <a:extLst>
+                  <a:ext uri="{0D108BD9-81ED-4DB2-BD59-A6C34878D82A}">
+                    <a16:rowId xmlns:a16="http://schemas.microsoft.com/office/drawing/2014/main" val="1893543973"/>
+                  </a:ext>
+                </a:extLst>
+              </a:tr>
+              <a:tr h="370840">
+                <a:tc>
+                  <a:txBody>
+                    <a:bodyPr/>
+                    <a:lstStyle/>
+                    <a:p>
+                      <a:r>
+                        <a:rPr lang="it-IT" dirty="0"/>
+                        <a:t>64</a:t>
+                      </a:r>
+                    </a:p>
+                  </a:txBody>
+                  <a:tcPr/>
+                </a:tc>
+                <a:tc>
+                  <a:txBody>
+                    <a:bodyPr/>
+                    <a:lstStyle/>
+                    <a:p>
+                      <a:r>
+                        <a:rPr lang="it-IT" dirty="0"/>
+                        <a:t>7,30</a:t>
+                      </a:r>
+                    </a:p>
+                  </a:txBody>
+                  <a:tcPr/>
+                </a:tc>
+                <a:tc>
+                  <a:txBody>
+                    <a:bodyPr/>
+                    <a:lstStyle/>
+                    <a:p>
+                      <a:r>
+                        <a:rPr lang="it-IT" dirty="0"/>
+                        <a:t>66</a:t>
+                      </a:r>
+                    </a:p>
+                  </a:txBody>
+                  <a:tcPr/>
+                </a:tc>
+                <a:tc>
+                  <a:txBody>
+                    <a:bodyPr/>
+                    <a:lstStyle/>
+                    <a:p>
+                      <a:r>
+                        <a:rPr lang="it-IT" dirty="0"/>
+                        <a:t>100</a:t>
+                      </a:r>
+                    </a:p>
+                  </a:txBody>
+                  <a:tcPr/>
+                </a:tc>
+                <a:extLst>
+                  <a:ext uri="{0D108BD9-81ED-4DB2-BD59-A6C34878D82A}">
+                    <a16:rowId xmlns:a16="http://schemas.microsoft.com/office/drawing/2014/main" val="2817678220"/>
+                  </a:ext>
+                </a:extLst>
+              </a:tr>
+              <a:tr h="370840">
+                <a:tc>
+                  <a:txBody>
+                    <a:bodyPr/>
+                    <a:lstStyle/>
+                    <a:p>
+                      <a:r>
+                        <a:rPr lang="it-IT" dirty="0"/>
+                        <a:t>128</a:t>
+                      </a:r>
+                    </a:p>
+                  </a:txBody>
+                  <a:tcPr/>
+                </a:tc>
+                <a:tc>
+                  <a:txBody>
+                    <a:bodyPr/>
+                    <a:lstStyle/>
+                    <a:p>
+                      <a:r>
+                        <a:rPr lang="it-IT" dirty="0"/>
+                        <a:t>5,25</a:t>
+                      </a:r>
+                    </a:p>
+                  </a:txBody>
+                  <a:tcPr/>
+                </a:tc>
+                <a:tc>
+                  <a:txBody>
+                    <a:bodyPr/>
+                    <a:lstStyle/>
+                    <a:p>
+                      <a:r>
+                        <a:rPr lang="it-IT" dirty="0"/>
+                        <a:t>130</a:t>
+                      </a:r>
+                    </a:p>
+                  </a:txBody>
+                  <a:tcPr/>
+                </a:tc>
+                <a:tc>
+                  <a:txBody>
+                    <a:bodyPr/>
+                    <a:lstStyle/>
+                    <a:p>
+                      <a:r>
+                        <a:rPr lang="it-IT" dirty="0"/>
+                        <a:t>80</a:t>
+                      </a:r>
+                    </a:p>
+                  </a:txBody>
+                  <a:tcPr/>
+                </a:tc>
+                <a:extLst>
+                  <a:ext uri="{0D108BD9-81ED-4DB2-BD59-A6C34878D82A}">
+                    <a16:rowId xmlns:a16="http://schemas.microsoft.com/office/drawing/2014/main" val="1650103333"/>
+                  </a:ext>
+                </a:extLst>
+              </a:tr>
+            </a:tbl>
+          </a:graphicData>
+        </a:graphic>
+      </p:graphicFrame>
+    </p:spTree>
+    <p:extLst>
+      <p:ext uri="{BB962C8B-B14F-4D97-AF65-F5344CB8AC3E}">
+        <p14:creationId xmlns:p14="http://schemas.microsoft.com/office/powerpoint/2010/main" val="3865240380"/>
+      </p:ext>
+    </p:extLst>
+  </p:cSld>
+  <p:clrMapOvr>
+    <a:masterClrMapping/>
+  </p:clrMapOvr>
+  <p:transition/>
+</p:sld>
+</file>
+
+<file path=ppt/slides/slide19.xml><?xml version="1.0" encoding="utf-8"?>
 <p:sld xmlns:a="http://schemas.openxmlformats.org/drawingml/2006/main" xmlns:r="http://schemas.openxmlformats.org/officeDocument/2006/relationships" xmlns:p="http://schemas.openxmlformats.org/presentationml/2006/main">
   <p:cSld>
     <p:spTree>
@@ -5921,7 +7157,7 @@
             <a:fld id="{2E6AEE32-87CF-4B18-ACD9-DC92317905A5}" type="slidenum">
               <a:rPr lang="en-US" altLang="en-US" smtClean="0"/>
               <a:pPr/>
-              <a:t>17</a:t>
+              <a:t>19</a:t>
             </a:fld>
             <a:endParaRPr lang="en-US" altLang="en-US" dirty="0"/>
           </a:p>
@@ -6238,688 +7474,6 @@
     <p:extLst>
       <p:ext uri="{BB962C8B-B14F-4D97-AF65-F5344CB8AC3E}">
         <p14:creationId xmlns:p14="http://schemas.microsoft.com/office/powerpoint/2010/main" val="1238228844"/>
-      </p:ext>
-    </p:extLst>
-  </p:cSld>
-  <p:clrMapOvr>
-    <a:masterClrMapping/>
-  </p:clrMapOvr>
-  <p:transition/>
-</p:sld>
-</file>
-
-<file path=ppt/slides/slide18.xml><?xml version="1.0" encoding="utf-8"?>
-<p:sld xmlns:a="http://schemas.openxmlformats.org/drawingml/2006/main" xmlns:r="http://schemas.openxmlformats.org/officeDocument/2006/relationships" xmlns:p="http://schemas.openxmlformats.org/presentationml/2006/main">
-  <p:cSld>
-    <p:spTree>
-      <p:nvGrpSpPr>
-        <p:cNvPr id="1" name="">
-          <a:extLst>
-            <a:ext uri="{FF2B5EF4-FFF2-40B4-BE49-F238E27FC236}">
-              <a16:creationId xmlns:a16="http://schemas.microsoft.com/office/drawing/2014/main" id="{670BB250-1E7D-A6B9-F138-D350FA37A7F0}"/>
-            </a:ext>
-          </a:extLst>
-        </p:cNvPr>
-        <p:cNvGrpSpPr/>
-        <p:nvPr/>
-      </p:nvGrpSpPr>
-      <p:grpSpPr>
-        <a:xfrm>
-          <a:off x="0" y="0"/>
-          <a:ext cx="0" cy="0"/>
-          <a:chOff x="0" y="0"/>
-          <a:chExt cx="0" cy="0"/>
-        </a:xfrm>
-      </p:grpSpPr>
-      <p:sp>
-        <p:nvSpPr>
-          <p:cNvPr id="2" name="Title 1">
-            <a:extLst>
-              <a:ext uri="{FF2B5EF4-FFF2-40B4-BE49-F238E27FC236}">
-                <a16:creationId xmlns:a16="http://schemas.microsoft.com/office/drawing/2014/main" id="{3648C872-8531-5A68-5B34-016643A81B22}"/>
-              </a:ext>
-            </a:extLst>
-          </p:cNvPr>
-          <p:cNvSpPr>
-            <a:spLocks noGrp="1"/>
-          </p:cNvSpPr>
-          <p:nvPr>
-            <p:ph type="title"/>
-          </p:nvPr>
-        </p:nvSpPr>
-        <p:spPr>
-          <a:xfrm>
-            <a:off x="766232" y="222381"/>
-            <a:ext cx="11425767" cy="720596"/>
-          </a:xfrm>
-        </p:spPr>
-        <p:txBody>
-          <a:bodyPr/>
-          <a:lstStyle/>
-          <a:p>
-            <a:r>
-              <a:rPr lang="it-IT" noProof="0" dirty="0"/>
-              <a:t>Slide </a:t>
-            </a:r>
-            <a:r>
-              <a:rPr lang="it-IT" noProof="0" dirty="0" err="1"/>
-              <a:t>Structure</a:t>
-            </a:r>
-            <a:endParaRPr lang="en-US" dirty="0"/>
-          </a:p>
-        </p:txBody>
-      </p:sp>
-      <p:sp>
-        <p:nvSpPr>
-          <p:cNvPr id="4" name="Slide Number Placeholder 3">
-            <a:extLst>
-              <a:ext uri="{FF2B5EF4-FFF2-40B4-BE49-F238E27FC236}">
-                <a16:creationId xmlns:a16="http://schemas.microsoft.com/office/drawing/2014/main" id="{5F97521F-F33D-40A7-0979-FCC725C35702}"/>
-              </a:ext>
-            </a:extLst>
-          </p:cNvPr>
-          <p:cNvSpPr>
-            <a:spLocks noGrp="1"/>
-          </p:cNvSpPr>
-          <p:nvPr>
-            <p:ph type="sldNum" sz="quarter" idx="11"/>
-          </p:nvPr>
-        </p:nvSpPr>
-        <p:spPr/>
-        <p:txBody>
-          <a:bodyPr/>
-          <a:lstStyle/>
-          <a:p>
-            <a:fld id="{2E6AEE32-87CF-4B18-ACD9-DC92317905A5}" type="slidenum">
-              <a:rPr lang="en-US" altLang="en-US" smtClean="0"/>
-              <a:pPr/>
-              <a:t>18</a:t>
-            </a:fld>
-            <a:endParaRPr lang="en-US" altLang="en-US" dirty="0"/>
-          </a:p>
-        </p:txBody>
-      </p:sp>
-      <p:sp>
-        <p:nvSpPr>
-          <p:cNvPr id="5" name="Footer Placeholder 4">
-            <a:extLst>
-              <a:ext uri="{FF2B5EF4-FFF2-40B4-BE49-F238E27FC236}">
-                <a16:creationId xmlns:a16="http://schemas.microsoft.com/office/drawing/2014/main" id="{998C51AE-0E5B-D6D9-14B7-330923A56100}"/>
-              </a:ext>
-            </a:extLst>
-          </p:cNvPr>
-          <p:cNvSpPr>
-            <a:spLocks noGrp="1"/>
-          </p:cNvSpPr>
-          <p:nvPr>
-            <p:ph type="ftr" sz="quarter" idx="12"/>
-          </p:nvPr>
-        </p:nvSpPr>
-        <p:spPr/>
-        <p:txBody>
-          <a:bodyPr/>
-          <a:lstStyle/>
-          <a:p>
-            <a:pPr>
-              <a:defRPr/>
-            </a:pPr>
-            <a:endParaRPr lang="en-US" dirty="0"/>
-          </a:p>
-        </p:txBody>
-      </p:sp>
-      <p:sp>
-        <p:nvSpPr>
-          <p:cNvPr id="9" name="TextBox 8">
-            <a:extLst>
-              <a:ext uri="{FF2B5EF4-FFF2-40B4-BE49-F238E27FC236}">
-                <a16:creationId xmlns:a16="http://schemas.microsoft.com/office/drawing/2014/main" id="{729AD392-8F26-681A-E1BC-F2879E87907D}"/>
-              </a:ext>
-            </a:extLst>
-          </p:cNvPr>
-          <p:cNvSpPr txBox="1"/>
-          <p:nvPr/>
-        </p:nvSpPr>
-        <p:spPr>
-          <a:xfrm>
-            <a:off x="766232" y="4464115"/>
-            <a:ext cx="10728857" cy="1754326"/>
-          </a:xfrm>
-          <a:prstGeom prst="rect">
-            <a:avLst/>
-          </a:prstGeom>
-          <a:noFill/>
-        </p:spPr>
-        <p:txBody>
-          <a:bodyPr wrap="square" rtlCol="0">
-            <a:spAutoFit/>
-          </a:bodyPr>
-          <a:lstStyle/>
-          <a:p>
-            <a:pPr marL="342900" indent="-342900">
-              <a:buFont typeface="Wingdings" panose="05000000000000000000" pitchFamily="2" charset="2"/>
-              <a:buChar char="q"/>
-            </a:pPr>
-            <a:r>
-              <a:rPr lang="en-GB" sz="1800" b="1" dirty="0">
-                <a:solidFill>
-                  <a:srgbClr val="0000FF"/>
-                </a:solidFill>
-              </a:rPr>
-              <a:t>Text </a:t>
-            </a:r>
-            <a:r>
-              <a:rPr lang="en-GB" sz="1800" b="1" dirty="0" err="1">
-                <a:solidFill>
-                  <a:srgbClr val="0000FF"/>
-                </a:solidFill>
-              </a:rPr>
-              <a:t>text</a:t>
-            </a:r>
-            <a:r>
-              <a:rPr lang="en-GB" sz="1800" b="1" dirty="0">
-                <a:solidFill>
-                  <a:srgbClr val="0000FF"/>
-                </a:solidFill>
-              </a:rPr>
-              <a:t> </a:t>
-            </a:r>
-            <a:r>
-              <a:rPr lang="en-GB" sz="1800" b="1" dirty="0" err="1">
-                <a:solidFill>
-                  <a:srgbClr val="0000FF"/>
-                </a:solidFill>
-              </a:rPr>
-              <a:t>text</a:t>
-            </a:r>
-            <a:endParaRPr lang="en-GB" sz="1800" b="1" dirty="0">
-              <a:solidFill>
-                <a:srgbClr val="0000FF"/>
-              </a:solidFill>
-            </a:endParaRPr>
-          </a:p>
-          <a:p>
-            <a:pPr marL="342900" indent="-342900">
-              <a:buFont typeface="Wingdings" panose="05000000000000000000" pitchFamily="2" charset="2"/>
-              <a:buChar char="q"/>
-            </a:pPr>
-            <a:r>
-              <a:rPr lang="en-GB" sz="1800" b="1" dirty="0">
-                <a:solidFill>
-                  <a:srgbClr val="0000FF"/>
-                </a:solidFill>
-              </a:rPr>
-              <a:t>text</a:t>
-            </a:r>
-          </a:p>
-          <a:p>
-            <a:pPr marL="342900" indent="-342900">
-              <a:buFont typeface="Wingdings" panose="05000000000000000000" pitchFamily="2" charset="2"/>
-              <a:buChar char="q"/>
-            </a:pPr>
-            <a:r>
-              <a:rPr lang="en-GB" sz="1800" b="1" dirty="0">
-                <a:solidFill>
-                  <a:srgbClr val="0000FF"/>
-                </a:solidFill>
-              </a:rPr>
-              <a:t>text</a:t>
-            </a:r>
-          </a:p>
-          <a:p>
-            <a:pPr marL="342900" indent="-342900">
-              <a:buFont typeface="Wingdings" panose="05000000000000000000" pitchFamily="2" charset="2"/>
-              <a:buChar char="q"/>
-            </a:pPr>
-            <a:endParaRPr lang="en-GB" sz="1800" b="1" dirty="0">
-              <a:solidFill>
-                <a:srgbClr val="0000FF"/>
-              </a:solidFill>
-            </a:endParaRPr>
-          </a:p>
-          <a:p>
-            <a:pPr marL="342900" indent="-342900">
-              <a:buFont typeface="Wingdings" panose="05000000000000000000" pitchFamily="2" charset="2"/>
-              <a:buChar char="q"/>
-            </a:pPr>
-            <a:r>
-              <a:rPr lang="en-GB" sz="1800" b="1" dirty="0">
-                <a:solidFill>
-                  <a:srgbClr val="0000FF"/>
-                </a:solidFill>
-              </a:rPr>
-              <a:t>Text</a:t>
-            </a:r>
-          </a:p>
-          <a:p>
-            <a:pPr marL="342900" indent="-342900">
-              <a:buFont typeface="Wingdings" panose="05000000000000000000" pitchFamily="2" charset="2"/>
-              <a:buChar char="q"/>
-            </a:pPr>
-            <a:endParaRPr lang="en-GB" sz="1800" dirty="0"/>
-          </a:p>
-        </p:txBody>
-      </p:sp>
-      <p:sp>
-        <p:nvSpPr>
-          <p:cNvPr id="11" name="Rectangle 10">
-            <a:extLst>
-              <a:ext uri="{FF2B5EF4-FFF2-40B4-BE49-F238E27FC236}">
-                <a16:creationId xmlns:a16="http://schemas.microsoft.com/office/drawing/2014/main" id="{26F0A0CD-3364-B24E-1729-FC1990C36303}"/>
-              </a:ext>
-            </a:extLst>
-          </p:cNvPr>
-          <p:cNvSpPr/>
-          <p:nvPr/>
-        </p:nvSpPr>
-        <p:spPr bwMode="auto">
-          <a:xfrm>
-            <a:off x="3418203" y="1155334"/>
-            <a:ext cx="4860540" cy="3308781"/>
-          </a:xfrm>
-          <a:prstGeom prst="rect">
-            <a:avLst/>
-          </a:prstGeom>
-          <a:solidFill>
-            <a:schemeClr val="bg1">
-              <a:lumMod val="95000"/>
-            </a:schemeClr>
-          </a:solidFill>
-          <a:ln w="9525" cap="flat" cmpd="sng" algn="ctr">
-            <a:solidFill>
-              <a:schemeClr val="tx1"/>
-            </a:solidFill>
-            <a:prstDash val="solid"/>
-            <a:round/>
-            <a:headEnd type="none" w="med" len="med"/>
-            <a:tailEnd type="none" w="med" len="med"/>
-          </a:ln>
-          <a:effectLst/>
-        </p:spPr>
-        <p:txBody>
-          <a:bodyPr vert="horz" wrap="square" lIns="91440" tIns="45720" rIns="91440" bIns="45720" numCol="1" rtlCol="0" anchor="t" anchorCtr="0" compatLnSpc="1">
-            <a:prstTxWarp prst="textNoShape">
-              <a:avLst/>
-            </a:prstTxWarp>
-          </a:bodyPr>
-          <a:lstStyle/>
-          <a:p>
-            <a:pPr marL="469900" marR="0" indent="-469900" algn="l" defTabSz="914400" rtl="0" eaLnBrk="1" fontAlgn="base" latinLnBrk="0" hangingPunct="1">
-              <a:lnSpc>
-                <a:spcPct val="90000"/>
-              </a:lnSpc>
-              <a:spcBef>
-                <a:spcPct val="20000"/>
-              </a:spcBef>
-              <a:spcAft>
-                <a:spcPct val="0"/>
-              </a:spcAft>
-              <a:buClr>
-                <a:schemeClr val="accent2"/>
-              </a:buClr>
-              <a:buSzTx/>
-              <a:buFont typeface="Wingdings" pitchFamily="2" charset="2"/>
-              <a:buChar char="o"/>
-              <a:tabLst/>
-            </a:pPr>
-            <a:endParaRPr kumimoji="0" lang="en-GB" sz="2000" b="0" i="0" u="none" strike="noStrike" cap="none" normalizeH="0" baseline="0">
-              <a:ln>
-                <a:noFill/>
-              </a:ln>
-              <a:solidFill>
-                <a:schemeClr val="tx1"/>
-              </a:solidFill>
-              <a:effectLst/>
-              <a:latin typeface="Verdana" pitchFamily="34" charset="0"/>
-              <a:ea typeface="ＭＳ Ｐゴシック" pitchFamily="50" charset="-128"/>
-            </a:endParaRPr>
-          </a:p>
-        </p:txBody>
-      </p:sp>
-    </p:spTree>
-    <p:extLst>
-      <p:ext uri="{BB962C8B-B14F-4D97-AF65-F5344CB8AC3E}">
-        <p14:creationId xmlns:p14="http://schemas.microsoft.com/office/powerpoint/2010/main" val="2752778631"/>
-      </p:ext>
-    </p:extLst>
-  </p:cSld>
-  <p:clrMapOvr>
-    <a:masterClrMapping/>
-  </p:clrMapOvr>
-  <p:transition/>
-</p:sld>
-</file>
-
-<file path=ppt/slides/slide19.xml><?xml version="1.0" encoding="utf-8"?>
-<p:sld xmlns:a="http://schemas.openxmlformats.org/drawingml/2006/main" xmlns:r="http://schemas.openxmlformats.org/officeDocument/2006/relationships" xmlns:p="http://schemas.openxmlformats.org/presentationml/2006/main">
-  <p:cSld>
-    <p:spTree>
-      <p:nvGrpSpPr>
-        <p:cNvPr id="1" name="">
-          <a:extLst>
-            <a:ext uri="{FF2B5EF4-FFF2-40B4-BE49-F238E27FC236}">
-              <a16:creationId xmlns:a16="http://schemas.microsoft.com/office/drawing/2014/main" id="{13BC20C6-13DC-24B6-6536-798F3356E9EF}"/>
-            </a:ext>
-          </a:extLst>
-        </p:cNvPr>
-        <p:cNvGrpSpPr/>
-        <p:nvPr/>
-      </p:nvGrpSpPr>
-      <p:grpSpPr>
-        <a:xfrm>
-          <a:off x="0" y="0"/>
-          <a:ext cx="0" cy="0"/>
-          <a:chOff x="0" y="0"/>
-          <a:chExt cx="0" cy="0"/>
-        </a:xfrm>
-      </p:grpSpPr>
-      <p:sp>
-        <p:nvSpPr>
-          <p:cNvPr id="2" name="Title 1">
-            <a:extLst>
-              <a:ext uri="{FF2B5EF4-FFF2-40B4-BE49-F238E27FC236}">
-                <a16:creationId xmlns:a16="http://schemas.microsoft.com/office/drawing/2014/main" id="{706D6389-E012-661B-7CB1-89B814AECFA2}"/>
-              </a:ext>
-            </a:extLst>
-          </p:cNvPr>
-          <p:cNvSpPr>
-            <a:spLocks noGrp="1"/>
-          </p:cNvSpPr>
-          <p:nvPr>
-            <p:ph type="title"/>
-          </p:nvPr>
-        </p:nvSpPr>
-        <p:spPr>
-          <a:xfrm>
-            <a:off x="766232" y="222381"/>
-            <a:ext cx="11425767" cy="720596"/>
-          </a:xfrm>
-        </p:spPr>
-        <p:txBody>
-          <a:bodyPr/>
-          <a:lstStyle/>
-          <a:p>
-            <a:r>
-              <a:rPr lang="it-IT" noProof="0" dirty="0"/>
-              <a:t>Slide </a:t>
-            </a:r>
-            <a:r>
-              <a:rPr lang="it-IT" noProof="0" dirty="0" err="1"/>
-              <a:t>Structure</a:t>
-            </a:r>
-            <a:endParaRPr lang="en-US" dirty="0"/>
-          </a:p>
-        </p:txBody>
-      </p:sp>
-      <p:sp>
-        <p:nvSpPr>
-          <p:cNvPr id="4" name="Slide Number Placeholder 3">
-            <a:extLst>
-              <a:ext uri="{FF2B5EF4-FFF2-40B4-BE49-F238E27FC236}">
-                <a16:creationId xmlns:a16="http://schemas.microsoft.com/office/drawing/2014/main" id="{5C9B4F3A-6546-5DA8-D4A7-1A9D389B8A36}"/>
-              </a:ext>
-            </a:extLst>
-          </p:cNvPr>
-          <p:cNvSpPr>
-            <a:spLocks noGrp="1"/>
-          </p:cNvSpPr>
-          <p:nvPr>
-            <p:ph type="sldNum" sz="quarter" idx="11"/>
-          </p:nvPr>
-        </p:nvSpPr>
-        <p:spPr/>
-        <p:txBody>
-          <a:bodyPr/>
-          <a:lstStyle/>
-          <a:p>
-            <a:fld id="{2E6AEE32-87CF-4B18-ACD9-DC92317905A5}" type="slidenum">
-              <a:rPr lang="en-US" altLang="en-US" smtClean="0"/>
-              <a:pPr/>
-              <a:t>19</a:t>
-            </a:fld>
-            <a:endParaRPr lang="en-US" altLang="en-US" dirty="0"/>
-          </a:p>
-        </p:txBody>
-      </p:sp>
-      <p:sp>
-        <p:nvSpPr>
-          <p:cNvPr id="5" name="Footer Placeholder 4">
-            <a:extLst>
-              <a:ext uri="{FF2B5EF4-FFF2-40B4-BE49-F238E27FC236}">
-                <a16:creationId xmlns:a16="http://schemas.microsoft.com/office/drawing/2014/main" id="{91830614-A9C6-1E74-6976-DDA026777989}"/>
-              </a:ext>
-            </a:extLst>
-          </p:cNvPr>
-          <p:cNvSpPr>
-            <a:spLocks noGrp="1"/>
-          </p:cNvSpPr>
-          <p:nvPr>
-            <p:ph type="ftr" sz="quarter" idx="12"/>
-          </p:nvPr>
-        </p:nvSpPr>
-        <p:spPr/>
-        <p:txBody>
-          <a:bodyPr/>
-          <a:lstStyle/>
-          <a:p>
-            <a:pPr>
-              <a:defRPr/>
-            </a:pPr>
-            <a:endParaRPr lang="en-US" dirty="0"/>
-          </a:p>
-        </p:txBody>
-      </p:sp>
-      <p:sp>
-        <p:nvSpPr>
-          <p:cNvPr id="9" name="TextBox 8">
-            <a:extLst>
-              <a:ext uri="{FF2B5EF4-FFF2-40B4-BE49-F238E27FC236}">
-                <a16:creationId xmlns:a16="http://schemas.microsoft.com/office/drawing/2014/main" id="{17617C54-65BB-F8A5-7CC0-DC3A97333934}"/>
-              </a:ext>
-            </a:extLst>
-          </p:cNvPr>
-          <p:cNvSpPr txBox="1"/>
-          <p:nvPr/>
-        </p:nvSpPr>
-        <p:spPr>
-          <a:xfrm>
-            <a:off x="766232" y="4464115"/>
-            <a:ext cx="10728857" cy="1754326"/>
-          </a:xfrm>
-          <a:prstGeom prst="rect">
-            <a:avLst/>
-          </a:prstGeom>
-          <a:noFill/>
-        </p:spPr>
-        <p:txBody>
-          <a:bodyPr wrap="square" rtlCol="0">
-            <a:spAutoFit/>
-          </a:bodyPr>
-          <a:lstStyle/>
-          <a:p>
-            <a:pPr marL="342900" indent="-342900">
-              <a:buFont typeface="Wingdings" panose="05000000000000000000" pitchFamily="2" charset="2"/>
-              <a:buChar char="q"/>
-            </a:pPr>
-            <a:r>
-              <a:rPr lang="en-GB" sz="1800" b="1" dirty="0">
-                <a:solidFill>
-                  <a:srgbClr val="0000FF"/>
-                </a:solidFill>
-              </a:rPr>
-              <a:t>Text </a:t>
-            </a:r>
-            <a:r>
-              <a:rPr lang="en-GB" sz="1800" b="1" dirty="0" err="1">
-                <a:solidFill>
-                  <a:srgbClr val="0000FF"/>
-                </a:solidFill>
-              </a:rPr>
-              <a:t>text</a:t>
-            </a:r>
-            <a:r>
-              <a:rPr lang="en-GB" sz="1800" b="1" dirty="0">
-                <a:solidFill>
-                  <a:srgbClr val="0000FF"/>
-                </a:solidFill>
-              </a:rPr>
-              <a:t> </a:t>
-            </a:r>
-            <a:r>
-              <a:rPr lang="en-GB" sz="1800" b="1" dirty="0" err="1">
-                <a:solidFill>
-                  <a:srgbClr val="0000FF"/>
-                </a:solidFill>
-              </a:rPr>
-              <a:t>text</a:t>
-            </a:r>
-            <a:endParaRPr lang="en-GB" sz="1800" b="1" dirty="0">
-              <a:solidFill>
-                <a:srgbClr val="0000FF"/>
-              </a:solidFill>
-            </a:endParaRPr>
-          </a:p>
-          <a:p>
-            <a:pPr marL="342900" indent="-342900">
-              <a:buFont typeface="Wingdings" panose="05000000000000000000" pitchFamily="2" charset="2"/>
-              <a:buChar char="q"/>
-            </a:pPr>
-            <a:r>
-              <a:rPr lang="en-GB" sz="1800" b="1" dirty="0">
-                <a:solidFill>
-                  <a:srgbClr val="0000FF"/>
-                </a:solidFill>
-              </a:rPr>
-              <a:t>text</a:t>
-            </a:r>
-          </a:p>
-          <a:p>
-            <a:pPr marL="342900" indent="-342900">
-              <a:buFont typeface="Wingdings" panose="05000000000000000000" pitchFamily="2" charset="2"/>
-              <a:buChar char="q"/>
-            </a:pPr>
-            <a:r>
-              <a:rPr lang="en-GB" sz="1800" b="1" dirty="0">
-                <a:solidFill>
-                  <a:srgbClr val="0000FF"/>
-                </a:solidFill>
-              </a:rPr>
-              <a:t>text</a:t>
-            </a:r>
-          </a:p>
-          <a:p>
-            <a:pPr marL="342900" indent="-342900">
-              <a:buFont typeface="Wingdings" panose="05000000000000000000" pitchFamily="2" charset="2"/>
-              <a:buChar char="q"/>
-            </a:pPr>
-            <a:endParaRPr lang="en-GB" sz="1800" b="1" dirty="0">
-              <a:solidFill>
-                <a:srgbClr val="0000FF"/>
-              </a:solidFill>
-            </a:endParaRPr>
-          </a:p>
-          <a:p>
-            <a:pPr marL="342900" indent="-342900">
-              <a:buFont typeface="Wingdings" panose="05000000000000000000" pitchFamily="2" charset="2"/>
-              <a:buChar char="q"/>
-            </a:pPr>
-            <a:r>
-              <a:rPr lang="en-GB" sz="1800" b="1" dirty="0">
-                <a:solidFill>
-                  <a:srgbClr val="0000FF"/>
-                </a:solidFill>
-              </a:rPr>
-              <a:t>Text</a:t>
-            </a:r>
-          </a:p>
-          <a:p>
-            <a:pPr marL="342900" indent="-342900">
-              <a:buFont typeface="Wingdings" panose="05000000000000000000" pitchFamily="2" charset="2"/>
-              <a:buChar char="q"/>
-            </a:pPr>
-            <a:endParaRPr lang="en-GB" sz="1800" dirty="0"/>
-          </a:p>
-        </p:txBody>
-      </p:sp>
-      <p:sp>
-        <p:nvSpPr>
-          <p:cNvPr id="11" name="Rectangle 10">
-            <a:extLst>
-              <a:ext uri="{FF2B5EF4-FFF2-40B4-BE49-F238E27FC236}">
-                <a16:creationId xmlns:a16="http://schemas.microsoft.com/office/drawing/2014/main" id="{2E2C2D40-DEE7-54C8-3324-540F8ED714A4}"/>
-              </a:ext>
-            </a:extLst>
-          </p:cNvPr>
-          <p:cNvSpPr/>
-          <p:nvPr/>
-        </p:nvSpPr>
-        <p:spPr bwMode="auto">
-          <a:xfrm>
-            <a:off x="3418203" y="1155334"/>
-            <a:ext cx="4860540" cy="3308781"/>
-          </a:xfrm>
-          <a:prstGeom prst="rect">
-            <a:avLst/>
-          </a:prstGeom>
-          <a:solidFill>
-            <a:schemeClr val="bg1">
-              <a:lumMod val="95000"/>
-            </a:schemeClr>
-          </a:solidFill>
-          <a:ln w="9525" cap="flat" cmpd="sng" algn="ctr">
-            <a:solidFill>
-              <a:schemeClr val="tx1"/>
-            </a:solidFill>
-            <a:prstDash val="solid"/>
-            <a:round/>
-            <a:headEnd type="none" w="med" len="med"/>
-            <a:tailEnd type="none" w="med" len="med"/>
-          </a:ln>
-          <a:effectLst/>
-        </p:spPr>
-        <p:txBody>
-          <a:bodyPr vert="horz" wrap="square" lIns="91440" tIns="45720" rIns="91440" bIns="45720" numCol="1" rtlCol="0" anchor="t" anchorCtr="0" compatLnSpc="1">
-            <a:prstTxWarp prst="textNoShape">
-              <a:avLst/>
-            </a:prstTxWarp>
-          </a:bodyPr>
-          <a:lstStyle/>
-          <a:p>
-            <a:pPr marL="469900" marR="0" indent="-469900" algn="l" defTabSz="914400" rtl="0" eaLnBrk="1" fontAlgn="base" latinLnBrk="0" hangingPunct="1">
-              <a:lnSpc>
-                <a:spcPct val="90000"/>
-              </a:lnSpc>
-              <a:spcBef>
-                <a:spcPct val="20000"/>
-              </a:spcBef>
-              <a:spcAft>
-                <a:spcPct val="0"/>
-              </a:spcAft>
-              <a:buClr>
-                <a:schemeClr val="accent2"/>
-              </a:buClr>
-              <a:buSzTx/>
-              <a:buFont typeface="Wingdings" pitchFamily="2" charset="2"/>
-              <a:buChar char="o"/>
-              <a:tabLst/>
-            </a:pPr>
-            <a:endParaRPr kumimoji="0" lang="en-GB" sz="2000" b="0" i="0" u="none" strike="noStrike" cap="none" normalizeH="0" baseline="0">
-              <a:ln>
-                <a:noFill/>
-              </a:ln>
-              <a:solidFill>
-                <a:schemeClr val="tx1"/>
-              </a:solidFill>
-              <a:effectLst/>
-              <a:latin typeface="Verdana" pitchFamily="34" charset="0"/>
-              <a:ea typeface="ＭＳ Ｐゴシック" pitchFamily="50" charset="-128"/>
-            </a:endParaRPr>
-          </a:p>
-        </p:txBody>
-      </p:sp>
-    </p:spTree>
-    <p:extLst>
-      <p:ext uri="{BB962C8B-B14F-4D97-AF65-F5344CB8AC3E}">
-        <p14:creationId xmlns:p14="http://schemas.microsoft.com/office/powerpoint/2010/main" val="1269750494"/>
       </p:ext>
     </p:extLst>
   </p:cSld>
@@ -10673,6 +11227,15 @@
 </file>
 
 <file path=customXml/item1.xml><?xml version="1.0" encoding="utf-8"?>
+<?mso-contentType ?>
+<FormTemplates xmlns="http://schemas.microsoft.com/sharepoint/v3/contenttype/forms">
+  <Display>DocumentLibraryForm</Display>
+  <Edit>DocumentLibraryForm</Edit>
+  <New>DocumentLibraryForm</New>
+</FormTemplates>
+</file>
+
+<file path=customXml/item2.xml><?xml version="1.0" encoding="utf-8"?>
 <ct:contentTypeSchema xmlns:ct="http://schemas.microsoft.com/office/2006/metadata/contentType" xmlns:ma="http://schemas.microsoft.com/office/2006/metadata/properties/metaAttributes" ct:_="" ma:_="" ma:contentTypeName="Documento" ma:contentTypeID="0x01010009A656CF8C467741A56A16B7574AC68E" ma:contentTypeVersion="12" ma:contentTypeDescription="Creare un nuovo documento." ma:contentTypeScope="" ma:versionID="4f27b0f6ef663e5da5bafac1efc6fe9a">
   <xsd:schema xmlns:xsd="http://www.w3.org/2001/XMLSchema" xmlns:xs="http://www.w3.org/2001/XMLSchema" xmlns:p="http://schemas.microsoft.com/office/2006/metadata/properties" xmlns:ns3="d81608ca-db68-4891-9f53-9b89cbfff5c6" xmlns:ns4="be3c09a5-e964-4602-bd74-bbf48e0fabf1" targetNamespace="http://schemas.microsoft.com/office/2006/metadata/properties" ma:root="true" ma:fieldsID="8a6d6b69e42fa993b1c0a33dd1bd5a45" ns3:_="" ns4:_="">
     <xsd:import namespace="d81608ca-db68-4891-9f53-9b89cbfff5c6"/>
@@ -10887,15 +11450,6 @@
 </ct:contentTypeSchema>
 </file>
 
-<file path=customXml/item2.xml><?xml version="1.0" encoding="utf-8"?>
-<?mso-contentType ?>
-<FormTemplates xmlns="http://schemas.microsoft.com/sharepoint/v3/contenttype/forms">
-  <Display>DocumentLibraryForm</Display>
-  <Edit>DocumentLibraryForm</Edit>
-  <New>DocumentLibraryForm</New>
-</FormTemplates>
-</file>
-
 <file path=customXml/item3.xml><?xml version="1.0" encoding="utf-8"?>
 <p:properties xmlns:p="http://schemas.microsoft.com/office/2006/metadata/properties" xmlns:xsi="http://www.w3.org/2001/XMLSchema-instance" xmlns:pc="http://schemas.microsoft.com/office/infopath/2007/PartnerControls">
   <documentManagement>
@@ -10905,6 +11459,14 @@
 </file>
 
 <file path=customXml/itemProps1.xml><?xml version="1.0" encoding="utf-8"?>
+<ds:datastoreItem xmlns:ds="http://schemas.openxmlformats.org/officeDocument/2006/customXml" ds:itemID="{6E8D78F2-F211-4F79-8A63-15AEAF64F23A}">
+  <ds:schemaRefs>
+    <ds:schemaRef ds:uri="http://schemas.microsoft.com/sharepoint/v3/contenttype/forms"/>
+  </ds:schemaRefs>
+</ds:datastoreItem>
+</file>
+
+<file path=customXml/itemProps2.xml><?xml version="1.0" encoding="utf-8"?>
 <ds:datastoreItem xmlns:ds="http://schemas.openxmlformats.org/officeDocument/2006/customXml" ds:itemID="{AC7A1D52-4C7C-4BE2-BA1D-9D952C857EA1}">
   <ds:schemaRefs>
     <ds:schemaRef ds:uri="http://schemas.microsoft.com/office/2006/metadata/contentType"/>
@@ -10923,27 +11485,19 @@
 </ds:datastoreItem>
 </file>
 
-<file path=customXml/itemProps2.xml><?xml version="1.0" encoding="utf-8"?>
-<ds:datastoreItem xmlns:ds="http://schemas.openxmlformats.org/officeDocument/2006/customXml" ds:itemID="{6E8D78F2-F211-4F79-8A63-15AEAF64F23A}">
-  <ds:schemaRefs>
-    <ds:schemaRef ds:uri="http://schemas.microsoft.com/sharepoint/v3/contenttype/forms"/>
-  </ds:schemaRefs>
-</ds:datastoreItem>
-</file>
-
 <file path=customXml/itemProps3.xml><?xml version="1.0" encoding="utf-8"?>
 <ds:datastoreItem xmlns:ds="http://schemas.openxmlformats.org/officeDocument/2006/customXml" ds:itemID="{3F5952B0-BE3F-4397-8C49-DFA106167C99}">
   <ds:schemaRefs>
+    <ds:schemaRef ds:uri="http://purl.org/dc/elements/1.1/"/>
     <ds:schemaRef ds:uri="http://schemas.microsoft.com/office/2006/documentManagement/types"/>
-    <ds:schemaRef ds:uri="http://schemas.microsoft.com/office/infopath/2007/PartnerControls"/>
+    <ds:schemaRef ds:uri="http://schemas.microsoft.com/office/2006/metadata/properties"/>
+    <ds:schemaRef ds:uri="http://schemas.openxmlformats.org/package/2006/metadata/core-properties"/>
     <ds:schemaRef ds:uri="http://purl.org/dc/terms/"/>
     <ds:schemaRef ds:uri="http://purl.org/dc/dcmitype/"/>
-    <ds:schemaRef ds:uri="http://schemas.openxmlformats.org/package/2006/metadata/core-properties"/>
     <ds:schemaRef ds:uri="be3c09a5-e964-4602-bd74-bbf48e0fabf1"/>
     <ds:schemaRef ds:uri="d81608ca-db68-4891-9f53-9b89cbfff5c6"/>
+    <ds:schemaRef ds:uri="http://schemas.microsoft.com/office/infopath/2007/PartnerControls"/>
     <ds:schemaRef ds:uri="http://www.w3.org/XML/1998/namespace"/>
-    <ds:schemaRef ds:uri="http://schemas.microsoft.com/office/2006/metadata/properties"/>
-    <ds:schemaRef ds:uri="http://purl.org/dc/elements/1.1/"/>
   </ds:schemaRefs>
 </ds:datastoreItem>
 </file>
--- a/Documentazione.pptx
+++ b/Documentazione.pptx
@@ -3694,7 +3694,34 @@
                 </a:solidFill>
                 <a:latin typeface="NimbusRomNo9L-Regu"/>
               </a:rPr>
-              <a:t>l.pina4@campus.unimib.it, s.rancati8@campus.unimib.it</a:t>
+              <a:t>l.pina4@campus.unimib.it, </a:t>
+            </a:r>
+            <a:r>
+              <a:rPr lang="it-IT" sz="1500" b="1" dirty="0">
+                <a:solidFill>
+                  <a:srgbClr val="0000FF"/>
+                </a:solidFill>
+                <a:latin typeface="NimbusRomNo9L-Regu"/>
+                <a:hlinkClick r:id="rId5"/>
+              </a:rPr>
+              <a:t>s.rancati8@campus.unimib.it</a:t>
+            </a:r>
+            <a:endParaRPr lang="it-IT" sz="1500" b="1" dirty="0">
+              <a:solidFill>
+                <a:srgbClr val="0000FF"/>
+              </a:solidFill>
+              <a:latin typeface="NimbusRomNo9L-Regu"/>
+            </a:endParaRPr>
+          </a:p>
+          <a:p>
+            <a:r>
+              <a:rPr lang="it-IT" sz="1500" b="1" dirty="0">
+                <a:solidFill>
+                  <a:srgbClr val="0000FF"/>
+                </a:solidFill>
+                <a:latin typeface="NimbusRomNo9L-Regu"/>
+              </a:rPr>
+              <a:t>https://github.com/LorenzoPinaUnimib/InformaticaIndustriale</a:t>
             </a:r>
             <a:endParaRPr lang="it-IT" sz="1500" b="1" i="0" u="none" strike="noStrike" baseline="0" dirty="0">
               <a:solidFill>
@@ -3744,7 +3771,7 @@
           <p:nvPr/>
         </p:nvPicPr>
         <p:blipFill>
-          <a:blip r:embed="rId5">
+          <a:blip r:embed="rId6">
             <a:extLst>
               <a:ext uri="{28A0092B-C50C-407E-A947-70E740481C1C}">
                 <a14:useLocalDpi xmlns:a14="http://schemas.microsoft.com/office/drawing/2010/main" val="0"/>

--- a/Documentazione.pptx
+++ b/Documentazione.pptx
@@ -3694,24 +3694,8 @@
                 </a:solidFill>
                 <a:latin typeface="NimbusRomNo9L-Regu"/>
               </a:rPr>
-              <a:t>l.pina4@campus.unimib.it, </a:t>
-            </a:r>
-            <a:r>
-              <a:rPr lang="it-IT" sz="1500" b="1" dirty="0">
-                <a:solidFill>
-                  <a:srgbClr val="0000FF"/>
-                </a:solidFill>
-                <a:latin typeface="NimbusRomNo9L-Regu"/>
-                <a:hlinkClick r:id="rId5"/>
-              </a:rPr>
-              <a:t>s.rancati8@campus.unimib.it</a:t>
-            </a:r>
-            <a:endParaRPr lang="it-IT" sz="1500" b="1" dirty="0">
-              <a:solidFill>
-                <a:srgbClr val="0000FF"/>
-              </a:solidFill>
-              <a:latin typeface="NimbusRomNo9L-Regu"/>
-            </a:endParaRPr>
+              <a:t>l.pina4@campus.unimib.it, s.rancati8@campus.unimib.it</a:t>
+            </a:r>
           </a:p>
           <a:p>
             <a:r>
@@ -3771,7 +3755,7 @@
           <p:nvPr/>
         </p:nvPicPr>
         <p:blipFill>
-          <a:blip r:embed="rId6">
+          <a:blip r:embed="rId5">
             <a:extLst>
               <a:ext uri="{28A0092B-C50C-407E-A947-70E740481C1C}">
                 <a14:useLocalDpi xmlns:a14="http://schemas.microsoft.com/office/drawing/2010/main" val="0"/>
@@ -3940,7 +3924,7 @@
         <p:spPr>
           <a:xfrm>
             <a:off x="766232" y="4464115"/>
-            <a:ext cx="10728857" cy="2031325"/>
+            <a:ext cx="10728857" cy="1477328"/>
           </a:xfrm>
           <a:prstGeom prst="rect">
             <a:avLst/>
@@ -4007,129 +3991,8 @@
                   <a:srgbClr val="0000FF"/>
                 </a:solidFill>
               </a:rPr>
-              <a:t>Il </a:t>
-            </a:r>
-            <a:r>
-              <a:rPr lang="en-GB" sz="1800" b="1" dirty="0" err="1">
-                <a:solidFill>
-                  <a:srgbClr val="0000FF"/>
-                </a:solidFill>
-              </a:rPr>
-              <a:t>filtro</a:t>
-            </a:r>
-            <a:r>
-              <a:rPr lang="en-GB" sz="1800" b="1" dirty="0">
-                <a:solidFill>
-                  <a:srgbClr val="0000FF"/>
-                </a:solidFill>
-              </a:rPr>
-              <a:t> ha </a:t>
-            </a:r>
-            <a:r>
-              <a:rPr lang="en-GB" sz="1800" b="1" dirty="0" err="1">
-                <a:solidFill>
-                  <a:srgbClr val="0000FF"/>
-                </a:solidFill>
-              </a:rPr>
-              <a:t>rimosso</a:t>
-            </a:r>
-            <a:r>
-              <a:rPr lang="en-GB" sz="1800" b="1" dirty="0">
-                <a:solidFill>
-                  <a:srgbClr val="0000FF"/>
-                </a:solidFill>
-              </a:rPr>
-              <a:t> il </a:t>
-            </a:r>
-            <a:r>
-              <a:rPr lang="en-GB" sz="1800" b="1" dirty="0" err="1">
-                <a:solidFill>
-                  <a:srgbClr val="0000FF"/>
-                </a:solidFill>
-              </a:rPr>
-              <a:t>rumore</a:t>
-            </a:r>
-            <a:r>
-              <a:rPr lang="en-GB" sz="1800" b="1" dirty="0">
-                <a:solidFill>
-                  <a:srgbClr val="0000FF"/>
-                </a:solidFill>
-              </a:rPr>
-              <a:t> a </a:t>
-            </a:r>
-            <a:r>
-              <a:rPr lang="en-GB" sz="1800" b="1" dirty="0" err="1">
-                <a:solidFill>
-                  <a:srgbClr val="0000FF"/>
-                </a:solidFill>
-              </a:rPr>
-              <a:t>frequenze</a:t>
-            </a:r>
-            <a:r>
-              <a:rPr lang="en-GB" sz="1800" b="1" dirty="0">
-                <a:solidFill>
-                  <a:srgbClr val="0000FF"/>
-                </a:solidFill>
-              </a:rPr>
-              <a:t> elevate(</a:t>
-            </a:r>
-            <a:r>
-              <a:rPr lang="en-GB" sz="1800" b="1" dirty="0" err="1">
-                <a:solidFill>
-                  <a:srgbClr val="0000FF"/>
-                </a:solidFill>
-              </a:rPr>
-              <a:t>grafico</a:t>
-            </a:r>
-            <a:r>
-              <a:rPr lang="en-GB" sz="1800" b="1" dirty="0">
-                <a:solidFill>
-                  <a:srgbClr val="0000FF"/>
-                </a:solidFill>
-              </a:rPr>
-              <a:t> di Destra)</a:t>
-            </a:r>
-          </a:p>
-          <a:p>
-            <a:pPr marL="342900" indent="-342900">
-              <a:buFont typeface="Wingdings" panose="05000000000000000000" pitchFamily="2" charset="2"/>
-              <a:buChar char="q"/>
-            </a:pPr>
-            <a:r>
-              <a:rPr lang="en-GB" sz="1800" b="1" dirty="0">
-                <a:solidFill>
-                  <a:srgbClr val="0000FF"/>
-                </a:solidFill>
-              </a:rPr>
-              <a:t>0 a </a:t>
-            </a:r>
-            <a:r>
-              <a:rPr lang="en-GB" sz="1800" b="1" dirty="0" err="1">
-                <a:solidFill>
-                  <a:srgbClr val="0000FF"/>
-                </a:solidFill>
-              </a:rPr>
-              <a:t>multipli</a:t>
-            </a:r>
-            <a:r>
-              <a:rPr lang="en-GB" sz="1800" b="1" dirty="0">
-                <a:solidFill>
-                  <a:srgbClr val="0000FF"/>
-                </a:solidFill>
-              </a:rPr>
-              <a:t> di F/N</a:t>
-            </a:r>
-          </a:p>
-          <a:p>
-            <a:pPr marL="342900" indent="-342900">
-              <a:buFont typeface="Wingdings" panose="05000000000000000000" pitchFamily="2" charset="2"/>
-              <a:buChar char="q"/>
-            </a:pPr>
-            <a:endParaRPr lang="en-GB" sz="1800" b="1" dirty="0">
-              <a:solidFill>
-                <a:srgbClr val="0000FF"/>
-              </a:solidFill>
-            </a:endParaRPr>
+              <a:t>The filter has removed the high frequency noise</a:t>
+            </a:r>
           </a:p>
         </p:txBody>
       </p:sp>
@@ -4155,8 +4018,8 @@
         </p:blipFill>
         <p:spPr>
           <a:xfrm>
-            <a:off x="622545" y="1583795"/>
-            <a:ext cx="7086110" cy="3516586"/>
+            <a:off x="1969020" y="1240504"/>
+            <a:ext cx="8253959" cy="4096148"/>
           </a:xfrm>
           <a:prstGeom prst="rect">
             <a:avLst/>
@@ -4420,7 +4283,7 @@
         </p:blipFill>
         <p:spPr>
           <a:xfrm>
-            <a:off x="1400467" y="1223755"/>
+            <a:off x="1400467" y="1313765"/>
             <a:ext cx="9391066" cy="4030678"/>
           </a:xfrm>
           <a:prstGeom prst="rect">
@@ -4685,7 +4548,7 @@
         </p:blipFill>
         <p:spPr>
           <a:xfrm>
-            <a:off x="1385186" y="1223755"/>
+            <a:off x="1385186" y="1315746"/>
             <a:ext cx="9421628" cy="4040206"/>
           </a:xfrm>
           <a:prstGeom prst="rect">
@@ -4950,8 +4813,8 @@
         </p:blipFill>
         <p:spPr>
           <a:xfrm>
-            <a:off x="1394438" y="1223755"/>
-            <a:ext cx="9403124" cy="3965664"/>
+            <a:off x="1347275" y="1313765"/>
+            <a:ext cx="9497450" cy="4005445"/>
           </a:xfrm>
           <a:prstGeom prst="rect">
             <a:avLst/>
@@ -5035,7 +4898,23 @@
             </a:r>
             <a:r>
               <a:rPr lang="it-IT" noProof="0" dirty="0"/>
-              <a:t> – NFIFO = 32 (log2NFIFO = 5)</a:t>
+              <a:t> of </a:t>
+            </a:r>
+            <a:r>
+              <a:rPr lang="it-IT" noProof="0" dirty="0" err="1"/>
+              <a:t>noise</a:t>
+            </a:r>
+            <a:r>
+              <a:rPr lang="it-IT" noProof="0" dirty="0"/>
+              <a:t> </a:t>
+            </a:r>
+            <a:r>
+              <a:rPr lang="it-IT" dirty="0"/>
+              <a:t>-</a:t>
+            </a:r>
+            <a:r>
+              <a:rPr lang="it-IT" noProof="0" dirty="0"/>
+              <a:t> NFIFO = 32 (log2NFIFO = 5)</a:t>
             </a:r>
             <a:endParaRPr lang="en-US" dirty="0"/>
           </a:p>
@@ -5181,7 +5060,7 @@
                   <a:srgbClr val="0000FF"/>
                 </a:solidFill>
               </a:rPr>
-              <a:t>We can see that the result still shows the presence of some noise</a:t>
+              <a:t>The filter tries to clean the noise signal but the result is not promising</a:t>
             </a:r>
             <a:endParaRPr lang="en-GB" sz="1800" dirty="0"/>
           </a:p>
@@ -5203,14 +5082,15 @@
         </p:nvPicPr>
         <p:blipFill>
           <a:blip r:embed="rId2"/>
+          <a:srcRect t="4351" b="1165"/>
           <a:stretch>
             <a:fillRect/>
           </a:stretch>
         </p:blipFill>
         <p:spPr>
           <a:xfrm>
-            <a:off x="1142308" y="1309391"/>
-            <a:ext cx="9907383" cy="4239217"/>
+            <a:off x="1142308" y="1313765"/>
+            <a:ext cx="9907383" cy="4005445"/>
           </a:xfrm>
           <a:prstGeom prst="rect">
             <a:avLst/>
@@ -5294,7 +5174,15 @@
             </a:r>
             <a:r>
               <a:rPr lang="it-IT" dirty="0"/>
-              <a:t> – NFIFO = 64 (log2NFIFO = 6)</a:t>
+              <a:t> of </a:t>
+            </a:r>
+            <a:r>
+              <a:rPr lang="it-IT" dirty="0" err="1"/>
+              <a:t>noise</a:t>
+            </a:r>
+            <a:r>
+              <a:rPr lang="it-IT" dirty="0"/>
+              <a:t> - NFIFO = 64 (log2NFIFO = 6)</a:t>
             </a:r>
             <a:endParaRPr lang="en-US" dirty="0"/>
           </a:p>
@@ -5440,7 +5328,7 @@
                   <a:srgbClr val="0000FF"/>
                 </a:solidFill>
               </a:rPr>
-              <a:t>With NFIFO = 64 the resulting sinusoid shows an improvement</a:t>
+              <a:t>With NFIFO = 64 we see a noticeable improvement in the resulting signal</a:t>
             </a:r>
             <a:endParaRPr lang="en-GB" sz="1800" dirty="0"/>
           </a:p>
@@ -5462,14 +5350,15 @@
         </p:nvPicPr>
         <p:blipFill>
           <a:blip r:embed="rId2"/>
+          <a:srcRect t="3497" b="3497"/>
           <a:stretch>
             <a:fillRect/>
           </a:stretch>
         </p:blipFill>
         <p:spPr>
           <a:xfrm>
-            <a:off x="1505490" y="1299865"/>
-            <a:ext cx="8897592" cy="4258269"/>
+            <a:off x="1614503" y="1313765"/>
+            <a:ext cx="8962993" cy="3989551"/>
           </a:xfrm>
           <a:prstGeom prst="rect">
             <a:avLst/>
@@ -5553,7 +5442,15 @@
             </a:r>
             <a:r>
               <a:rPr lang="it-IT" dirty="0"/>
-              <a:t> – NFIFO = 128 (log2NFIFO = 7)</a:t>
+              <a:t> of </a:t>
+            </a:r>
+            <a:r>
+              <a:rPr lang="it-IT" dirty="0" err="1"/>
+              <a:t>noise</a:t>
+            </a:r>
+            <a:r>
+              <a:rPr lang="it-IT" dirty="0"/>
+              <a:t> - NFIFO = 128 (log2NFIFO = 7)</a:t>
             </a:r>
             <a:endParaRPr lang="en-US" dirty="0"/>
           </a:p>
@@ -5699,7 +5596,7 @@
                   <a:srgbClr val="0000FF"/>
                 </a:solidFill>
               </a:rPr>
-              <a:t>With NFIFO = 128 the sinusoid is smoother but with more attenuation</a:t>
+              <a:t>With NFIFO = 128 noise is more attenuated but the starting delay is worse</a:t>
             </a:r>
             <a:endParaRPr lang="en-GB" sz="1800" dirty="0"/>
           </a:p>
@@ -5721,14 +5618,15 @@
         </p:nvPicPr>
         <p:blipFill>
           <a:blip r:embed="rId2"/>
+          <a:srcRect t="1205" b="1205"/>
           <a:stretch>
             <a:fillRect/>
           </a:stretch>
         </p:blipFill>
         <p:spPr>
           <a:xfrm>
-            <a:off x="1651967" y="1399892"/>
-            <a:ext cx="8888065" cy="4058216"/>
+            <a:off x="1601231" y="1313765"/>
+            <a:ext cx="8989538" cy="4005655"/>
           </a:xfrm>
           <a:prstGeom prst="rect">
             <a:avLst/>
@@ -5772,49 +5670,6 @@
           <a:chExt cx="0" cy="0"/>
         </a:xfrm>
       </p:grpSpPr>
-      <p:sp>
-        <p:nvSpPr>
-          <p:cNvPr id="2" name="Title 1">
-            <a:extLst>
-              <a:ext uri="{FF2B5EF4-FFF2-40B4-BE49-F238E27FC236}">
-                <a16:creationId xmlns:a16="http://schemas.microsoft.com/office/drawing/2014/main" id="{0DAD7E12-5FE4-6BF6-0F2C-E6165E2955FA}"/>
-              </a:ext>
-            </a:extLst>
-          </p:cNvPr>
-          <p:cNvSpPr>
-            <a:spLocks noGrp="1"/>
-          </p:cNvSpPr>
-          <p:nvPr>
-            <p:ph type="title"/>
-          </p:nvPr>
-        </p:nvSpPr>
-        <p:spPr>
-          <a:xfrm>
-            <a:off x="766233" y="222381"/>
-            <a:ext cx="7971367" cy="720596"/>
-          </a:xfrm>
-        </p:spPr>
-        <p:txBody>
-          <a:bodyPr vert="horz" wrap="square" lIns="91440" tIns="45720" rIns="91440" bIns="45720" numCol="1" anchor="b" anchorCtr="0" compatLnSpc="1">
-            <a:prstTxWarp prst="textNoShape">
-              <a:avLst/>
-            </a:prstTxWarp>
-            <a:normAutofit/>
-          </a:bodyPr>
-          <a:lstStyle/>
-          <a:p>
-            <a:pPr marL="457200" lvl="1"/>
-            <a:r>
-              <a:rPr lang="en-US" sz="3000" dirty="0">
-                <a:latin typeface="+mj-lt"/>
-                <a:ea typeface="+mj-ea"/>
-                <a:cs typeface="+mj-cs"/>
-              </a:rPr>
-              <a:t>Signal to Noise Ratio</a:t>
-            </a:r>
-          </a:p>
-        </p:txBody>
-      </p:sp>
       <p:pic>
         <p:nvPicPr>
           <p:cNvPr id="6" name="Immagine 5">
@@ -5837,7 +5692,7 @@
         </p:blipFill>
         <p:spPr>
           <a:xfrm>
-            <a:off x="101363" y="1275468"/>
+            <a:off x="300374" y="1275468"/>
             <a:ext cx="6155666" cy="2835315"/>
           </a:xfrm>
           <a:prstGeom prst="rect">
@@ -5846,182 +5701,6 @@
           <a:noFill/>
         </p:spPr>
       </p:pic>
-      <p:sp>
-        <p:nvSpPr>
-          <p:cNvPr id="9" name="TextBox 8">
-            <a:extLst>
-              <a:ext uri="{FF2B5EF4-FFF2-40B4-BE49-F238E27FC236}">
-                <a16:creationId xmlns:a16="http://schemas.microsoft.com/office/drawing/2014/main" id="{06E26371-097A-20B0-F174-87B38A787ED2}"/>
-              </a:ext>
-            </a:extLst>
-          </p:cNvPr>
-          <p:cNvSpPr txBox="1"/>
-          <p:nvPr/>
-        </p:nvSpPr>
-        <p:spPr bwMode="auto">
-          <a:xfrm>
-            <a:off x="335360" y="4464114"/>
-            <a:ext cx="11088291" cy="1555685"/>
-          </a:xfrm>
-          <a:prstGeom prst="rect">
-            <a:avLst/>
-          </a:prstGeom>
-          <a:noFill/>
-          <a:ln>
-            <a:noFill/>
-          </a:ln>
-        </p:spPr>
-        <p:txBody>
-          <a:bodyPr vert="horz" wrap="square" lIns="91440" tIns="45720" rIns="91440" bIns="45720" numCol="1" rtlCol="0" anchor="t" anchorCtr="0" compatLnSpc="1">
-            <a:prstTxWarp prst="textNoShape">
-              <a:avLst/>
-            </a:prstTxWarp>
-            <a:normAutofit/>
-          </a:bodyPr>
-          <a:lstStyle/>
-          <a:p>
-            <a:pPr marL="469900" indent="-469900" eaLnBrk="0" hangingPunct="0">
-              <a:spcBef>
-                <a:spcPct val="20000"/>
-              </a:spcBef>
-              <a:buClr>
-                <a:schemeClr val="accent2"/>
-              </a:buClr>
-              <a:buFont typeface="Wingdings" panose="05000000000000000000" pitchFamily="2" charset="2"/>
-              <a:buChar char="o"/>
-            </a:pPr>
-            <a:r>
-              <a:rPr lang="en-US" sz="2400" dirty="0">
-                <a:latin typeface="+mn-lt"/>
-              </a:rPr>
-              <a:t>NFIFO=32  </a:t>
-            </a:r>
-            <a:r>
-              <a:rPr lang="en-US" sz="2400" dirty="0" err="1">
-                <a:latin typeface="+mn-lt"/>
-              </a:rPr>
-              <a:t>rumore</a:t>
-            </a:r>
-            <a:r>
-              <a:rPr lang="en-US" sz="2400" dirty="0">
-                <a:latin typeface="+mn-lt"/>
-              </a:rPr>
-              <a:t> Maggiore, delay </a:t>
-            </a:r>
-            <a:r>
-              <a:rPr lang="en-US" sz="2400" dirty="0" err="1">
-                <a:latin typeface="+mn-lt"/>
-              </a:rPr>
-              <a:t>minore</a:t>
-            </a:r>
-            <a:r>
-              <a:rPr lang="en-US" sz="2400" dirty="0">
-                <a:latin typeface="+mn-lt"/>
-              </a:rPr>
-              <a:t> e </a:t>
-            </a:r>
-            <a:r>
-              <a:rPr lang="en-US" sz="2400" dirty="0" err="1">
-                <a:latin typeface="+mn-lt"/>
-              </a:rPr>
-              <a:t>ampiezza</a:t>
-            </a:r>
-            <a:r>
-              <a:rPr lang="en-US" sz="2400" dirty="0">
-                <a:latin typeface="+mn-lt"/>
-              </a:rPr>
-              <a:t> </a:t>
-            </a:r>
-            <a:r>
-              <a:rPr lang="en-US" sz="2400" dirty="0" err="1">
-                <a:latin typeface="+mn-lt"/>
-              </a:rPr>
-              <a:t>maggiore</a:t>
-            </a:r>
-            <a:endParaRPr lang="en-US" sz="2400" dirty="0">
-              <a:latin typeface="+mn-lt"/>
-            </a:endParaRPr>
-          </a:p>
-          <a:p>
-            <a:pPr marL="469900" indent="-469900" eaLnBrk="0" hangingPunct="0">
-              <a:spcBef>
-                <a:spcPct val="20000"/>
-              </a:spcBef>
-              <a:buClr>
-                <a:schemeClr val="accent2"/>
-              </a:buClr>
-              <a:buFont typeface="Wingdings" panose="05000000000000000000" pitchFamily="2" charset="2"/>
-              <a:buChar char="o"/>
-            </a:pPr>
-            <a:r>
-              <a:rPr lang="en-US" sz="2400" dirty="0">
-                <a:latin typeface="+mn-lt"/>
-              </a:rPr>
-              <a:t>NFIFO=128 </a:t>
-            </a:r>
-            <a:r>
-              <a:rPr lang="en-US" sz="2400" dirty="0" err="1">
-                <a:latin typeface="+mn-lt"/>
-              </a:rPr>
-              <a:t>rumore</a:t>
-            </a:r>
-            <a:r>
-              <a:rPr lang="en-US" sz="2400" dirty="0">
-                <a:latin typeface="+mn-lt"/>
-              </a:rPr>
-              <a:t> </a:t>
-            </a:r>
-            <a:r>
-              <a:rPr lang="en-US" sz="2400" dirty="0" err="1">
-                <a:latin typeface="+mn-lt"/>
-              </a:rPr>
-              <a:t>minore</a:t>
-            </a:r>
-            <a:r>
-              <a:rPr lang="en-US" sz="2400" dirty="0">
-                <a:latin typeface="+mn-lt"/>
-              </a:rPr>
-              <a:t>, delay Maggiore e </a:t>
-            </a:r>
-            <a:r>
-              <a:rPr lang="en-US" sz="2400" dirty="0" err="1">
-                <a:latin typeface="+mn-lt"/>
-              </a:rPr>
-              <a:t>ampiezza</a:t>
-            </a:r>
-            <a:r>
-              <a:rPr lang="en-US" sz="2400" dirty="0">
-                <a:latin typeface="+mn-lt"/>
-              </a:rPr>
-              <a:t> </a:t>
-            </a:r>
-            <a:r>
-              <a:rPr lang="en-US" sz="2400" dirty="0" err="1">
-                <a:latin typeface="+mn-lt"/>
-              </a:rPr>
-              <a:t>minore</a:t>
-            </a:r>
-            <a:endParaRPr lang="en-US" sz="2400" dirty="0">
-              <a:latin typeface="+mn-lt"/>
-            </a:endParaRPr>
-          </a:p>
-          <a:p>
-            <a:pPr marL="469900" indent="-469900" eaLnBrk="0" hangingPunct="0">
-              <a:spcBef>
-                <a:spcPct val="20000"/>
-              </a:spcBef>
-              <a:buClr>
-                <a:schemeClr val="accent2"/>
-              </a:buClr>
-              <a:buFont typeface="Wingdings" panose="05000000000000000000" pitchFamily="2" charset="2"/>
-              <a:buChar char="o"/>
-            </a:pPr>
-            <a:endParaRPr lang="en-US" sz="2400" dirty="0">
-              <a:latin typeface="+mn-lt"/>
-            </a:endParaRPr>
-          </a:p>
-        </p:txBody>
-      </p:sp>
       <p:sp>
         <p:nvSpPr>
           <p:cNvPr id="14" name="Date Placeholder 4">
@@ -6173,7 +5852,7 @@
         </p:blipFill>
         <p:spPr>
           <a:xfrm>
-            <a:off x="6257029" y="1275467"/>
+            <a:off x="6369309" y="1275467"/>
             <a:ext cx="5667351" cy="2835316"/>
           </a:xfrm>
           <a:prstGeom prst="rect">
@@ -6183,10 +5862,10 @@
       </p:pic>
       <p:sp>
         <p:nvSpPr>
-          <p:cNvPr id="10" name="CasellaDiTesto 9">
+          <p:cNvPr id="12" name="CasellaDiTesto 11">
             <a:extLst>
               <a:ext uri="{FF2B5EF4-FFF2-40B4-BE49-F238E27FC236}">
-                <a16:creationId xmlns:a16="http://schemas.microsoft.com/office/drawing/2014/main" id="{4077B367-DCAF-3830-5749-6EAEF5942E47}"/>
+                <a16:creationId xmlns:a16="http://schemas.microsoft.com/office/drawing/2014/main" id="{A5D91A2F-2A17-1740-A736-2F4094B230BC}"/>
               </a:ext>
             </a:extLst>
           </p:cNvPr>
@@ -6195,42 +5874,7 @@
         </p:nvSpPr>
         <p:spPr>
           <a:xfrm>
-            <a:off x="650395" y="1127031"/>
-            <a:ext cx="1594352" cy="338554"/>
-          </a:xfrm>
-          <a:prstGeom prst="rect">
-            <a:avLst/>
-          </a:prstGeom>
-          <a:noFill/>
-        </p:spPr>
-        <p:txBody>
-          <a:bodyPr wrap="square" rtlCol="0">
-            <a:spAutoFit/>
-          </a:bodyPr>
-          <a:lstStyle/>
-          <a:p>
-            <a:r>
-              <a:rPr lang="it-IT" sz="1600" dirty="0"/>
-              <a:t>NFIFO= 32</a:t>
-            </a:r>
-          </a:p>
-        </p:txBody>
-      </p:sp>
-      <p:sp>
-        <p:nvSpPr>
-          <p:cNvPr id="12" name="CasellaDiTesto 11">
-            <a:extLst>
-              <a:ext uri="{FF2B5EF4-FFF2-40B4-BE49-F238E27FC236}">
-                <a16:creationId xmlns:a16="http://schemas.microsoft.com/office/drawing/2014/main" id="{A5D91A2F-2A17-1740-A736-2F4094B230BC}"/>
-              </a:ext>
-            </a:extLst>
-          </p:cNvPr>
-          <p:cNvSpPr txBox="1"/>
-          <p:nvPr/>
-        </p:nvSpPr>
-        <p:spPr>
-          <a:xfrm>
-            <a:off x="10191455" y="1096253"/>
+            <a:off x="8437899" y="4350586"/>
             <a:ext cx="1530170" cy="338554"/>
           </a:xfrm>
           <a:prstGeom prst="rect">
@@ -6244,9 +5888,308 @@
           </a:bodyPr>
           <a:lstStyle/>
           <a:p>
+            <a:pPr algn="ctr"/>
             <a:r>
               <a:rPr lang="it-IT" sz="1600" dirty="0"/>
-              <a:t>NFIFO=128</a:t>
+              <a:t>NFIFO = 128</a:t>
+            </a:r>
+          </a:p>
+        </p:txBody>
+      </p:sp>
+      <p:sp>
+        <p:nvSpPr>
+          <p:cNvPr id="5" name="Title 1">
+            <a:extLst>
+              <a:ext uri="{FF2B5EF4-FFF2-40B4-BE49-F238E27FC236}">
+                <a16:creationId xmlns:a16="http://schemas.microsoft.com/office/drawing/2014/main" id="{131137E2-C73B-AAA0-C7B9-4A1477177F48}"/>
+              </a:ext>
+            </a:extLst>
+          </p:cNvPr>
+          <p:cNvSpPr txBox="1">
+            <a:spLocks/>
+          </p:cNvSpPr>
+          <p:nvPr/>
+        </p:nvSpPr>
+        <p:spPr bwMode="auto">
+          <a:xfrm>
+            <a:off x="766232" y="222381"/>
+            <a:ext cx="11425767" cy="720596"/>
+          </a:xfrm>
+          <a:prstGeom prst="rect">
+            <a:avLst/>
+          </a:prstGeom>
+          <a:noFill/>
+          <a:ln>
+            <a:noFill/>
+          </a:ln>
+          <a:extLst>
+            <a:ext uri="{909E8E84-426E-40DD-AFC4-6F175D3DCCD1}">
+              <a14:hiddenFill xmlns:a14="http://schemas.microsoft.com/office/drawing/2010/main">
+                <a:solidFill>
+                  <a:srgbClr val="FFFFFF"/>
+                </a:solidFill>
+              </a14:hiddenFill>
+            </a:ext>
+            <a:ext uri="{91240B29-F687-4F45-9708-019B960494DF}">
+              <a14:hiddenLine xmlns:a14="http://schemas.microsoft.com/office/drawing/2010/main" w="9525">
+                <a:solidFill>
+                  <a:srgbClr val="000000"/>
+                </a:solidFill>
+                <a:miter lim="800000"/>
+                <a:headEnd/>
+                <a:tailEnd/>
+              </a14:hiddenLine>
+            </a:ext>
+          </a:extLst>
+        </p:spPr>
+        <p:txBody>
+          <a:bodyPr vert="horz" wrap="square" lIns="91440" tIns="45720" rIns="91440" bIns="45720" numCol="1" anchor="b" anchorCtr="0" compatLnSpc="1">
+            <a:prstTxWarp prst="textNoShape">
+              <a:avLst/>
+            </a:prstTxWarp>
+          </a:bodyPr>
+          <a:lstStyle>
+            <a:lvl1pPr algn="l" rtl="0" eaLnBrk="0" fontAlgn="base" hangingPunct="0">
+              <a:spcBef>
+                <a:spcPct val="0"/>
+              </a:spcBef>
+              <a:spcAft>
+                <a:spcPct val="0"/>
+              </a:spcAft>
+              <a:defRPr sz="3000">
+                <a:solidFill>
+                  <a:schemeClr val="tx2"/>
+                </a:solidFill>
+                <a:latin typeface="+mj-lt"/>
+                <a:ea typeface="+mj-ea"/>
+                <a:cs typeface="+mj-cs"/>
+              </a:defRPr>
+            </a:lvl1pPr>
+            <a:lvl2pPr algn="l" rtl="0" eaLnBrk="0" fontAlgn="base" hangingPunct="0">
+              <a:spcBef>
+                <a:spcPct val="0"/>
+              </a:spcBef>
+              <a:spcAft>
+                <a:spcPct val="0"/>
+              </a:spcAft>
+              <a:defRPr sz="3800">
+                <a:solidFill>
+                  <a:schemeClr val="tx2"/>
+                </a:solidFill>
+                <a:latin typeface="Verdana" pitchFamily="34" charset="0"/>
+              </a:defRPr>
+            </a:lvl2pPr>
+            <a:lvl3pPr algn="l" rtl="0" eaLnBrk="0" fontAlgn="base" hangingPunct="0">
+              <a:spcBef>
+                <a:spcPct val="0"/>
+              </a:spcBef>
+              <a:spcAft>
+                <a:spcPct val="0"/>
+              </a:spcAft>
+              <a:defRPr sz="3800">
+                <a:solidFill>
+                  <a:schemeClr val="tx2"/>
+                </a:solidFill>
+                <a:latin typeface="Verdana" pitchFamily="34" charset="0"/>
+              </a:defRPr>
+            </a:lvl3pPr>
+            <a:lvl4pPr algn="l" rtl="0" eaLnBrk="0" fontAlgn="base" hangingPunct="0">
+              <a:spcBef>
+                <a:spcPct val="0"/>
+              </a:spcBef>
+              <a:spcAft>
+                <a:spcPct val="0"/>
+              </a:spcAft>
+              <a:defRPr sz="3800">
+                <a:solidFill>
+                  <a:schemeClr val="tx2"/>
+                </a:solidFill>
+                <a:latin typeface="Verdana" pitchFamily="34" charset="0"/>
+              </a:defRPr>
+            </a:lvl4pPr>
+            <a:lvl5pPr algn="l" rtl="0" eaLnBrk="0" fontAlgn="base" hangingPunct="0">
+              <a:spcBef>
+                <a:spcPct val="0"/>
+              </a:spcBef>
+              <a:spcAft>
+                <a:spcPct val="0"/>
+              </a:spcAft>
+              <a:defRPr sz="3800">
+                <a:solidFill>
+                  <a:schemeClr val="tx2"/>
+                </a:solidFill>
+                <a:latin typeface="Verdana" pitchFamily="34" charset="0"/>
+              </a:defRPr>
+            </a:lvl5pPr>
+            <a:lvl6pPr marL="457200" algn="l" rtl="0" fontAlgn="base">
+              <a:spcBef>
+                <a:spcPct val="0"/>
+              </a:spcBef>
+              <a:spcAft>
+                <a:spcPct val="0"/>
+              </a:spcAft>
+              <a:defRPr sz="3800">
+                <a:solidFill>
+                  <a:schemeClr val="tx2"/>
+                </a:solidFill>
+                <a:latin typeface="Verdana" pitchFamily="34" charset="0"/>
+              </a:defRPr>
+            </a:lvl6pPr>
+            <a:lvl7pPr marL="914400" algn="l" rtl="0" fontAlgn="base">
+              <a:spcBef>
+                <a:spcPct val="0"/>
+              </a:spcBef>
+              <a:spcAft>
+                <a:spcPct val="0"/>
+              </a:spcAft>
+              <a:defRPr sz="3800">
+                <a:solidFill>
+                  <a:schemeClr val="tx2"/>
+                </a:solidFill>
+                <a:latin typeface="Verdana" pitchFamily="34" charset="0"/>
+              </a:defRPr>
+            </a:lvl7pPr>
+            <a:lvl8pPr marL="1371600" algn="l" rtl="0" fontAlgn="base">
+              <a:spcBef>
+                <a:spcPct val="0"/>
+              </a:spcBef>
+              <a:spcAft>
+                <a:spcPct val="0"/>
+              </a:spcAft>
+              <a:defRPr sz="3800">
+                <a:solidFill>
+                  <a:schemeClr val="tx2"/>
+                </a:solidFill>
+                <a:latin typeface="Verdana" pitchFamily="34" charset="0"/>
+              </a:defRPr>
+            </a:lvl8pPr>
+            <a:lvl9pPr marL="1828800" algn="l" rtl="0" fontAlgn="base">
+              <a:spcBef>
+                <a:spcPct val="0"/>
+              </a:spcBef>
+              <a:spcAft>
+                <a:spcPct val="0"/>
+              </a:spcAft>
+              <a:defRPr sz="3800">
+                <a:solidFill>
+                  <a:schemeClr val="tx2"/>
+                </a:solidFill>
+                <a:latin typeface="Verdana" pitchFamily="34" charset="0"/>
+              </a:defRPr>
+            </a:lvl9pPr>
+          </a:lstStyle>
+          <a:p>
+            <a:r>
+              <a:rPr lang="en-US" kern="0" dirty="0"/>
+              <a:t>Signal to noise ratio</a:t>
+            </a:r>
+          </a:p>
+        </p:txBody>
+      </p:sp>
+      <p:sp>
+        <p:nvSpPr>
+          <p:cNvPr id="7" name="TextBox 8">
+            <a:extLst>
+              <a:ext uri="{FF2B5EF4-FFF2-40B4-BE49-F238E27FC236}">
+                <a16:creationId xmlns:a16="http://schemas.microsoft.com/office/drawing/2014/main" id="{98C35DF3-342B-43AD-52FA-E042E8C4EAFD}"/>
+              </a:ext>
+            </a:extLst>
+          </p:cNvPr>
+          <p:cNvSpPr txBox="1"/>
+          <p:nvPr/>
+        </p:nvSpPr>
+        <p:spPr>
+          <a:xfrm>
+            <a:off x="766232" y="4464115"/>
+            <a:ext cx="10728857" cy="1477328"/>
+          </a:xfrm>
+          <a:prstGeom prst="rect">
+            <a:avLst/>
+          </a:prstGeom>
+          <a:noFill/>
+        </p:spPr>
+        <p:txBody>
+          <a:bodyPr wrap="square" rtlCol="0">
+            <a:spAutoFit/>
+          </a:bodyPr>
+          <a:lstStyle/>
+          <a:p>
+            <a:endParaRPr lang="en-GB" sz="1800" b="1" dirty="0">
+              <a:solidFill>
+                <a:srgbClr val="0000FF"/>
+              </a:solidFill>
+            </a:endParaRPr>
+          </a:p>
+          <a:p>
+            <a:endParaRPr lang="en-GB" sz="1800" b="1" dirty="0">
+              <a:solidFill>
+                <a:srgbClr val="0000FF"/>
+              </a:solidFill>
+            </a:endParaRPr>
+          </a:p>
+          <a:p>
+            <a:pPr marL="342900" indent="-342900">
+              <a:buFont typeface="Wingdings" panose="05000000000000000000" pitchFamily="2" charset="2"/>
+              <a:buChar char="q"/>
+            </a:pPr>
+            <a:r>
+              <a:rPr lang="en-GB" sz="1800" b="1" dirty="0">
+                <a:solidFill>
+                  <a:srgbClr val="0000FF"/>
+                </a:solidFill>
+              </a:rPr>
+              <a:t>With NFIFO = 32 we notice more noise, less delay and more amplitude</a:t>
+            </a:r>
+          </a:p>
+          <a:p>
+            <a:pPr marL="342900" indent="-342900">
+              <a:buFont typeface="Wingdings" panose="05000000000000000000" pitchFamily="2" charset="2"/>
+              <a:buChar char="q"/>
+            </a:pPr>
+            <a:r>
+              <a:rPr lang="en-GB" sz="1800" b="1" dirty="0">
+                <a:solidFill>
+                  <a:srgbClr val="0000FF"/>
+                </a:solidFill>
+              </a:rPr>
+              <a:t>With NFIFO = 128 the noise is reduced with a penalization of more delay and less amplitude</a:t>
+            </a:r>
+            <a:endParaRPr lang="en-GB" sz="1800" dirty="0"/>
+          </a:p>
+        </p:txBody>
+      </p:sp>
+      <p:sp>
+        <p:nvSpPr>
+          <p:cNvPr id="11" name="CasellaDiTesto 10">
+            <a:extLst>
+              <a:ext uri="{FF2B5EF4-FFF2-40B4-BE49-F238E27FC236}">
+                <a16:creationId xmlns:a16="http://schemas.microsoft.com/office/drawing/2014/main" id="{2DC3AF4F-0E63-7CE3-EA24-8C5ACA09FE00}"/>
+              </a:ext>
+            </a:extLst>
+          </p:cNvPr>
+          <p:cNvSpPr txBox="1"/>
+          <p:nvPr/>
+        </p:nvSpPr>
+        <p:spPr>
+          <a:xfrm>
+            <a:off x="2613122" y="4350586"/>
+            <a:ext cx="1530170" cy="338554"/>
+          </a:xfrm>
+          <a:prstGeom prst="rect">
+            <a:avLst/>
+          </a:prstGeom>
+          <a:noFill/>
+        </p:spPr>
+        <p:txBody>
+          <a:bodyPr wrap="square" rtlCol="0">
+            <a:spAutoFit/>
+          </a:bodyPr>
+          <a:lstStyle/>
+          <a:p>
+            <a:pPr algn="ctr"/>
+            <a:r>
+              <a:rPr lang="it-IT" sz="1600" dirty="0"/>
+              <a:t>NFIFO = 32</a:t>
             </a:r>
           </a:p>
         </p:txBody>
@@ -6328,335 +6271,6 @@
       </p:sp>
       <p:sp>
         <p:nvSpPr>
-          <p:cNvPr id="9" name="TextBox 8">
-            <a:extLst>
-              <a:ext uri="{FF2B5EF4-FFF2-40B4-BE49-F238E27FC236}">
-                <a16:creationId xmlns:a16="http://schemas.microsoft.com/office/drawing/2014/main" id="{868F6270-6F5B-AB23-F9BE-2B705F199F06}"/>
-              </a:ext>
-            </a:extLst>
-          </p:cNvPr>
-          <p:cNvSpPr txBox="1"/>
-          <p:nvPr/>
-        </p:nvSpPr>
-        <p:spPr bwMode="auto">
-          <a:xfrm>
-            <a:off x="335360" y="4464114"/>
-            <a:ext cx="11088291" cy="1555685"/>
-          </a:xfrm>
-          <a:prstGeom prst="rect">
-            <a:avLst/>
-          </a:prstGeom>
-          <a:noFill/>
-          <a:ln>
-            <a:noFill/>
-          </a:ln>
-        </p:spPr>
-        <p:txBody>
-          <a:bodyPr vert="horz" wrap="square" lIns="91440" tIns="45720" rIns="91440" bIns="45720" numCol="1" rtlCol="0" anchor="t" anchorCtr="0" compatLnSpc="1">
-            <a:prstTxWarp prst="textNoShape">
-              <a:avLst/>
-            </a:prstTxWarp>
-            <a:normAutofit fontScale="92500"/>
-          </a:bodyPr>
-          <a:lstStyle/>
-          <a:p>
-            <a:pPr marL="469900" indent="-469900" eaLnBrk="0" hangingPunct="0">
-              <a:spcBef>
-                <a:spcPct val="20000"/>
-              </a:spcBef>
-              <a:buClr>
-                <a:schemeClr val="accent2"/>
-              </a:buClr>
-              <a:buFont typeface="Wingdings" panose="05000000000000000000" pitchFamily="2" charset="2"/>
-              <a:buChar char="o"/>
-            </a:pPr>
-            <a:r>
-              <a:rPr lang="en-US" sz="2400" dirty="0">
-                <a:latin typeface="+mn-lt"/>
-              </a:rPr>
-              <a:t>Si </a:t>
-            </a:r>
-            <a:r>
-              <a:rPr lang="en-US" sz="2400" dirty="0" err="1">
-                <a:latin typeface="+mn-lt"/>
-              </a:rPr>
-              <a:t>può</a:t>
-            </a:r>
-            <a:r>
-              <a:rPr lang="en-US" sz="2400" dirty="0">
-                <a:latin typeface="+mn-lt"/>
-              </a:rPr>
-              <a:t> </a:t>
-            </a:r>
-            <a:r>
-              <a:rPr lang="en-US" sz="2400" dirty="0" err="1">
-                <a:latin typeface="+mn-lt"/>
-              </a:rPr>
-              <a:t>notare</a:t>
-            </a:r>
-            <a:r>
-              <a:rPr lang="en-US" sz="2400" dirty="0">
-                <a:latin typeface="+mn-lt"/>
-              </a:rPr>
-              <a:t> come al </a:t>
-            </a:r>
-            <a:r>
-              <a:rPr lang="en-US" sz="2400" dirty="0" err="1">
-                <a:latin typeface="+mn-lt"/>
-              </a:rPr>
-              <a:t>variare</a:t>
-            </a:r>
-            <a:r>
-              <a:rPr lang="en-US" sz="2400" dirty="0">
-                <a:latin typeface="+mn-lt"/>
-              </a:rPr>
-              <a:t> di NFIFO non </a:t>
-            </a:r>
-            <a:r>
-              <a:rPr lang="en-US" sz="2400" dirty="0" err="1">
-                <a:latin typeface="+mn-lt"/>
-              </a:rPr>
-              <a:t>si</a:t>
-            </a:r>
-            <a:r>
-              <a:rPr lang="en-US" sz="2400" dirty="0">
-                <a:latin typeface="+mn-lt"/>
-              </a:rPr>
-              <a:t> </a:t>
-            </a:r>
-            <a:r>
-              <a:rPr lang="en-US" sz="2400" dirty="0" err="1">
-                <a:latin typeface="+mn-lt"/>
-              </a:rPr>
-              <a:t>hanno</a:t>
-            </a:r>
-            <a:r>
-              <a:rPr lang="en-US" sz="2400" dirty="0">
-                <a:latin typeface="+mn-lt"/>
-              </a:rPr>
-              <a:t> solo </a:t>
-            </a:r>
-            <a:r>
-              <a:rPr lang="en-US" sz="2400" dirty="0" err="1">
-                <a:latin typeface="+mn-lt"/>
-              </a:rPr>
-              <a:t>risultati</a:t>
-            </a:r>
-            <a:r>
-              <a:rPr lang="en-US" sz="2400" dirty="0">
-                <a:latin typeface="+mn-lt"/>
-              </a:rPr>
-              <a:t> </a:t>
-            </a:r>
-            <a:r>
-              <a:rPr lang="en-US" sz="2400" dirty="0" err="1">
-                <a:latin typeface="+mn-lt"/>
-              </a:rPr>
-              <a:t>positivi</a:t>
-            </a:r>
-            <a:r>
-              <a:rPr lang="en-US" sz="2400" dirty="0">
-                <a:latin typeface="+mn-lt"/>
-              </a:rPr>
-              <a:t> (</a:t>
-            </a:r>
-            <a:r>
-              <a:rPr lang="en-US" sz="2400" dirty="0" err="1">
-                <a:latin typeface="+mn-lt"/>
-              </a:rPr>
-              <a:t>tolgo</a:t>
-            </a:r>
-            <a:r>
-              <a:rPr lang="en-US" sz="2400" dirty="0">
-                <a:latin typeface="+mn-lt"/>
-              </a:rPr>
-              <a:t> il </a:t>
-            </a:r>
-            <a:r>
-              <a:rPr lang="en-US" sz="2400" dirty="0" err="1">
-                <a:latin typeface="+mn-lt"/>
-              </a:rPr>
-              <a:t>rumore</a:t>
-            </a:r>
-            <a:r>
-              <a:rPr lang="en-US" sz="2400" dirty="0">
-                <a:latin typeface="+mn-lt"/>
-              </a:rPr>
-              <a:t>) ma </a:t>
-            </a:r>
-            <a:r>
-              <a:rPr lang="en-US" sz="2400" dirty="0" err="1">
-                <a:latin typeface="+mn-lt"/>
-              </a:rPr>
-              <a:t>anche</a:t>
-            </a:r>
-            <a:r>
-              <a:rPr lang="en-US" sz="2400" dirty="0">
-                <a:latin typeface="+mn-lt"/>
-              </a:rPr>
-              <a:t> </a:t>
-            </a:r>
-            <a:r>
-              <a:rPr lang="en-US" sz="2400" dirty="0" err="1">
-                <a:latin typeface="+mn-lt"/>
-              </a:rPr>
-              <a:t>effetti</a:t>
-            </a:r>
-            <a:r>
-              <a:rPr lang="en-US" sz="2400" dirty="0">
-                <a:latin typeface="+mn-lt"/>
-              </a:rPr>
-              <a:t> </a:t>
-            </a:r>
-            <a:r>
-              <a:rPr lang="en-US" sz="2400" dirty="0" err="1">
-                <a:latin typeface="+mn-lt"/>
-              </a:rPr>
-              <a:t>indesiderati</a:t>
-            </a:r>
-            <a:r>
-              <a:rPr lang="en-US" sz="2400" dirty="0">
-                <a:latin typeface="+mn-lt"/>
-              </a:rPr>
-              <a:t> come la </a:t>
-            </a:r>
-            <a:r>
-              <a:rPr lang="en-US" sz="2400" dirty="0" err="1">
-                <a:latin typeface="+mn-lt"/>
-              </a:rPr>
-              <a:t>riduzione</a:t>
-            </a:r>
-            <a:r>
-              <a:rPr lang="en-US" sz="2400" dirty="0">
-                <a:latin typeface="+mn-lt"/>
-              </a:rPr>
-              <a:t> </a:t>
-            </a:r>
-            <a:r>
-              <a:rPr lang="en-US" sz="2400" dirty="0" err="1">
-                <a:latin typeface="+mn-lt"/>
-              </a:rPr>
-              <a:t>dell’ampiezza</a:t>
-            </a:r>
-            <a:r>
-              <a:rPr lang="en-US" sz="2400" dirty="0">
-                <a:latin typeface="+mn-lt"/>
-              </a:rPr>
-              <a:t> e </a:t>
-            </a:r>
-            <a:r>
-              <a:rPr lang="en-US" sz="2400" dirty="0" err="1">
-                <a:latin typeface="+mn-lt"/>
-              </a:rPr>
-              <a:t>l’aumento</a:t>
-            </a:r>
-            <a:r>
-              <a:rPr lang="en-US" sz="2400" dirty="0">
-                <a:latin typeface="+mn-lt"/>
-              </a:rPr>
-              <a:t> del delay </a:t>
-            </a:r>
-            <a:r>
-              <a:rPr lang="en-US" sz="2400" dirty="0" err="1">
-                <a:latin typeface="+mn-lt"/>
-              </a:rPr>
-              <a:t>tra</a:t>
-            </a:r>
-            <a:r>
-              <a:rPr lang="en-US" sz="2400" dirty="0">
-                <a:latin typeface="+mn-lt"/>
-              </a:rPr>
-              <a:t> il </a:t>
-            </a:r>
-            <a:r>
-              <a:rPr lang="en-US" sz="2400" dirty="0" err="1">
-                <a:latin typeface="+mn-lt"/>
-              </a:rPr>
-              <a:t>segnale</a:t>
-            </a:r>
-            <a:r>
-              <a:rPr lang="en-US" sz="2400" dirty="0">
-                <a:latin typeface="+mn-lt"/>
-              </a:rPr>
-              <a:t> </a:t>
-            </a:r>
-            <a:r>
-              <a:rPr lang="en-US" sz="2400" dirty="0" err="1">
-                <a:latin typeface="+mn-lt"/>
-              </a:rPr>
-              <a:t>originale</a:t>
-            </a:r>
-            <a:r>
-              <a:rPr lang="en-US" sz="2400" dirty="0">
-                <a:latin typeface="+mn-lt"/>
-              </a:rPr>
-              <a:t> e filtrate.</a:t>
-            </a:r>
-          </a:p>
-          <a:p>
-            <a:pPr marL="469900" indent="-469900" eaLnBrk="0" hangingPunct="0">
-              <a:spcBef>
-                <a:spcPct val="20000"/>
-              </a:spcBef>
-              <a:buClr>
-                <a:schemeClr val="accent2"/>
-              </a:buClr>
-              <a:buFont typeface="Wingdings" panose="05000000000000000000" pitchFamily="2" charset="2"/>
-              <a:buChar char="o"/>
-            </a:pPr>
-            <a:r>
-              <a:rPr lang="en-US" sz="2400" dirty="0">
-                <a:latin typeface="+mn-lt"/>
-              </a:rPr>
-              <a:t>Tutto </a:t>
-            </a:r>
-            <a:r>
-              <a:rPr lang="en-US" sz="2400" dirty="0" err="1">
-                <a:latin typeface="+mn-lt"/>
-              </a:rPr>
-              <a:t>fatto</a:t>
-            </a:r>
-            <a:r>
-              <a:rPr lang="en-US" sz="2400" dirty="0">
-                <a:latin typeface="+mn-lt"/>
-              </a:rPr>
-              <a:t> con </a:t>
-            </a:r>
-            <a:r>
-              <a:rPr lang="it-IT" sz="2400" dirty="0" err="1">
-                <a:latin typeface="+mn-lt"/>
-              </a:rPr>
-              <a:t>SNRdB</a:t>
-            </a:r>
-            <a:r>
-              <a:rPr lang="it-IT" sz="2400" dirty="0">
-                <a:latin typeface="+mn-lt"/>
-              </a:rPr>
-              <a:t>=0</a:t>
-            </a:r>
-            <a:endParaRPr lang="en-US" sz="2400" dirty="0">
-              <a:latin typeface="+mn-lt"/>
-            </a:endParaRPr>
-          </a:p>
-          <a:p>
-            <a:pPr marL="469900" indent="-469900" eaLnBrk="0" hangingPunct="0">
-              <a:spcBef>
-                <a:spcPct val="20000"/>
-              </a:spcBef>
-              <a:buClr>
-                <a:schemeClr val="accent2"/>
-              </a:buClr>
-              <a:buFont typeface="Wingdings" panose="05000000000000000000" pitchFamily="2" charset="2"/>
-              <a:buChar char="o"/>
-            </a:pPr>
-            <a:endParaRPr lang="en-US" sz="2400" dirty="0">
-              <a:latin typeface="+mn-lt"/>
-            </a:endParaRPr>
-          </a:p>
-        </p:txBody>
-      </p:sp>
-      <p:sp>
-        <p:nvSpPr>
           <p:cNvPr id="14" name="Date Placeholder 4">
             <a:extLst>
               <a:ext uri="{FF2B5EF4-FFF2-40B4-BE49-F238E27FC236}">
@@ -6799,14 +6413,14 @@
           <p:nvPr>
             <p:extLst>
               <p:ext uri="{D42A27DB-BD31-4B8C-83A1-F6EECF244321}">
-                <p14:modId xmlns:p14="http://schemas.microsoft.com/office/powerpoint/2010/main" val="900278948"/>
+                <p14:modId xmlns:p14="http://schemas.microsoft.com/office/powerpoint/2010/main" val="1486277343"/>
               </p:ext>
             </p:extLst>
           </p:nvPr>
         </p:nvGraphicFramePr>
         <p:xfrm>
-          <a:off x="863600" y="1652206"/>
-          <a:ext cx="8128000" cy="1483360"/>
+          <a:off x="1184544" y="1448779"/>
+          <a:ext cx="9822912" cy="2925324"/>
         </p:xfrm>
         <a:graphic>
           <a:graphicData uri="http://schemas.openxmlformats.org/drawingml/2006/table">
@@ -6815,28 +6429,28 @@
                 <a:tableStyleId>{93296810-A885-4BE3-A3E7-6D5BEEA58F35}</a:tableStyleId>
               </a:tblPr>
               <a:tblGrid>
-                <a:gridCol w="2032000">
+                <a:gridCol w="2455728">
                   <a:extLst>
                     <a:ext uri="{9D8B030D-6E8A-4147-A177-3AD203B41FA5}">
                       <a16:colId xmlns:a16="http://schemas.microsoft.com/office/drawing/2014/main" val="203863937"/>
                     </a:ext>
                   </a:extLst>
                 </a:gridCol>
-                <a:gridCol w="2032000">
+                <a:gridCol w="2455728">
                   <a:extLst>
                     <a:ext uri="{9D8B030D-6E8A-4147-A177-3AD203B41FA5}">
                       <a16:colId xmlns:a16="http://schemas.microsoft.com/office/drawing/2014/main" val="3444426539"/>
                     </a:ext>
                   </a:extLst>
                 </a:gridCol>
-                <a:gridCol w="2032000">
+                <a:gridCol w="2455728">
                   <a:extLst>
                     <a:ext uri="{9D8B030D-6E8A-4147-A177-3AD203B41FA5}">
                       <a16:colId xmlns:a16="http://schemas.microsoft.com/office/drawing/2014/main" val="153527608"/>
                     </a:ext>
                   </a:extLst>
                 </a:gridCol>
-                <a:gridCol w="2032000">
+                <a:gridCol w="2455728">
                   <a:extLst>
                     <a:ext uri="{9D8B030D-6E8A-4147-A177-3AD203B41FA5}">
                       <a16:colId xmlns:a16="http://schemas.microsoft.com/office/drawing/2014/main" val="1077454714"/>
@@ -6844,63 +6458,76 @@
                   </a:extLst>
                 </a:gridCol>
               </a:tblGrid>
-              <a:tr h="370840">
+              <a:tr h="731331">
                 <a:tc>
                   <a:txBody>
                     <a:bodyPr/>
                     <a:lstStyle/>
                     <a:p>
+                      <a:pPr algn="ctr"/>
                       <a:r>
                         <a:rPr lang="it-IT" dirty="0"/>
                         <a:t>NFIFO</a:t>
                       </a:r>
                     </a:p>
                   </a:txBody>
-                  <a:tcPr/>
+                  <a:tcPr anchor="ctr"/>
                 </a:tc>
                 <a:tc>
                   <a:txBody>
                     <a:bodyPr/>
                     <a:lstStyle/>
                     <a:p>
+                      <a:pPr algn="ctr"/>
                       <a:r>
                         <a:rPr lang="it-IT" dirty="0"/>
                         <a:t>SNR  </a:t>
                       </a:r>
                     </a:p>
                   </a:txBody>
-                  <a:tcPr/>
+                  <a:tcPr anchor="ctr"/>
                 </a:tc>
                 <a:tc>
                   <a:txBody>
                     <a:bodyPr/>
                     <a:lstStyle/>
                     <a:p>
+                      <a:pPr algn="ctr"/>
                       <a:r>
                         <a:rPr lang="it-IT" dirty="0"/>
                         <a:t>Delay </a:t>
                       </a:r>
                       <a:r>
                         <a:rPr lang="it-IT" sz="1200" dirty="0"/>
-                        <a:t>colpi Clock</a:t>
+                        <a:t>(clock </a:t>
+                      </a:r>
+                      <a:r>
+                        <a:rPr lang="it-IT" sz="1200" dirty="0" err="1"/>
+                        <a:t>cycles</a:t>
+                      </a:r>
+                      <a:r>
+                        <a:rPr lang="it-IT" sz="1200" dirty="0"/>
+                        <a:t>)</a:t>
                       </a:r>
                       <a:endParaRPr lang="it-IT" dirty="0"/>
                     </a:p>
                   </a:txBody>
-                  <a:tcPr/>
+                  <a:tcPr anchor="ctr"/>
                 </a:tc>
                 <a:tc>
                   <a:txBody>
                     <a:bodyPr/>
                     <a:lstStyle/>
                     <a:p>
+                      <a:pPr algn="ctr"/>
                       <a:r>
-                        <a:rPr lang="it-IT" dirty="0"/>
-                        <a:t>ampiezza</a:t>
+                        <a:rPr lang="it-IT" dirty="0" err="1"/>
+                        <a:t>Amplitude</a:t>
                       </a:r>
+                      <a:endParaRPr lang="it-IT" dirty="0"/>
                     </a:p>
                   </a:txBody>
-                  <a:tcPr/>
+                  <a:tcPr anchor="ctr"/>
                 </a:tc>
                 <a:extLst>
                   <a:ext uri="{0D108BD9-81ED-4DB2-BD59-A6C34878D82A}">
@@ -6908,58 +6535,62 @@
                   </a:ext>
                 </a:extLst>
               </a:tr>
-              <a:tr h="370840">
+              <a:tr h="731331">
                 <a:tc>
                   <a:txBody>
                     <a:bodyPr/>
                     <a:lstStyle/>
                     <a:p>
+                      <a:pPr algn="ctr"/>
                       <a:r>
                         <a:rPr lang="it-IT" dirty="0"/>
                         <a:t>32</a:t>
                       </a:r>
                     </a:p>
                   </a:txBody>
-                  <a:tcPr/>
+                  <a:tcPr anchor="ctr"/>
                 </a:tc>
                 <a:tc>
                   <a:txBody>
                     <a:bodyPr/>
                     <a:lstStyle/>
                     <a:p>
+                      <a:pPr algn="ctr"/>
                       <a:r>
                         <a:rPr lang="it-IT" dirty="0"/>
                         <a:t>8,63</a:t>
                       </a:r>
                     </a:p>
                   </a:txBody>
-                  <a:tcPr/>
+                  <a:tcPr anchor="ctr"/>
                 </a:tc>
                 <a:tc>
                   <a:txBody>
                     <a:bodyPr/>
                     <a:lstStyle/>
                     <a:p>
+                      <a:pPr algn="ctr"/>
                       <a:r>
                         <a:rPr lang="it-IT" dirty="0"/>
                         <a:t>34</a:t>
                       </a:r>
                     </a:p>
                   </a:txBody>
-                  <a:tcPr/>
+                  <a:tcPr anchor="ctr"/>
                 </a:tc>
                 <a:tc>
                   <a:txBody>
                     <a:bodyPr/>
                     <a:lstStyle/>
                     <a:p>
+                      <a:pPr algn="ctr"/>
                       <a:r>
                         <a:rPr lang="it-IT" dirty="0"/>
                         <a:t>110</a:t>
                       </a:r>
                     </a:p>
                   </a:txBody>
-                  <a:tcPr/>
+                  <a:tcPr anchor="ctr"/>
                 </a:tc>
                 <a:extLst>
                   <a:ext uri="{0D108BD9-81ED-4DB2-BD59-A6C34878D82A}">
@@ -6967,58 +6598,62 @@
                   </a:ext>
                 </a:extLst>
               </a:tr>
-              <a:tr h="370840">
+              <a:tr h="731331">
                 <a:tc>
                   <a:txBody>
                     <a:bodyPr/>
                     <a:lstStyle/>
                     <a:p>
+                      <a:pPr algn="ctr"/>
                       <a:r>
                         <a:rPr lang="it-IT" dirty="0"/>
                         <a:t>64</a:t>
                       </a:r>
                     </a:p>
                   </a:txBody>
-                  <a:tcPr/>
+                  <a:tcPr anchor="ctr"/>
                 </a:tc>
                 <a:tc>
                   <a:txBody>
                     <a:bodyPr/>
                     <a:lstStyle/>
                     <a:p>
+                      <a:pPr algn="ctr"/>
                       <a:r>
                         <a:rPr lang="it-IT" dirty="0"/>
                         <a:t>7,30</a:t>
                       </a:r>
                     </a:p>
                   </a:txBody>
-                  <a:tcPr/>
+                  <a:tcPr anchor="ctr"/>
                 </a:tc>
                 <a:tc>
                   <a:txBody>
                     <a:bodyPr/>
                     <a:lstStyle/>
                     <a:p>
+                      <a:pPr algn="ctr"/>
                       <a:r>
                         <a:rPr lang="it-IT" dirty="0"/>
                         <a:t>66</a:t>
                       </a:r>
                     </a:p>
                   </a:txBody>
-                  <a:tcPr/>
+                  <a:tcPr anchor="ctr"/>
                 </a:tc>
                 <a:tc>
                   <a:txBody>
                     <a:bodyPr/>
                     <a:lstStyle/>
                     <a:p>
+                      <a:pPr algn="ctr"/>
                       <a:r>
                         <a:rPr lang="it-IT" dirty="0"/>
                         <a:t>100</a:t>
                       </a:r>
                     </a:p>
                   </a:txBody>
-                  <a:tcPr/>
+                  <a:tcPr anchor="ctr"/>
                 </a:tc>
                 <a:extLst>
                   <a:ext uri="{0D108BD9-81ED-4DB2-BD59-A6C34878D82A}">
@@ -7026,58 +6661,62 @@
                   </a:ext>
                 </a:extLst>
               </a:tr>
-              <a:tr h="370840">
+              <a:tr h="731331">
                 <a:tc>
                   <a:txBody>
                     <a:bodyPr/>
                     <a:lstStyle/>
                     <a:p>
+                      <a:pPr algn="ctr"/>
                       <a:r>
                         <a:rPr lang="it-IT" dirty="0"/>
                         <a:t>128</a:t>
                       </a:r>
                     </a:p>
                   </a:txBody>
-                  <a:tcPr/>
+                  <a:tcPr anchor="ctr"/>
                 </a:tc>
                 <a:tc>
                   <a:txBody>
                     <a:bodyPr/>
                     <a:lstStyle/>
                     <a:p>
+                      <a:pPr algn="ctr"/>
                       <a:r>
                         <a:rPr lang="it-IT" dirty="0"/>
                         <a:t>5,25</a:t>
                       </a:r>
                     </a:p>
                   </a:txBody>
-                  <a:tcPr/>
+                  <a:tcPr anchor="ctr"/>
                 </a:tc>
                 <a:tc>
                   <a:txBody>
                     <a:bodyPr/>
                     <a:lstStyle/>
                     <a:p>
+                      <a:pPr algn="ctr"/>
                       <a:r>
                         <a:rPr lang="it-IT" dirty="0"/>
                         <a:t>130</a:t>
                       </a:r>
                     </a:p>
                   </a:txBody>
-                  <a:tcPr/>
+                  <a:tcPr anchor="ctr"/>
                 </a:tc>
                 <a:tc>
                   <a:txBody>
                     <a:bodyPr/>
                     <a:lstStyle/>
                     <a:p>
+                      <a:pPr algn="ctr"/>
                       <a:r>
                         <a:rPr lang="it-IT" dirty="0"/>
                         <a:t>80</a:t>
                       </a:r>
                     </a:p>
                   </a:txBody>
-                  <a:tcPr/>
+                  <a:tcPr anchor="ctr"/>
                 </a:tc>
                 <a:extLst>
                   <a:ext uri="{0D108BD9-81ED-4DB2-BD59-A6C34878D82A}">
@@ -7089,6 +6728,113 @@
           </a:graphicData>
         </a:graphic>
       </p:graphicFrame>
+      <p:sp>
+        <p:nvSpPr>
+          <p:cNvPr id="5" name="TextBox 8">
+            <a:extLst>
+              <a:ext uri="{FF2B5EF4-FFF2-40B4-BE49-F238E27FC236}">
+                <a16:creationId xmlns:a16="http://schemas.microsoft.com/office/drawing/2014/main" id="{6DA9E496-5CD1-0D26-A171-0A081E1FE5E7}"/>
+              </a:ext>
+            </a:extLst>
+          </p:cNvPr>
+          <p:cNvSpPr txBox="1"/>
+          <p:nvPr/>
+        </p:nvSpPr>
+        <p:spPr>
+          <a:xfrm>
+            <a:off x="766232" y="4464115"/>
+            <a:ext cx="10728857" cy="1477328"/>
+          </a:xfrm>
+          <a:prstGeom prst="rect">
+            <a:avLst/>
+          </a:prstGeom>
+          <a:noFill/>
+        </p:spPr>
+        <p:txBody>
+          <a:bodyPr wrap="square" rtlCol="0">
+            <a:spAutoFit/>
+          </a:bodyPr>
+          <a:lstStyle/>
+          <a:p>
+            <a:endParaRPr lang="en-GB" sz="1800" b="1" dirty="0">
+              <a:solidFill>
+                <a:srgbClr val="0000FF"/>
+              </a:solidFill>
+            </a:endParaRPr>
+          </a:p>
+          <a:p>
+            <a:pPr marL="342900" indent="-342900">
+              <a:buFont typeface="Wingdings" panose="05000000000000000000" pitchFamily="2" charset="2"/>
+              <a:buChar char="q"/>
+            </a:pPr>
+            <a:r>
+              <a:rPr lang="en-GB" sz="1800" b="1" dirty="0">
+                <a:solidFill>
+                  <a:srgbClr val="0000FF"/>
+                </a:solidFill>
+              </a:rPr>
+              <a:t>With the variation of NFIFO we get an improvement in SNR, but there are also unwanted regressions in the amplitude and delay</a:t>
+            </a:r>
+          </a:p>
+          <a:p>
+            <a:pPr marL="342900" indent="-342900">
+              <a:buFont typeface="Wingdings" panose="05000000000000000000" pitchFamily="2" charset="2"/>
+              <a:buChar char="q"/>
+            </a:pPr>
+            <a:endParaRPr lang="en-GB" sz="1800" b="1" dirty="0">
+              <a:solidFill>
+                <a:srgbClr val="0000FF"/>
+              </a:solidFill>
+            </a:endParaRPr>
+          </a:p>
+          <a:p>
+            <a:pPr marL="342900" indent="-342900">
+              <a:buFont typeface="Wingdings" panose="05000000000000000000" pitchFamily="2" charset="2"/>
+              <a:buChar char="q"/>
+            </a:pPr>
+            <a:r>
+              <a:rPr lang="en-GB" sz="1800" b="1" dirty="0">
+                <a:solidFill>
+                  <a:srgbClr val="0000FF"/>
+                </a:solidFill>
+              </a:rPr>
+              <a:t>All the tests were done with the </a:t>
+            </a:r>
+            <a:r>
+              <a:rPr lang="en-GB" sz="1800" b="1" dirty="0" err="1">
+                <a:solidFill>
+                  <a:srgbClr val="0000FF"/>
+                </a:solidFill>
+              </a:rPr>
+              <a:t>Matlab</a:t>
+            </a:r>
+            <a:r>
+              <a:rPr lang="en-GB" sz="1800" b="1" dirty="0">
+                <a:solidFill>
+                  <a:srgbClr val="0000FF"/>
+                </a:solidFill>
+              </a:rPr>
+              <a:t> variable </a:t>
+            </a:r>
+            <a:r>
+              <a:rPr lang="en-GB" sz="1800" b="1" dirty="0" err="1">
+                <a:solidFill>
+                  <a:srgbClr val="0000FF"/>
+                </a:solidFill>
+              </a:rPr>
+              <a:t>SNRdb</a:t>
+            </a:r>
+            <a:r>
+              <a:rPr lang="en-GB" sz="1800" b="1" dirty="0">
+                <a:solidFill>
+                  <a:srgbClr val="0000FF"/>
+                </a:solidFill>
+              </a:rPr>
+              <a:t> = 0</a:t>
+            </a:r>
+          </a:p>
+        </p:txBody>
+      </p:sp>
     </p:spTree>
     <p:extLst>
       <p:ext uri="{BB962C8B-B14F-4D97-AF65-F5344CB8AC3E}">
@@ -7233,7 +6979,7 @@
         <p:spPr>
           <a:xfrm>
             <a:off x="650343" y="1268760"/>
-            <a:ext cx="10728857" cy="646331"/>
+            <a:ext cx="10728857" cy="1200329"/>
           </a:xfrm>
           <a:prstGeom prst="rect">
             <a:avLst/>
@@ -7251,135 +6997,26 @@
               <a:buChar char="q"/>
             </a:pPr>
             <a:r>
-              <a:rPr lang="en-GB" sz="1800" b="1" dirty="0" err="1">
-                <a:solidFill>
-                  <a:srgbClr val="0000FF"/>
-                </a:solidFill>
-              </a:rPr>
-              <a:t>Abiamo</a:t>
-            </a:r>
-            <a:r>
               <a:rPr lang="en-GB" sz="1800" b="1" dirty="0">
                 <a:solidFill>
                   <a:srgbClr val="0000FF"/>
                 </a:solidFill>
               </a:rPr>
-              <a:t> </a:t>
-            </a:r>
-            <a:r>
-              <a:rPr lang="en-GB" sz="1800" b="1" dirty="0" err="1">
-                <a:solidFill>
-                  <a:srgbClr val="0000FF"/>
-                </a:solidFill>
-              </a:rPr>
-              <a:t>realizzato</a:t>
-            </a:r>
+              <a:t>We concluded that having a filter that cleans more noise can also attenuate the original signal, so it’s not always better</a:t>
+            </a:r>
+          </a:p>
+          <a:p>
+            <a:pPr marL="342900" indent="-342900">
+              <a:buFont typeface="Wingdings" panose="05000000000000000000" pitchFamily="2" charset="2"/>
+              <a:buChar char="q"/>
+            </a:pPr>
             <a:r>
               <a:rPr lang="en-GB" sz="1800" b="1" dirty="0">
                 <a:solidFill>
                   <a:srgbClr val="0000FF"/>
                 </a:solidFill>
               </a:rPr>
-              <a:t> come non sempre un </a:t>
-            </a:r>
-            <a:r>
-              <a:rPr lang="en-GB" sz="1800" b="1" dirty="0" err="1">
-                <a:solidFill>
-                  <a:srgbClr val="0000FF"/>
-                </a:solidFill>
-              </a:rPr>
-              <a:t>filtraggio</a:t>
-            </a:r>
-            <a:r>
-              <a:rPr lang="en-GB" sz="1800" b="1" dirty="0">
-                <a:solidFill>
-                  <a:srgbClr val="0000FF"/>
-                </a:solidFill>
-              </a:rPr>
-              <a:t> con minor </a:t>
-            </a:r>
-            <a:r>
-              <a:rPr lang="en-GB" sz="1800" b="1" dirty="0" err="1">
-                <a:solidFill>
-                  <a:srgbClr val="0000FF"/>
-                </a:solidFill>
-              </a:rPr>
-              <a:t>rumore</a:t>
-            </a:r>
-            <a:r>
-              <a:rPr lang="en-GB" sz="1800" b="1" dirty="0">
-                <a:solidFill>
-                  <a:srgbClr val="0000FF"/>
-                </a:solidFill>
-              </a:rPr>
-              <a:t> </a:t>
-            </a:r>
-            <a:r>
-              <a:rPr lang="en-GB" sz="1800" b="1" dirty="0" err="1">
-                <a:solidFill>
-                  <a:srgbClr val="0000FF"/>
-                </a:solidFill>
-              </a:rPr>
-              <a:t>sia</a:t>
-            </a:r>
-            <a:r>
-              <a:rPr lang="en-GB" sz="1800" b="1" dirty="0">
-                <a:solidFill>
-                  <a:srgbClr val="0000FF"/>
-                </a:solidFill>
-              </a:rPr>
-              <a:t> </a:t>
-            </a:r>
-            <a:r>
-              <a:rPr lang="en-GB" sz="1800" b="1" dirty="0" err="1">
-                <a:solidFill>
-                  <a:srgbClr val="0000FF"/>
-                </a:solidFill>
-              </a:rPr>
-              <a:t>meglio</a:t>
-            </a:r>
-            <a:endParaRPr lang="en-GB" sz="1800" b="1" dirty="0">
-              <a:solidFill>
-                <a:srgbClr val="0000FF"/>
-              </a:solidFill>
-            </a:endParaRPr>
-          </a:p>
-          <a:p>
-            <a:pPr marL="342900" indent="-342900">
-              <a:buFont typeface="Wingdings" panose="05000000000000000000" pitchFamily="2" charset="2"/>
-              <a:buChar char="q"/>
-            </a:pPr>
-            <a:r>
-              <a:rPr lang="en-GB" sz="1800" b="1" dirty="0" err="1">
-                <a:solidFill>
-                  <a:srgbClr val="0000FF"/>
-                </a:solidFill>
-              </a:rPr>
-              <a:t>Modifiche</a:t>
-            </a:r>
-            <a:r>
-              <a:rPr lang="en-GB" sz="1800" b="1" dirty="0">
-                <a:solidFill>
-                  <a:srgbClr val="0000FF"/>
-                </a:solidFill>
-              </a:rPr>
-              <a:t> </a:t>
-            </a:r>
-            <a:r>
-              <a:rPr lang="en-GB" sz="1800" b="1" dirty="0" err="1">
-                <a:solidFill>
-                  <a:srgbClr val="0000FF"/>
-                </a:solidFill>
-              </a:rPr>
-              <a:t>apportate</a:t>
-            </a:r>
-            <a:r>
-              <a:rPr lang="en-GB" sz="1800" b="1" dirty="0">
-                <a:solidFill>
-                  <a:srgbClr val="0000FF"/>
-                </a:solidFill>
-              </a:rPr>
-              <a:t> extra: EMA(</a:t>
+              <a:t>We tried implementing an EMA (</a:t>
             </a:r>
             <a:r>
               <a:rPr lang="it-IT" sz="1800" b="1" dirty="0" err="1">
@@ -7427,7 +7064,7 @@
                   <a:srgbClr val="0000FF"/>
                 </a:solidFill>
               </a:rPr>
-              <a:t> )</a:t>
+              <a:t>) filter to reduce the delay</a:t>
             </a:r>
             <a:endParaRPr lang="en-GB" sz="1800" b="1" dirty="0">
               <a:solidFill>
@@ -7459,7 +7096,7 @@
         </p:blipFill>
         <p:spPr>
           <a:xfrm>
-            <a:off x="470375" y="2241783"/>
+            <a:off x="470375" y="2525230"/>
             <a:ext cx="4742279" cy="3359114"/>
           </a:xfrm>
           <a:prstGeom prst="rect">
@@ -7489,7 +7126,7 @@
         </p:blipFill>
         <p:spPr>
           <a:xfrm>
-            <a:off x="5468857" y="2240874"/>
+            <a:off x="5285910" y="2544252"/>
             <a:ext cx="6537486" cy="3321070"/>
           </a:xfrm>
           <a:prstGeom prst="rect">
@@ -7512,7 +7149,7 @@
 </file>
 
 <file path=ppt/slides/slide2.xml><?xml version="1.0" encoding="utf-8"?>
-<p:sld xmlns:a="http://schemas.openxmlformats.org/drawingml/2006/main" xmlns:r="http://schemas.openxmlformats.org/officeDocument/2006/relationships" xmlns:p="http://schemas.openxmlformats.org/presentationml/2006/main">
+<p:sld xmlns:a="http://schemas.openxmlformats.org/drawingml/2006/main" xmlns:r="http://schemas.openxmlformats.org/officeDocument/2006/relationships" xmlns:p="http://schemas.openxmlformats.org/presentationml/2006/main" show="0">
   <p:cSld>
     <p:spTree>
       <p:nvGrpSpPr>
@@ -8115,7 +7752,7 @@
                   <a:srgbClr val="0000FF"/>
                 </a:solidFill>
               </a:rPr>
-              <a:t> = bit resolution of signal</a:t>
+              <a:t> = bit resolution of the original signal</a:t>
             </a:r>
           </a:p>
           <a:p>
@@ -8125,7 +7762,7 @@
                   <a:srgbClr val="0000FF"/>
                 </a:solidFill>
               </a:rPr>
-              <a:t>log2NFIFO = number of elements in the FIFO</a:t>
+              <a:t>log2NFIFO = log2 of the number of elements in the FIFO</a:t>
             </a:r>
           </a:p>
         </p:txBody>
@@ -8158,8 +7795,8 @@
         </p:blipFill>
         <p:spPr>
           <a:xfrm>
-            <a:off x="6986084" y="1313765"/>
-            <a:ext cx="4509005" cy="4681381"/>
+            <a:off x="7356140" y="1313766"/>
+            <a:ext cx="4138949" cy="4297178"/>
           </a:xfrm>
           <a:prstGeom prst="rect">
             <a:avLst/>
@@ -9297,7 +8934,7 @@
                   <a:srgbClr val="0000FF"/>
                 </a:solidFill>
               </a:rPr>
-              <a:t>We test the Accumulator using a counter and seeing if the output is delayed by a clock</a:t>
+              <a:t>We test the Accumulator using a counter and seeing if the output is delayed by a clock cycle</a:t>
             </a:r>
           </a:p>
           <a:p>
@@ -11254,15 +10891,6 @@
 </file>
 
 <file path=customXml/item1.xml><?xml version="1.0" encoding="utf-8"?>
-<?mso-contentType ?>
-<FormTemplates xmlns="http://schemas.microsoft.com/sharepoint/v3/contenttype/forms">
-  <Display>DocumentLibraryForm</Display>
-  <Edit>DocumentLibraryForm</Edit>
-  <New>DocumentLibraryForm</New>
-</FormTemplates>
-</file>
-
-<file path=customXml/item2.xml><?xml version="1.0" encoding="utf-8"?>
 <ct:contentTypeSchema xmlns:ct="http://schemas.microsoft.com/office/2006/metadata/contentType" xmlns:ma="http://schemas.microsoft.com/office/2006/metadata/properties/metaAttributes" ct:_="" ma:_="" ma:contentTypeName="Documento" ma:contentTypeID="0x01010009A656CF8C467741A56A16B7574AC68E" ma:contentTypeVersion="12" ma:contentTypeDescription="Creare un nuovo documento." ma:contentTypeScope="" ma:versionID="4f27b0f6ef663e5da5bafac1efc6fe9a">
   <xsd:schema xmlns:xsd="http://www.w3.org/2001/XMLSchema" xmlns:xs="http://www.w3.org/2001/XMLSchema" xmlns:p="http://schemas.microsoft.com/office/2006/metadata/properties" xmlns:ns3="d81608ca-db68-4891-9f53-9b89cbfff5c6" xmlns:ns4="be3c09a5-e964-4602-bd74-bbf48e0fabf1" targetNamespace="http://schemas.microsoft.com/office/2006/metadata/properties" ma:root="true" ma:fieldsID="8a6d6b69e42fa993b1c0a33dd1bd5a45" ns3:_="" ns4:_="">
     <xsd:import namespace="d81608ca-db68-4891-9f53-9b89cbfff5c6"/>
@@ -11477,6 +11105,15 @@
 </ct:contentTypeSchema>
 </file>
 
+<file path=customXml/item2.xml><?xml version="1.0" encoding="utf-8"?>
+<?mso-contentType ?>
+<FormTemplates xmlns="http://schemas.microsoft.com/sharepoint/v3/contenttype/forms">
+  <Display>DocumentLibraryForm</Display>
+  <Edit>DocumentLibraryForm</Edit>
+  <New>DocumentLibraryForm</New>
+</FormTemplates>
+</file>
+
 <file path=customXml/item3.xml><?xml version="1.0" encoding="utf-8"?>
 <p:properties xmlns:p="http://schemas.microsoft.com/office/2006/metadata/properties" xmlns:xsi="http://www.w3.org/2001/XMLSchema-instance" xmlns:pc="http://schemas.microsoft.com/office/infopath/2007/PartnerControls">
   <documentManagement>
@@ -11486,14 +11123,6 @@
 </file>
 
 <file path=customXml/itemProps1.xml><?xml version="1.0" encoding="utf-8"?>
-<ds:datastoreItem xmlns:ds="http://schemas.openxmlformats.org/officeDocument/2006/customXml" ds:itemID="{6E8D78F2-F211-4F79-8A63-15AEAF64F23A}">
-  <ds:schemaRefs>
-    <ds:schemaRef ds:uri="http://schemas.microsoft.com/sharepoint/v3/contenttype/forms"/>
-  </ds:schemaRefs>
-</ds:datastoreItem>
-</file>
-
-<file path=customXml/itemProps2.xml><?xml version="1.0" encoding="utf-8"?>
 <ds:datastoreItem xmlns:ds="http://schemas.openxmlformats.org/officeDocument/2006/customXml" ds:itemID="{AC7A1D52-4C7C-4BE2-BA1D-9D952C857EA1}">
   <ds:schemaRefs>
     <ds:schemaRef ds:uri="http://schemas.microsoft.com/office/2006/metadata/contentType"/>
@@ -11508,6 +11137,14 @@
     <ds:schemaRef ds:uri="http://purl.org/dc/elements/1.1/"/>
     <ds:schemaRef ds:uri="http://purl.org/dc/terms/"/>
     <ds:schemaRef ds:uri="http://schemas.microsoft.com/internal/obd"/>
+  </ds:schemaRefs>
+</ds:datastoreItem>
+</file>
+
+<file path=customXml/itemProps2.xml><?xml version="1.0" encoding="utf-8"?>
+<ds:datastoreItem xmlns:ds="http://schemas.openxmlformats.org/officeDocument/2006/customXml" ds:itemID="{6E8D78F2-F211-4F79-8A63-15AEAF64F23A}">
+  <ds:schemaRefs>
+    <ds:schemaRef ds:uri="http://schemas.microsoft.com/sharepoint/v3/contenttype/forms"/>
   </ds:schemaRefs>
 </ds:datastoreItem>
 </file>

--- a/Documentazione.pptx
+++ b/Documentazione.pptx
@@ -7500,6 +7500,42 @@
           <a:chExt cx="0" cy="0"/>
         </a:xfrm>
       </p:grpSpPr>
+      <p:pic>
+        <p:nvPicPr>
+          <p:cNvPr id="6" name="Immagine 5">
+            <a:extLst>
+              <a:ext uri="{FF2B5EF4-FFF2-40B4-BE49-F238E27FC236}">
+                <a16:creationId xmlns:a16="http://schemas.microsoft.com/office/drawing/2014/main" id="{1B2342F2-74E5-D67A-68CB-6C1C654614C6}"/>
+              </a:ext>
+            </a:extLst>
+          </p:cNvPr>
+          <p:cNvPicPr>
+            <a:picLocks noChangeAspect="1"/>
+          </p:cNvPicPr>
+          <p:nvPr/>
+        </p:nvPicPr>
+        <p:blipFill>
+          <a:blip r:embed="rId2">
+            <a:extLst>
+              <a:ext uri="{28A0092B-C50C-407E-A947-70E740481C1C}">
+                <a14:useLocalDpi xmlns:a14="http://schemas.microsoft.com/office/drawing/2010/main" val="0"/>
+              </a:ext>
+            </a:extLst>
+          </a:blip>
+          <a:stretch>
+            <a:fillRect/>
+          </a:stretch>
+        </p:blipFill>
+        <p:spPr>
+          <a:xfrm>
+            <a:off x="8026400" y="2302981"/>
+            <a:ext cx="3468689" cy="3601294"/>
+          </a:xfrm>
+          <a:prstGeom prst="rect">
+            <a:avLst/>
+          </a:prstGeom>
+        </p:spPr>
+      </p:pic>
       <p:sp>
         <p:nvSpPr>
           <p:cNvPr id="2" name="Title 1">
@@ -7769,10 +7805,10 @@
       </p:sp>
       <p:pic>
         <p:nvPicPr>
-          <p:cNvPr id="6" name="Immagine 5">
+          <p:cNvPr id="12" name="Immagine 11">
             <a:extLst>
               <a:ext uri="{FF2B5EF4-FFF2-40B4-BE49-F238E27FC236}">
-                <a16:creationId xmlns:a16="http://schemas.microsoft.com/office/drawing/2014/main" id="{1B2342F2-74E5-D67A-68CB-6C1C654614C6}"/>
+                <a16:creationId xmlns:a16="http://schemas.microsoft.com/office/drawing/2014/main" id="{0E68B671-E4AF-080B-ED57-3E7BCDC4AE4A}"/>
               </a:ext>
             </a:extLst>
           </p:cNvPr>
@@ -7782,7 +7818,7 @@
           <p:nvPr/>
         </p:nvPicPr>
         <p:blipFill>
-          <a:blip r:embed="rId2">
+          <a:blip r:embed="rId3">
             <a:extLst>
               <a:ext uri="{28A0092B-C50C-407E-A947-70E740481C1C}">
                 <a14:useLocalDpi xmlns:a14="http://schemas.microsoft.com/office/drawing/2010/main" val="0"/>
@@ -7795,8 +7831,8 @@
         </p:blipFill>
         <p:spPr>
           <a:xfrm>
-            <a:off x="7356140" y="1313766"/>
-            <a:ext cx="4138949" cy="4297178"/>
+            <a:off x="1358100" y="1270912"/>
+            <a:ext cx="5187950" cy="2518128"/>
           </a:xfrm>
           <a:prstGeom prst="rect">
             <a:avLst/>
@@ -7805,10 +7841,10 @@
       </p:pic>
       <p:pic>
         <p:nvPicPr>
-          <p:cNvPr id="12" name="Immagine 11">
+          <p:cNvPr id="7" name="Immagine 6">
             <a:extLst>
               <a:ext uri="{FF2B5EF4-FFF2-40B4-BE49-F238E27FC236}">
-                <a16:creationId xmlns:a16="http://schemas.microsoft.com/office/drawing/2014/main" id="{0E68B671-E4AF-080B-ED57-3E7BCDC4AE4A}"/>
+                <a16:creationId xmlns:a16="http://schemas.microsoft.com/office/drawing/2014/main" id="{9E8A2BEB-8015-D303-01DA-C1F127C60C91}"/>
               </a:ext>
             </a:extLst>
           </p:cNvPr>
@@ -7818,7 +7854,7 @@
           <p:nvPr/>
         </p:nvPicPr>
         <p:blipFill>
-          <a:blip r:embed="rId3">
+          <a:blip r:embed="rId4">
             <a:extLst>
               <a:ext uri="{28A0092B-C50C-407E-A947-70E740481C1C}">
                 <a14:useLocalDpi xmlns:a14="http://schemas.microsoft.com/office/drawing/2010/main" val="0"/>
@@ -7831,8 +7867,8 @@
         </p:blipFill>
         <p:spPr>
           <a:xfrm>
-            <a:off x="1100445" y="1223755"/>
-            <a:ext cx="5187950" cy="2518128"/>
+            <a:off x="8026400" y="1133745"/>
+            <a:ext cx="3352800" cy="1084391"/>
           </a:xfrm>
           <a:prstGeom prst="rect">
             <a:avLst/>
@@ -10891,6 +10927,15 @@
 </file>
 
 <file path=customXml/item1.xml><?xml version="1.0" encoding="utf-8"?>
+<?mso-contentType ?>
+<FormTemplates xmlns="http://schemas.microsoft.com/sharepoint/v3/contenttype/forms">
+  <Display>DocumentLibraryForm</Display>
+  <Edit>DocumentLibraryForm</Edit>
+  <New>DocumentLibraryForm</New>
+</FormTemplates>
+</file>
+
+<file path=customXml/item2.xml><?xml version="1.0" encoding="utf-8"?>
 <ct:contentTypeSchema xmlns:ct="http://schemas.microsoft.com/office/2006/metadata/contentType" xmlns:ma="http://schemas.microsoft.com/office/2006/metadata/properties/metaAttributes" ct:_="" ma:_="" ma:contentTypeName="Documento" ma:contentTypeID="0x01010009A656CF8C467741A56A16B7574AC68E" ma:contentTypeVersion="12" ma:contentTypeDescription="Creare un nuovo documento." ma:contentTypeScope="" ma:versionID="4f27b0f6ef663e5da5bafac1efc6fe9a">
   <xsd:schema xmlns:xsd="http://www.w3.org/2001/XMLSchema" xmlns:xs="http://www.w3.org/2001/XMLSchema" xmlns:p="http://schemas.microsoft.com/office/2006/metadata/properties" xmlns:ns3="d81608ca-db68-4891-9f53-9b89cbfff5c6" xmlns:ns4="be3c09a5-e964-4602-bd74-bbf48e0fabf1" targetNamespace="http://schemas.microsoft.com/office/2006/metadata/properties" ma:root="true" ma:fieldsID="8a6d6b69e42fa993b1c0a33dd1bd5a45" ns3:_="" ns4:_="">
     <xsd:import namespace="d81608ca-db68-4891-9f53-9b89cbfff5c6"/>
@@ -11105,15 +11150,6 @@
 </ct:contentTypeSchema>
 </file>
 
-<file path=customXml/item2.xml><?xml version="1.0" encoding="utf-8"?>
-<?mso-contentType ?>
-<FormTemplates xmlns="http://schemas.microsoft.com/sharepoint/v3/contenttype/forms">
-  <Display>DocumentLibraryForm</Display>
-  <Edit>DocumentLibraryForm</Edit>
-  <New>DocumentLibraryForm</New>
-</FormTemplates>
-</file>
-
 <file path=customXml/item3.xml><?xml version="1.0" encoding="utf-8"?>
 <p:properties xmlns:p="http://schemas.microsoft.com/office/2006/metadata/properties" xmlns:xsi="http://www.w3.org/2001/XMLSchema-instance" xmlns:pc="http://schemas.microsoft.com/office/infopath/2007/PartnerControls">
   <documentManagement>
@@ -11123,6 +11159,14 @@
 </file>
 
 <file path=customXml/itemProps1.xml><?xml version="1.0" encoding="utf-8"?>
+<ds:datastoreItem xmlns:ds="http://schemas.openxmlformats.org/officeDocument/2006/customXml" ds:itemID="{6E8D78F2-F211-4F79-8A63-15AEAF64F23A}">
+  <ds:schemaRefs>
+    <ds:schemaRef ds:uri="http://schemas.microsoft.com/sharepoint/v3/contenttype/forms"/>
+  </ds:schemaRefs>
+</ds:datastoreItem>
+</file>
+
+<file path=customXml/itemProps2.xml><?xml version="1.0" encoding="utf-8"?>
 <ds:datastoreItem xmlns:ds="http://schemas.openxmlformats.org/officeDocument/2006/customXml" ds:itemID="{AC7A1D52-4C7C-4BE2-BA1D-9D952C857EA1}">
   <ds:schemaRefs>
     <ds:schemaRef ds:uri="http://schemas.microsoft.com/office/2006/metadata/contentType"/>
@@ -11137,14 +11181,6 @@
     <ds:schemaRef ds:uri="http://purl.org/dc/elements/1.1/"/>
     <ds:schemaRef ds:uri="http://purl.org/dc/terms/"/>
     <ds:schemaRef ds:uri="http://schemas.microsoft.com/internal/obd"/>
-  </ds:schemaRefs>
-</ds:datastoreItem>
-</file>
-
-<file path=customXml/itemProps2.xml><?xml version="1.0" encoding="utf-8"?>
-<ds:datastoreItem xmlns:ds="http://schemas.openxmlformats.org/officeDocument/2006/customXml" ds:itemID="{6E8D78F2-F211-4F79-8A63-15AEAF64F23A}">
-  <ds:schemaRefs>
-    <ds:schemaRef ds:uri="http://schemas.microsoft.com/sharepoint/v3/contenttype/forms"/>
   </ds:schemaRefs>
 </ds:datastoreItem>
 </file>
